--- a/Projet_GREMLIN_Presentation.pptx
+++ b/Projet_GREMLIN_Presentation.pptx
@@ -17,6 +17,7 @@
     <p:sldId id="265" r:id="rId16"/>
     <p:sldId id="266" r:id="rId17"/>
     <p:sldId id="267" r:id="rId18"/>
+    <p:sldId id="268" r:id="rId19"/>
   </p:sldIdLst>
   <p:sldSz cx="12191695" cy="6858000" type="screen4x3"/>
   <p:notesSz cx="6858000" cy="9144000"/>
@@ -3159,7 +3160,7 @@
         </p:nvSpPr>
         <p:spPr>
           <a:xfrm>
-            <a:off x="0" y="2788920"/>
+            <a:off x="0" y="2743200"/>
             <a:ext cx="12191695" cy="38100"/>
           </a:xfrm>
           <a:prstGeom prst="rect">
@@ -3247,7 +3248,7 @@
         </p:nvSpPr>
         <p:spPr>
           <a:xfrm>
-            <a:off x="914400" y="822960"/>
+            <a:off x="914400" y="868680"/>
             <a:ext cx="10058400" cy="457200"/>
           </a:xfrm>
           <a:prstGeom prst="rect">
@@ -3286,7 +3287,7 @@
         </p:nvSpPr>
         <p:spPr>
           <a:xfrm>
-            <a:off x="914400" y="1371600"/>
+            <a:off x="914400" y="1417320"/>
             <a:ext cx="10515600" cy="1463040"/>
           </a:xfrm>
           <a:prstGeom prst="rect">
@@ -3325,7 +3326,7 @@
         </p:nvSpPr>
         <p:spPr>
           <a:xfrm>
-            <a:off x="914400" y="2971800"/>
+            <a:off x="914400" y="2926080"/>
             <a:ext cx="10515600" cy="1097280"/>
           </a:xfrm>
           <a:prstGeom prst="rect">
@@ -3380,8 +3381,8 @@
         </p:nvSpPr>
         <p:spPr>
           <a:xfrm>
-            <a:off x="914400" y="5212080"/>
-            <a:ext cx="10515600" cy="1188720"/>
+            <a:off x="914400" y="5577840"/>
+            <a:ext cx="10515600" cy="548640"/>
           </a:xfrm>
           <a:prstGeom prst="rect">
             <a:avLst/>
@@ -3400,29 +3401,13 @@
               </a:spcBef>
             </a:pPr>
             <a:r>
-              <a:rPr sz="1400" b="0" i="0">
+              <a:rPr sz="1300" b="0" i="0">
                 <a:solidFill>
                   <a:srgbClr val="9FBAD6"/>
                 </a:solidFill>
                 <a:latin typeface="Calibri"/>
               </a:rPr>
-              <a:t>Scénario · Organigramme des tâches · Planning · Budget · Risques · Pilotage</a:t>
-            </a:r>
-          </a:p>
-          <a:p>
-            <a:pPr algn="l">
-              <a:spcBef>
-                <a:spcPts val="1000"/>
-              </a:spcBef>
-            </a:pPr>
-            <a:r>
-              <a:rPr sz="1300" b="0" i="0">
-                <a:solidFill>
-                  <a:srgbClr val="9FBAD6"/>
-                </a:solidFill>
-                <a:latin typeface="Calibri"/>
-              </a:rPr>
-              <a:t>Chargé de projet — 17 juin 2026</a:t>
+              <a:t>Chef de projet — 17 juin 2026</a:t>
             </a:r>
           </a:p>
         </p:txBody>
@@ -3549,7 +3534,7 @@
         </p:nvSpPr>
         <p:spPr>
           <a:xfrm>
-            <a:off x="502920" y="146304"/>
+            <a:off x="502920" y="164592"/>
             <a:ext cx="10515600" cy="320040"/>
           </a:xfrm>
           <a:prstGeom prst="rect">
@@ -3575,7 +3560,7 @@
                 </a:solidFill>
                 <a:latin typeface="Calibri"/>
               </a:rPr>
-              <a:t>LIVRABLE 5</a:t>
+              <a:t>5 · BUDGET</a:t>
             </a:r>
           </a:p>
         </p:txBody>
@@ -3588,7 +3573,7 @@
         </p:nvSpPr>
         <p:spPr>
           <a:xfrm>
-            <a:off x="502920" y="411480"/>
+            <a:off x="502920" y="420624"/>
             <a:ext cx="11155680" cy="640080"/>
           </a:xfrm>
           <a:prstGeom prst="rect">
@@ -3614,7 +3599,7 @@
                 </a:solidFill>
                 <a:latin typeface="Calibri"/>
               </a:rPr>
-              <a:t>Analyse des risques</a:t>
+              <a:t>Courbe en « S »</a:t>
             </a:r>
           </a:p>
         </p:txBody>
@@ -3653,7 +3638,7 @@
                 </a:solidFill>
                 <a:latin typeface="Calibri"/>
               </a:rPr>
-              <a:t>Projet GREMLIN — Soutenance</a:t>
+              <a:t>Projet GREMLIN — Phase de préparation</a:t>
             </a:r>
           </a:p>
         </p:txBody>
@@ -3692,14 +3677,53 @@
                 </a:solidFill>
                 <a:latin typeface="Calibri"/>
               </a:rPr>
-              <a:t>10</a:t>
+              <a:t>9</a:t>
+            </a:r>
+          </a:p>
+        </p:txBody>
+      </p:sp>
+      <p:sp>
+        <p:nvSpPr>
+          <p:cNvPr id="8" name="TextBox 7"/>
+          <p:cNvSpPr txBox="1"/>
+          <p:nvPr/>
+        </p:nvSpPr>
+        <p:spPr>
+          <a:xfrm>
+            <a:off x="548640" y="1371600"/>
+            <a:ext cx="11064240" cy="548640"/>
+          </a:xfrm>
+          <a:prstGeom prst="rect">
+            <a:avLst/>
+          </a:prstGeom>
+          <a:noFill/>
+        </p:spPr>
+        <p:txBody>
+          <a:bodyPr wrap="square" anchor="t" lIns="0" rIns="0" tIns="0" bIns="0">
+            <a:spAutoFit/>
+          </a:bodyPr>
+          <a:lstStyle/>
+          <a:p>
+            <a:pPr algn="l">
+              <a:spcBef>
+                <a:spcPts val="0"/>
+              </a:spcBef>
+            </a:pPr>
+            <a:r>
+              <a:rPr sz="1550" b="0" i="0">
+                <a:solidFill>
+                  <a:srgbClr val="404040"/>
+                </a:solidFill>
+                <a:latin typeface="Calibri"/>
+              </a:rPr>
+              <a:t>Dépenses cumulées au fil du planning : la courbe franchit l’enveloppe en fin de phase (le dépassement de 1 436 €).</a:t>
             </a:r>
           </a:p>
         </p:txBody>
       </p:sp>
       <p:pic>
         <p:nvPicPr>
-          <p:cNvPr id="8" name="Picture 7" descr="matrice_risques.png"/>
+          <p:cNvPr id="9" name="Picture 8" descr="courbe_s.png"/>
           <p:cNvPicPr>
             <a:picLocks noChangeAspect="1"/>
           </p:cNvPicPr>
@@ -3713,608 +3737,14 @@
         </p:blipFill>
         <p:spPr>
           <a:xfrm>
-            <a:off x="457200" y="1554480"/>
-            <a:ext cx="5858168" cy="4572000"/>
+            <a:off x="2514447" y="1965960"/>
+            <a:ext cx="7162800" cy="4297680"/>
           </a:xfrm>
           <a:prstGeom prst="rect">
             <a:avLst/>
           </a:prstGeom>
         </p:spPr>
       </p:pic>
-      <p:sp>
-        <p:nvSpPr>
-          <p:cNvPr id="9" name="TextBox 8"/>
-          <p:cNvSpPr txBox="1"/>
-          <p:nvPr/>
-        </p:nvSpPr>
-        <p:spPr>
-          <a:xfrm>
-            <a:off x="7498079" y="1554480"/>
-            <a:ext cx="4206240" cy="457200"/>
-          </a:xfrm>
-          <a:prstGeom prst="rect">
-            <a:avLst/>
-          </a:prstGeom>
-          <a:noFill/>
-        </p:spPr>
-        <p:txBody>
-          <a:bodyPr wrap="square" anchor="t" lIns="0" rIns="0" tIns="0" bIns="0">
-            <a:spAutoFit/>
-          </a:bodyPr>
-          <a:lstStyle/>
-          <a:p>
-            <a:pPr algn="l">
-              <a:spcBef>
-                <a:spcPts val="0"/>
-              </a:spcBef>
-            </a:pPr>
-            <a:r>
-              <a:rPr sz="1600" b="1" i="0">
-                <a:solidFill>
-                  <a:srgbClr val="1F4E79"/>
-                </a:solidFill>
-                <a:latin typeface="Calibri"/>
-              </a:rPr>
-              <a:t>3 risques prioritaires (criticité ≥ 9)</a:t>
-            </a:r>
-          </a:p>
-        </p:txBody>
-      </p:sp>
-      <p:sp>
-        <p:nvSpPr>
-          <p:cNvPr id="10" name="Rounded Rectangle 9"/>
-          <p:cNvSpPr/>
-          <p:nvPr/>
-        </p:nvSpPr>
-        <p:spPr>
-          <a:xfrm>
-            <a:off x="7498079" y="2148840"/>
-            <a:ext cx="4206240" cy="960120"/>
-          </a:xfrm>
-          <a:prstGeom prst="roundRect">
-            <a:avLst/>
-          </a:prstGeom>
-          <a:solidFill>
-            <a:srgbClr val="EAF1F8"/>
-          </a:solidFill>
-          <a:ln>
-            <a:noFill/>
-          </a:ln>
-          <a:effectLst/>
-        </p:spPr>
-        <p:style>
-          <a:lnRef idx="1">
-            <a:schemeClr val="accent1"/>
-          </a:lnRef>
-          <a:fillRef idx="3">
-            <a:schemeClr val="accent1"/>
-          </a:fillRef>
-          <a:effectRef idx="2">
-            <a:schemeClr val="accent1"/>
-          </a:effectRef>
-          <a:fontRef idx="minor">
-            <a:schemeClr val="lt1"/>
-          </a:fontRef>
-        </p:style>
-        <p:txBody>
-          <a:bodyPr rtlCol="0" anchor="ctr"/>
-          <a:lstStyle/>
-          <a:p>
-            <a:pPr algn="ctr"/>
-          </a:p>
-        </p:txBody>
-      </p:sp>
-      <p:sp>
-        <p:nvSpPr>
-          <p:cNvPr id="11" name="Rectangle 10"/>
-          <p:cNvSpPr/>
-          <p:nvPr/>
-        </p:nvSpPr>
-        <p:spPr>
-          <a:xfrm>
-            <a:off x="7498079" y="2148840"/>
-            <a:ext cx="146304" cy="960120"/>
-          </a:xfrm>
-          <a:prstGeom prst="rect">
-            <a:avLst/>
-          </a:prstGeom>
-          <a:solidFill>
-            <a:srgbClr val="C0392B"/>
-          </a:solidFill>
-          <a:ln>
-            <a:noFill/>
-          </a:ln>
-          <a:effectLst/>
-        </p:spPr>
-        <p:style>
-          <a:lnRef idx="1">
-            <a:schemeClr val="accent1"/>
-          </a:lnRef>
-          <a:fillRef idx="3">
-            <a:schemeClr val="accent1"/>
-          </a:fillRef>
-          <a:effectRef idx="2">
-            <a:schemeClr val="accent1"/>
-          </a:effectRef>
-          <a:fontRef idx="minor">
-            <a:schemeClr val="lt1"/>
-          </a:fontRef>
-        </p:style>
-        <p:txBody>
-          <a:bodyPr rtlCol="0" anchor="ctr"/>
-          <a:lstStyle/>
-          <a:p>
-            <a:pPr algn="ctr"/>
-          </a:p>
-        </p:txBody>
-      </p:sp>
-      <p:sp>
-        <p:nvSpPr>
-          <p:cNvPr id="12" name="TextBox 11"/>
-          <p:cNvSpPr txBox="1"/>
-          <p:nvPr/>
-        </p:nvSpPr>
-        <p:spPr>
-          <a:xfrm>
-            <a:off x="7726679" y="2240280"/>
-            <a:ext cx="2926080" cy="822960"/>
-          </a:xfrm>
-          <a:prstGeom prst="rect">
-            <a:avLst/>
-          </a:prstGeom>
-          <a:noFill/>
-        </p:spPr>
-        <p:txBody>
-          <a:bodyPr wrap="square" anchor="t" lIns="0" rIns="0" tIns="0" bIns="0">
-            <a:spAutoFit/>
-          </a:bodyPr>
-          <a:lstStyle/>
-          <a:p>
-            <a:pPr algn="l">
-              <a:spcBef>
-                <a:spcPts val="0"/>
-              </a:spcBef>
-              <a:spcAft>
-                <a:spcPts val="200"/>
-              </a:spcAft>
-            </a:pPr>
-            <a:r>
-              <a:rPr sz="1400" b="1" i="0">
-                <a:solidFill>
-                  <a:srgbClr val="C0392B"/>
-                </a:solidFill>
-                <a:latin typeface="Calibri"/>
-              </a:rPr>
-              <a:t>R1</a:t>
-            </a:r>
-          </a:p>
-          <a:p>
-            <a:pPr algn="l">
-              <a:spcBef>
-                <a:spcPts val="0"/>
-              </a:spcBef>
-            </a:pPr>
-            <a:r>
-              <a:rPr sz="1250" b="0" i="0">
-                <a:solidFill>
-                  <a:srgbClr val="404040"/>
-                </a:solidFill>
-                <a:latin typeface="Calibri"/>
-              </a:rPr>
-              <a:t>Retard de fabrication des pièces (tâche H)</a:t>
-            </a:r>
-          </a:p>
-        </p:txBody>
-      </p:sp>
-      <p:sp>
-        <p:nvSpPr>
-          <p:cNvPr id="13" name="TextBox 12"/>
-          <p:cNvSpPr txBox="1"/>
-          <p:nvPr/>
-        </p:nvSpPr>
-        <p:spPr>
-          <a:xfrm>
-            <a:off x="10698480" y="2350008"/>
-            <a:ext cx="868680" cy="548640"/>
-          </a:xfrm>
-          <a:prstGeom prst="rect">
-            <a:avLst/>
-          </a:prstGeom>
-          <a:noFill/>
-        </p:spPr>
-        <p:txBody>
-          <a:bodyPr wrap="square" anchor="t" lIns="0" rIns="0" tIns="0" bIns="0">
-            <a:spAutoFit/>
-          </a:bodyPr>
-          <a:lstStyle/>
-          <a:p>
-            <a:pPr algn="ctr">
-              <a:spcBef>
-                <a:spcPts val="0"/>
-              </a:spcBef>
-            </a:pPr>
-            <a:r>
-              <a:rPr sz="2200" b="1" i="0">
-                <a:solidFill>
-                  <a:srgbClr val="C0392B"/>
-                </a:solidFill>
-                <a:latin typeface="Calibri"/>
-              </a:rPr>
-              <a:t>12</a:t>
-            </a:r>
-          </a:p>
-        </p:txBody>
-      </p:sp>
-      <p:sp>
-        <p:nvSpPr>
-          <p:cNvPr id="14" name="Rounded Rectangle 13"/>
-          <p:cNvSpPr/>
-          <p:nvPr/>
-        </p:nvSpPr>
-        <p:spPr>
-          <a:xfrm>
-            <a:off x="7498079" y="3246120"/>
-            <a:ext cx="4206240" cy="960120"/>
-          </a:xfrm>
-          <a:prstGeom prst="roundRect">
-            <a:avLst/>
-          </a:prstGeom>
-          <a:solidFill>
-            <a:srgbClr val="EAF1F8"/>
-          </a:solidFill>
-          <a:ln>
-            <a:noFill/>
-          </a:ln>
-          <a:effectLst/>
-        </p:spPr>
-        <p:style>
-          <a:lnRef idx="1">
-            <a:schemeClr val="accent1"/>
-          </a:lnRef>
-          <a:fillRef idx="3">
-            <a:schemeClr val="accent1"/>
-          </a:fillRef>
-          <a:effectRef idx="2">
-            <a:schemeClr val="accent1"/>
-          </a:effectRef>
-          <a:fontRef idx="minor">
-            <a:schemeClr val="lt1"/>
-          </a:fontRef>
-        </p:style>
-        <p:txBody>
-          <a:bodyPr rtlCol="0" anchor="ctr"/>
-          <a:lstStyle/>
-          <a:p>
-            <a:pPr algn="ctr"/>
-          </a:p>
-        </p:txBody>
-      </p:sp>
-      <p:sp>
-        <p:nvSpPr>
-          <p:cNvPr id="15" name="Rectangle 14"/>
-          <p:cNvSpPr/>
-          <p:nvPr/>
-        </p:nvSpPr>
-        <p:spPr>
-          <a:xfrm>
-            <a:off x="7498079" y="3246120"/>
-            <a:ext cx="146304" cy="960120"/>
-          </a:xfrm>
-          <a:prstGeom prst="rect">
-            <a:avLst/>
-          </a:prstGeom>
-          <a:solidFill>
-            <a:srgbClr val="E67E22"/>
-          </a:solidFill>
-          <a:ln>
-            <a:noFill/>
-          </a:ln>
-          <a:effectLst/>
-        </p:spPr>
-        <p:style>
-          <a:lnRef idx="1">
-            <a:schemeClr val="accent1"/>
-          </a:lnRef>
-          <a:fillRef idx="3">
-            <a:schemeClr val="accent1"/>
-          </a:fillRef>
-          <a:effectRef idx="2">
-            <a:schemeClr val="accent1"/>
-          </a:effectRef>
-          <a:fontRef idx="minor">
-            <a:schemeClr val="lt1"/>
-          </a:fontRef>
-        </p:style>
-        <p:txBody>
-          <a:bodyPr rtlCol="0" anchor="ctr"/>
-          <a:lstStyle/>
-          <a:p>
-            <a:pPr algn="ctr"/>
-          </a:p>
-        </p:txBody>
-      </p:sp>
-      <p:sp>
-        <p:nvSpPr>
-          <p:cNvPr id="16" name="TextBox 15"/>
-          <p:cNvSpPr txBox="1"/>
-          <p:nvPr/>
-        </p:nvSpPr>
-        <p:spPr>
-          <a:xfrm>
-            <a:off x="7726679" y="3337560"/>
-            <a:ext cx="2926080" cy="822960"/>
-          </a:xfrm>
-          <a:prstGeom prst="rect">
-            <a:avLst/>
-          </a:prstGeom>
-          <a:noFill/>
-        </p:spPr>
-        <p:txBody>
-          <a:bodyPr wrap="square" anchor="t" lIns="0" rIns="0" tIns="0" bIns="0">
-            <a:spAutoFit/>
-          </a:bodyPr>
-          <a:lstStyle/>
-          <a:p>
-            <a:pPr algn="l">
-              <a:spcBef>
-                <a:spcPts val="0"/>
-              </a:spcBef>
-              <a:spcAft>
-                <a:spcPts val="200"/>
-              </a:spcAft>
-            </a:pPr>
-            <a:r>
-              <a:rPr sz="1400" b="1" i="0">
-                <a:solidFill>
-                  <a:srgbClr val="E67E22"/>
-                </a:solidFill>
-                <a:latin typeface="Calibri"/>
-              </a:rPr>
-              <a:t>R2</a:t>
-            </a:r>
-          </a:p>
-          <a:p>
-            <a:pPr algn="l">
-              <a:spcBef>
-                <a:spcPts val="0"/>
-              </a:spcBef>
-            </a:pPr>
-            <a:r>
-              <a:rPr sz="1250" b="0" i="0">
-                <a:solidFill>
-                  <a:srgbClr val="404040"/>
-                </a:solidFill>
-                <a:latin typeface="Calibri"/>
-              </a:rPr>
-              <a:t>Modifs logiciels dans un délai serré</a:t>
-            </a:r>
-          </a:p>
-        </p:txBody>
-      </p:sp>
-      <p:sp>
-        <p:nvSpPr>
-          <p:cNvPr id="17" name="TextBox 16"/>
-          <p:cNvSpPr txBox="1"/>
-          <p:nvPr/>
-        </p:nvSpPr>
-        <p:spPr>
-          <a:xfrm>
-            <a:off x="10698480" y="3447288"/>
-            <a:ext cx="868680" cy="548640"/>
-          </a:xfrm>
-          <a:prstGeom prst="rect">
-            <a:avLst/>
-          </a:prstGeom>
-          <a:noFill/>
-        </p:spPr>
-        <p:txBody>
-          <a:bodyPr wrap="square" anchor="t" lIns="0" rIns="0" tIns="0" bIns="0">
-            <a:spAutoFit/>
-          </a:bodyPr>
-          <a:lstStyle/>
-          <a:p>
-            <a:pPr algn="ctr">
-              <a:spcBef>
-                <a:spcPts val="0"/>
-              </a:spcBef>
-            </a:pPr>
-            <a:r>
-              <a:rPr sz="2200" b="1" i="0">
-                <a:solidFill>
-                  <a:srgbClr val="E67E22"/>
-                </a:solidFill>
-                <a:latin typeface="Calibri"/>
-              </a:rPr>
-              <a:t>9</a:t>
-            </a:r>
-          </a:p>
-        </p:txBody>
-      </p:sp>
-      <p:sp>
-        <p:nvSpPr>
-          <p:cNvPr id="18" name="Rounded Rectangle 17"/>
-          <p:cNvSpPr/>
-          <p:nvPr/>
-        </p:nvSpPr>
-        <p:spPr>
-          <a:xfrm>
-            <a:off x="7498079" y="4343400"/>
-            <a:ext cx="4206240" cy="960120"/>
-          </a:xfrm>
-          <a:prstGeom prst="roundRect">
-            <a:avLst/>
-          </a:prstGeom>
-          <a:solidFill>
-            <a:srgbClr val="EAF1F8"/>
-          </a:solidFill>
-          <a:ln>
-            <a:noFill/>
-          </a:ln>
-          <a:effectLst/>
-        </p:spPr>
-        <p:style>
-          <a:lnRef idx="1">
-            <a:schemeClr val="accent1"/>
-          </a:lnRef>
-          <a:fillRef idx="3">
-            <a:schemeClr val="accent1"/>
-          </a:fillRef>
-          <a:effectRef idx="2">
-            <a:schemeClr val="accent1"/>
-          </a:effectRef>
-          <a:fontRef idx="minor">
-            <a:schemeClr val="lt1"/>
-          </a:fontRef>
-        </p:style>
-        <p:txBody>
-          <a:bodyPr rtlCol="0" anchor="ctr"/>
-          <a:lstStyle/>
-          <a:p>
-            <a:pPr algn="ctr"/>
-          </a:p>
-        </p:txBody>
-      </p:sp>
-      <p:sp>
-        <p:nvSpPr>
-          <p:cNvPr id="19" name="Rectangle 18"/>
-          <p:cNvSpPr/>
-          <p:nvPr/>
-        </p:nvSpPr>
-        <p:spPr>
-          <a:xfrm>
-            <a:off x="7498079" y="4343400"/>
-            <a:ext cx="146304" cy="960120"/>
-          </a:xfrm>
-          <a:prstGeom prst="rect">
-            <a:avLst/>
-          </a:prstGeom>
-          <a:solidFill>
-            <a:srgbClr val="E67E22"/>
-          </a:solidFill>
-          <a:ln>
-            <a:noFill/>
-          </a:ln>
-          <a:effectLst/>
-        </p:spPr>
-        <p:style>
-          <a:lnRef idx="1">
-            <a:schemeClr val="accent1"/>
-          </a:lnRef>
-          <a:fillRef idx="3">
-            <a:schemeClr val="accent1"/>
-          </a:fillRef>
-          <a:effectRef idx="2">
-            <a:schemeClr val="accent1"/>
-          </a:effectRef>
-          <a:fontRef idx="minor">
-            <a:schemeClr val="lt1"/>
-          </a:fontRef>
-        </p:style>
-        <p:txBody>
-          <a:bodyPr rtlCol="0" anchor="ctr"/>
-          <a:lstStyle/>
-          <a:p>
-            <a:pPr algn="ctr"/>
-          </a:p>
-        </p:txBody>
-      </p:sp>
-      <p:sp>
-        <p:nvSpPr>
-          <p:cNvPr id="20" name="TextBox 19"/>
-          <p:cNvSpPr txBox="1"/>
-          <p:nvPr/>
-        </p:nvSpPr>
-        <p:spPr>
-          <a:xfrm>
-            <a:off x="7726679" y="4434840"/>
-            <a:ext cx="2926080" cy="822960"/>
-          </a:xfrm>
-          <a:prstGeom prst="rect">
-            <a:avLst/>
-          </a:prstGeom>
-          <a:noFill/>
-        </p:spPr>
-        <p:txBody>
-          <a:bodyPr wrap="square" anchor="t" lIns="0" rIns="0" tIns="0" bIns="0">
-            <a:spAutoFit/>
-          </a:bodyPr>
-          <a:lstStyle/>
-          <a:p>
-            <a:pPr algn="l">
-              <a:spcBef>
-                <a:spcPts val="0"/>
-              </a:spcBef>
-              <a:spcAft>
-                <a:spcPts val="200"/>
-              </a:spcAft>
-            </a:pPr>
-            <a:r>
-              <a:rPr sz="1400" b="1" i="0">
-                <a:solidFill>
-                  <a:srgbClr val="E67E22"/>
-                </a:solidFill>
-                <a:latin typeface="Calibri"/>
-              </a:rPr>
-              <a:t>R7</a:t>
-            </a:r>
-          </a:p>
-          <a:p>
-            <a:pPr algn="l">
-              <a:spcBef>
-                <a:spcPts val="0"/>
-              </a:spcBef>
-            </a:pPr>
-            <a:r>
-              <a:rPr sz="1250" b="0" i="0">
-                <a:solidFill>
-                  <a:srgbClr val="404040"/>
-                </a:solidFill>
-                <a:latin typeface="Calibri"/>
-              </a:rPr>
-              <a:t>Aucune marge sur le chemin critique</a:t>
-            </a:r>
-          </a:p>
-        </p:txBody>
-      </p:sp>
-      <p:sp>
-        <p:nvSpPr>
-          <p:cNvPr id="21" name="TextBox 20"/>
-          <p:cNvSpPr txBox="1"/>
-          <p:nvPr/>
-        </p:nvSpPr>
-        <p:spPr>
-          <a:xfrm>
-            <a:off x="10698480" y="4544568"/>
-            <a:ext cx="868680" cy="548640"/>
-          </a:xfrm>
-          <a:prstGeom prst="rect">
-            <a:avLst/>
-          </a:prstGeom>
-          <a:noFill/>
-        </p:spPr>
-        <p:txBody>
-          <a:bodyPr wrap="square" anchor="t" lIns="0" rIns="0" tIns="0" bIns="0">
-            <a:spAutoFit/>
-          </a:bodyPr>
-          <a:lstStyle/>
-          <a:p>
-            <a:pPr algn="ctr">
-              <a:spcBef>
-                <a:spcPts val="0"/>
-              </a:spcBef>
-            </a:pPr>
-            <a:r>
-              <a:rPr sz="2200" b="1" i="0">
-                <a:solidFill>
-                  <a:srgbClr val="E67E22"/>
-                </a:solidFill>
-                <a:latin typeface="Calibri"/>
-              </a:rPr>
-              <a:t>9</a:t>
-            </a:r>
-          </a:p>
-        </p:txBody>
-      </p:sp>
     </p:spTree>
   </p:cSld>
   <p:clrMapOvr>
@@ -4437,7 +3867,7 @@
         </p:nvSpPr>
         <p:spPr>
           <a:xfrm>
-            <a:off x="502920" y="146304"/>
+            <a:off x="502920" y="164592"/>
             <a:ext cx="10515600" cy="320040"/>
           </a:xfrm>
           <a:prstGeom prst="rect">
@@ -4463,7 +3893,7 @@
                 </a:solidFill>
                 <a:latin typeface="Calibri"/>
               </a:rPr>
-              <a:t>LIVRABLE 6</a:t>
+              <a:t>6 · RISQUES</a:t>
             </a:r>
           </a:p>
         </p:txBody>
@@ -4476,7 +3906,7 @@
         </p:nvSpPr>
         <p:spPr>
           <a:xfrm>
-            <a:off x="502920" y="411480"/>
+            <a:off x="502920" y="420624"/>
             <a:ext cx="11155680" cy="640080"/>
           </a:xfrm>
           <a:prstGeom prst="rect">
@@ -4502,7 +3932,7 @@
                 </a:solidFill>
                 <a:latin typeface="Calibri"/>
               </a:rPr>
-              <a:t>Pilotage de la réalisation</a:t>
+              <a:t>Analyse des risques</a:t>
             </a:r>
           </a:p>
         </p:txBody>
@@ -4541,7 +3971,7 @@
                 </a:solidFill>
                 <a:latin typeface="Calibri"/>
               </a:rPr>
-              <a:t>Projet GREMLIN — Soutenance</a:t>
+              <a:t>Projet GREMLIN — Phase de préparation</a:t>
             </a:r>
           </a:p>
         </p:txBody>
@@ -4580,21 +4010,45 @@
                 </a:solidFill>
                 <a:latin typeface="Calibri"/>
               </a:rPr>
-              <a:t>11</a:t>
-            </a:r>
-          </a:p>
-        </p:txBody>
-      </p:sp>
-      <p:sp>
-        <p:nvSpPr>
-          <p:cNvPr id="8" name="TextBox 7"/>
-          <p:cNvSpPr txBox="1"/>
-          <p:nvPr/>
-        </p:nvSpPr>
-        <p:spPr>
-          <a:xfrm>
-            <a:off x="548640" y="1463040"/>
-            <a:ext cx="5486400" cy="457200"/>
+              <a:t>10</a:t>
+            </a:r>
+          </a:p>
+        </p:txBody>
+      </p:sp>
+      <p:pic>
+        <p:nvPicPr>
+          <p:cNvPr id="8" name="Picture 7" descr="matrice_risques.png"/>
+          <p:cNvPicPr>
+            <a:picLocks noChangeAspect="1"/>
+          </p:cNvPicPr>
+          <p:nvPr/>
+        </p:nvPicPr>
+        <p:blipFill>
+          <a:blip r:embed="rId2"/>
+          <a:stretch>
+            <a:fillRect/>
+          </a:stretch>
+        </p:blipFill>
+        <p:spPr>
+          <a:xfrm>
+            <a:off x="457200" y="1554480"/>
+            <a:ext cx="5858168" cy="4572000"/>
+          </a:xfrm>
+          <a:prstGeom prst="rect">
+            <a:avLst/>
+          </a:prstGeom>
+        </p:spPr>
+      </p:pic>
+      <p:sp>
+        <p:nvSpPr>
+          <p:cNvPr id="9" name="TextBox 8"/>
+          <p:cNvSpPr txBox="1"/>
+          <p:nvPr/>
+        </p:nvSpPr>
+        <p:spPr>
+          <a:xfrm>
+            <a:off x="7498079" y="1554480"/>
+            <a:ext cx="4206240" cy="457200"/>
           </a:xfrm>
           <a:prstGeom prst="rect">
             <a:avLst/>
@@ -4613,184 +4067,27 @@
               </a:spcBef>
             </a:pPr>
             <a:r>
-              <a:rPr sz="1700" b="1" i="0">
+              <a:rPr sz="1600" b="1" i="0">
                 <a:solidFill>
                   <a:srgbClr val="1F4E79"/>
                 </a:solidFill>
                 <a:latin typeface="Calibri"/>
               </a:rPr>
-              <a:t>Tenir le cap : suivi simple et réactif</a:t>
-            </a:r>
-          </a:p>
-        </p:txBody>
-      </p:sp>
-      <p:sp>
-        <p:nvSpPr>
-          <p:cNvPr id="9" name="TextBox 8"/>
-          <p:cNvSpPr txBox="1"/>
-          <p:nvPr/>
-        </p:nvSpPr>
-        <p:spPr>
-          <a:xfrm>
-            <a:off x="548640" y="2011680"/>
-            <a:ext cx="5852160" cy="3657600"/>
-          </a:xfrm>
-          <a:prstGeom prst="rect">
-            <a:avLst/>
-          </a:prstGeom>
-          <a:noFill/>
-        </p:spPr>
-        <p:txBody>
-          <a:bodyPr wrap="square" anchor="t" lIns="0" rIns="0" tIns="0" bIns="0">
-            <a:spAutoFit/>
-          </a:bodyPr>
-          <a:lstStyle/>
-          <a:p>
-            <a:pPr algn="l">
-              <a:spcBef>
-                <a:spcPts val="0"/>
-              </a:spcBef>
-              <a:spcAft>
-                <a:spcPts val="1100"/>
-              </a:spcAft>
-            </a:pPr>
-            <a:r>
-              <a:rPr sz="1550" b="0" i="0">
-                <a:solidFill>
-                  <a:srgbClr val="404040"/>
-                </a:solidFill>
-                <a:latin typeface="Calibri"/>
-              </a:rPr>
-              <a:t>•  Revues régulières avec le client, calées sur les jalons.</a:t>
-            </a:r>
-          </a:p>
-          <a:p>
-            <a:pPr algn="l">
-              <a:spcBef>
-                <a:spcPts val="0"/>
-              </a:spcBef>
-              <a:spcAft>
-                <a:spcPts val="1100"/>
-              </a:spcAft>
-            </a:pPr>
-            <a:r>
-              <a:rPr sz="1550" b="0" i="0">
-                <a:solidFill>
-                  <a:srgbClr val="404040"/>
-                </a:solidFill>
-                <a:latin typeface="Calibri"/>
-              </a:rPr>
-              <a:t>•  Mise à jour hebdomadaire du Gantt.</a:t>
-            </a:r>
-          </a:p>
-          <a:p>
-            <a:pPr algn="l">
-              <a:spcBef>
-                <a:spcPts val="0"/>
-              </a:spcBef>
-              <a:spcAft>
-                <a:spcPts val="1100"/>
-              </a:spcAft>
-            </a:pPr>
-            <a:r>
-              <a:rPr sz="1550" b="0" i="0">
-                <a:solidFill>
-                  <a:srgbClr val="404040"/>
-                </a:solidFill>
-                <a:latin typeface="Calibri"/>
-              </a:rPr>
-              <a:t>•  Surveillance prioritaire des tâches critiques (marge nulle).</a:t>
-            </a:r>
-          </a:p>
-          <a:p>
-            <a:pPr algn="l">
-              <a:spcBef>
-                <a:spcPts val="0"/>
-              </a:spcBef>
-              <a:spcAft>
-                <a:spcPts val="1100"/>
-              </a:spcAft>
-            </a:pPr>
-            <a:r>
-              <a:rPr sz="1550" b="0" i="0">
-                <a:solidFill>
-                  <a:srgbClr val="404040"/>
-                </a:solidFill>
-                <a:latin typeface="Calibri"/>
-              </a:rPr>
-              <a:t>•  Utiliser les marges « support » (8 j) et « appro » (3 j) comme amortisseur.</a:t>
-            </a:r>
-          </a:p>
-          <a:p>
-            <a:pPr algn="l">
-              <a:spcBef>
-                <a:spcPts val="0"/>
-              </a:spcBef>
-              <a:spcAft>
-                <a:spcPts val="1100"/>
-              </a:spcAft>
-            </a:pPr>
-            <a:r>
-              <a:rPr sz="1550" b="0" i="0">
-                <a:solidFill>
-                  <a:srgbClr val="404040"/>
-                </a:solidFill>
-                <a:latin typeface="Calibri"/>
-              </a:rPr>
-              <a:t>•  Suivi des dépenses vs courbe en S.</a:t>
-            </a:r>
-          </a:p>
-        </p:txBody>
-      </p:sp>
-      <p:sp>
-        <p:nvSpPr>
-          <p:cNvPr id="10" name="TextBox 9"/>
-          <p:cNvSpPr txBox="1"/>
-          <p:nvPr/>
-        </p:nvSpPr>
-        <p:spPr>
-          <a:xfrm>
-            <a:off x="6766560" y="1463040"/>
-            <a:ext cx="4937760" cy="457200"/>
-          </a:xfrm>
-          <a:prstGeom prst="rect">
-            <a:avLst/>
-          </a:prstGeom>
-          <a:noFill/>
-        </p:spPr>
-        <p:txBody>
-          <a:bodyPr wrap="square" anchor="t" lIns="0" rIns="0" tIns="0" bIns="0">
-            <a:spAutoFit/>
-          </a:bodyPr>
-          <a:lstStyle/>
-          <a:p>
-            <a:pPr algn="l">
-              <a:spcBef>
-                <a:spcPts val="0"/>
-              </a:spcBef>
-            </a:pPr>
-            <a:r>
-              <a:rPr sz="1700" b="1" i="0">
-                <a:solidFill>
-                  <a:srgbClr val="1F4E79"/>
-                </a:solidFill>
-                <a:latin typeface="Calibri"/>
-              </a:rPr>
-              <a:t>Jalons clés</a:t>
-            </a:r>
-          </a:p>
-        </p:txBody>
-      </p:sp>
-      <p:sp>
-        <p:nvSpPr>
-          <p:cNvPr id="11" name="Rounded Rectangle 10"/>
+              <a:t>3 risques prioritaires (criticité ≥ 9)</a:t>
+            </a:r>
+          </a:p>
+        </p:txBody>
+      </p:sp>
+      <p:sp>
+        <p:nvSpPr>
+          <p:cNvPr id="10" name="Rounded Rectangle 9"/>
           <p:cNvSpPr/>
           <p:nvPr/>
         </p:nvSpPr>
         <p:spPr>
           <a:xfrm>
-            <a:off x="6766560" y="2011680"/>
-            <a:ext cx="4937760" cy="603504"/>
+            <a:off x="7498079" y="2148840"/>
+            <a:ext cx="4206240" cy="960120"/>
           </a:xfrm>
           <a:prstGeom prst="roundRect">
             <a:avLst/>
@@ -4827,14 +4124,58 @@
       </p:sp>
       <p:sp>
         <p:nvSpPr>
+          <p:cNvPr id="11" name="Rectangle 10"/>
+          <p:cNvSpPr/>
+          <p:nvPr/>
+        </p:nvSpPr>
+        <p:spPr>
+          <a:xfrm>
+            <a:off x="7498079" y="2148840"/>
+            <a:ext cx="146304" cy="960120"/>
+          </a:xfrm>
+          <a:prstGeom prst="rect">
+            <a:avLst/>
+          </a:prstGeom>
+          <a:solidFill>
+            <a:srgbClr val="C0392B"/>
+          </a:solidFill>
+          <a:ln>
+            <a:noFill/>
+          </a:ln>
+          <a:effectLst/>
+        </p:spPr>
+        <p:style>
+          <a:lnRef idx="1">
+            <a:schemeClr val="accent1"/>
+          </a:lnRef>
+          <a:fillRef idx="3">
+            <a:schemeClr val="accent1"/>
+          </a:fillRef>
+          <a:effectRef idx="2">
+            <a:schemeClr val="accent1"/>
+          </a:effectRef>
+          <a:fontRef idx="minor">
+            <a:schemeClr val="lt1"/>
+          </a:fontRef>
+        </p:style>
+        <p:txBody>
+          <a:bodyPr rtlCol="0" anchor="ctr"/>
+          <a:lstStyle/>
+          <a:p>
+            <a:pPr algn="ctr"/>
+          </a:p>
+        </p:txBody>
+      </p:sp>
+      <p:sp>
+        <p:nvSpPr>
           <p:cNvPr id="12" name="TextBox 11"/>
           <p:cNvSpPr txBox="1"/>
           <p:nvPr/>
         </p:nvSpPr>
         <p:spPr>
           <a:xfrm>
-            <a:off x="6949440" y="2121408"/>
-            <a:ext cx="640080" cy="457200"/>
+            <a:off x="7726679" y="2240280"/>
+            <a:ext cx="2926080" cy="822960"/>
           </a:xfrm>
           <a:prstGeom prst="rect">
             <a:avLst/>
@@ -4851,15 +4192,34 @@
               <a:spcBef>
                 <a:spcPts val="0"/>
               </a:spcBef>
+              <a:spcAft>
+                <a:spcPts val="200"/>
+              </a:spcAft>
             </a:pPr>
             <a:r>
               <a:rPr sz="1400" b="1" i="0">
                 <a:solidFill>
-                  <a:srgbClr val="2E6BA8"/>
-                </a:solidFill>
-                <a:latin typeface="Calibri"/>
-              </a:rPr>
-              <a:t>J1</a:t>
+                  <a:srgbClr val="C0392B"/>
+                </a:solidFill>
+                <a:latin typeface="Calibri"/>
+              </a:rPr>
+              <a:t>R1</a:t>
+            </a:r>
+          </a:p>
+          <a:p>
+            <a:pPr algn="l">
+              <a:spcBef>
+                <a:spcPts val="0"/>
+              </a:spcBef>
+            </a:pPr>
+            <a:r>
+              <a:rPr sz="1250" b="0" i="0">
+                <a:solidFill>
+                  <a:srgbClr val="404040"/>
+                </a:solidFill>
+                <a:latin typeface="Calibri"/>
+              </a:rPr>
+              <a:t>Retard de fabrication des pièces (tâche H)</a:t>
             </a:r>
           </a:p>
         </p:txBody>
@@ -4872,86 +4232,47 @@
         </p:nvSpPr>
         <p:spPr>
           <a:xfrm>
-            <a:off x="7589520" y="2121408"/>
-            <a:ext cx="2926080" cy="457200"/>
-          </a:xfrm>
-          <a:prstGeom prst="rect">
-            <a:avLst/>
-          </a:prstGeom>
-          <a:noFill/>
-        </p:spPr>
-        <p:txBody>
-          <a:bodyPr wrap="square" anchor="t" lIns="0" rIns="0" tIns="0" bIns="0">
-            <a:spAutoFit/>
-          </a:bodyPr>
-          <a:lstStyle/>
-          <a:p>
-            <a:pPr algn="l">
-              <a:spcBef>
-                <a:spcPts val="0"/>
-              </a:spcBef>
-            </a:pPr>
-            <a:r>
-              <a:rPr sz="1400" b="0" i="0">
-                <a:solidFill>
-                  <a:srgbClr val="404040"/>
-                </a:solidFill>
-                <a:latin typeface="Calibri"/>
-              </a:rPr>
-              <a:t>Étude validée</a:t>
-            </a:r>
-          </a:p>
-        </p:txBody>
-      </p:sp>
-      <p:sp>
-        <p:nvSpPr>
-          <p:cNvPr id="14" name="TextBox 13"/>
-          <p:cNvSpPr txBox="1"/>
-          <p:nvPr/>
-        </p:nvSpPr>
-        <p:spPr>
-          <a:xfrm>
-            <a:off x="10607040" y="2121408"/>
-            <a:ext cx="914400" cy="457200"/>
-          </a:xfrm>
-          <a:prstGeom prst="rect">
-            <a:avLst/>
-          </a:prstGeom>
-          <a:noFill/>
-        </p:spPr>
-        <p:txBody>
-          <a:bodyPr wrap="square" anchor="t" lIns="0" rIns="0" tIns="0" bIns="0">
-            <a:spAutoFit/>
-          </a:bodyPr>
-          <a:lstStyle/>
-          <a:p>
-            <a:pPr algn="r">
-              <a:spcBef>
-                <a:spcPts val="0"/>
-              </a:spcBef>
-            </a:pPr>
-            <a:r>
-              <a:rPr sz="1400" b="1" i="0">
-                <a:solidFill>
-                  <a:srgbClr val="1F4E79"/>
-                </a:solidFill>
-                <a:latin typeface="Calibri"/>
-              </a:rPr>
-              <a:t>j10</a:t>
-            </a:r>
-          </a:p>
-        </p:txBody>
-      </p:sp>
-      <p:sp>
-        <p:nvSpPr>
-          <p:cNvPr id="15" name="Rounded Rectangle 14"/>
+            <a:off x="10698480" y="2350008"/>
+            <a:ext cx="868680" cy="548640"/>
+          </a:xfrm>
+          <a:prstGeom prst="rect">
+            <a:avLst/>
+          </a:prstGeom>
+          <a:noFill/>
+        </p:spPr>
+        <p:txBody>
+          <a:bodyPr wrap="square" anchor="t" lIns="0" rIns="0" tIns="0" bIns="0">
+            <a:spAutoFit/>
+          </a:bodyPr>
+          <a:lstStyle/>
+          <a:p>
+            <a:pPr algn="ctr">
+              <a:spcBef>
+                <a:spcPts val="0"/>
+              </a:spcBef>
+            </a:pPr>
+            <a:r>
+              <a:rPr sz="2200" b="1" i="0">
+                <a:solidFill>
+                  <a:srgbClr val="C0392B"/>
+                </a:solidFill>
+                <a:latin typeface="Calibri"/>
+              </a:rPr>
+              <a:t>12</a:t>
+            </a:r>
+          </a:p>
+        </p:txBody>
+      </p:sp>
+      <p:sp>
+        <p:nvSpPr>
+          <p:cNvPr id="14" name="Rounded Rectangle 13"/>
           <p:cNvSpPr/>
           <p:nvPr/>
         </p:nvSpPr>
         <p:spPr>
           <a:xfrm>
-            <a:off x="6766560" y="2724912"/>
-            <a:ext cx="4937760" cy="603504"/>
+            <a:off x="7498079" y="3246120"/>
+            <a:ext cx="4206240" cy="960120"/>
           </a:xfrm>
           <a:prstGeom prst="roundRect">
             <a:avLst/>
@@ -4988,14 +4309,58 @@
       </p:sp>
       <p:sp>
         <p:nvSpPr>
+          <p:cNvPr id="15" name="Rectangle 14"/>
+          <p:cNvSpPr/>
+          <p:nvPr/>
+        </p:nvSpPr>
+        <p:spPr>
+          <a:xfrm>
+            <a:off x="7498079" y="3246120"/>
+            <a:ext cx="146304" cy="960120"/>
+          </a:xfrm>
+          <a:prstGeom prst="rect">
+            <a:avLst/>
+          </a:prstGeom>
+          <a:solidFill>
+            <a:srgbClr val="E67E22"/>
+          </a:solidFill>
+          <a:ln>
+            <a:noFill/>
+          </a:ln>
+          <a:effectLst/>
+        </p:spPr>
+        <p:style>
+          <a:lnRef idx="1">
+            <a:schemeClr val="accent1"/>
+          </a:lnRef>
+          <a:fillRef idx="3">
+            <a:schemeClr val="accent1"/>
+          </a:fillRef>
+          <a:effectRef idx="2">
+            <a:schemeClr val="accent1"/>
+          </a:effectRef>
+          <a:fontRef idx="minor">
+            <a:schemeClr val="lt1"/>
+          </a:fontRef>
+        </p:style>
+        <p:txBody>
+          <a:bodyPr rtlCol="0" anchor="ctr"/>
+          <a:lstStyle/>
+          <a:p>
+            <a:pPr algn="ctr"/>
+          </a:p>
+        </p:txBody>
+      </p:sp>
+      <p:sp>
+        <p:nvSpPr>
           <p:cNvPr id="16" name="TextBox 15"/>
           <p:cNvSpPr txBox="1"/>
           <p:nvPr/>
         </p:nvSpPr>
         <p:spPr>
           <a:xfrm>
-            <a:off x="6949440" y="2834640"/>
-            <a:ext cx="640080" cy="457200"/>
+            <a:off x="7726679" y="3337560"/>
+            <a:ext cx="2926080" cy="822960"/>
           </a:xfrm>
           <a:prstGeom prst="rect">
             <a:avLst/>
@@ -5012,15 +4377,34 @@
               <a:spcBef>
                 <a:spcPts val="0"/>
               </a:spcBef>
+              <a:spcAft>
+                <a:spcPts val="200"/>
+              </a:spcAft>
             </a:pPr>
             <a:r>
               <a:rPr sz="1400" b="1" i="0">
                 <a:solidFill>
-                  <a:srgbClr val="2E6BA8"/>
-                </a:solidFill>
-                <a:latin typeface="Calibri"/>
-              </a:rPr>
-              <a:t>J2</a:t>
+                  <a:srgbClr val="E67E22"/>
+                </a:solidFill>
+                <a:latin typeface="Calibri"/>
+              </a:rPr>
+              <a:t>R2</a:t>
+            </a:r>
+          </a:p>
+          <a:p>
+            <a:pPr algn="l">
+              <a:spcBef>
+                <a:spcPts val="0"/>
+              </a:spcBef>
+            </a:pPr>
+            <a:r>
+              <a:rPr sz="1250" b="0" i="0">
+                <a:solidFill>
+                  <a:srgbClr val="404040"/>
+                </a:solidFill>
+                <a:latin typeface="Calibri"/>
+              </a:rPr>
+              <a:t>Modifs logiciels dans un délai serré</a:t>
             </a:r>
           </a:p>
         </p:txBody>
@@ -5033,86 +4417,47 @@
         </p:nvSpPr>
         <p:spPr>
           <a:xfrm>
-            <a:off x="7589520" y="2834640"/>
-            <a:ext cx="2926080" cy="457200"/>
-          </a:xfrm>
-          <a:prstGeom prst="rect">
-            <a:avLst/>
-          </a:prstGeom>
-          <a:noFill/>
-        </p:spPr>
-        <p:txBody>
-          <a:bodyPr wrap="square" anchor="t" lIns="0" rIns="0" tIns="0" bIns="0">
-            <a:spAutoFit/>
-          </a:bodyPr>
-          <a:lstStyle/>
-          <a:p>
-            <a:pPr algn="l">
-              <a:spcBef>
-                <a:spcPts val="0"/>
-              </a:spcBef>
-            </a:pPr>
-            <a:r>
-              <a:rPr sz="1400" b="0" i="0">
-                <a:solidFill>
-                  <a:srgbClr val="404040"/>
-                </a:solidFill>
-                <a:latin typeface="Calibri"/>
-              </a:rPr>
-              <a:t>Pièces prêtes</a:t>
-            </a:r>
-          </a:p>
-        </p:txBody>
-      </p:sp>
-      <p:sp>
-        <p:nvSpPr>
-          <p:cNvPr id="18" name="TextBox 17"/>
-          <p:cNvSpPr txBox="1"/>
-          <p:nvPr/>
-        </p:nvSpPr>
-        <p:spPr>
-          <a:xfrm>
-            <a:off x="10607040" y="2834640"/>
-            <a:ext cx="914400" cy="457200"/>
-          </a:xfrm>
-          <a:prstGeom prst="rect">
-            <a:avLst/>
-          </a:prstGeom>
-          <a:noFill/>
-        </p:spPr>
-        <p:txBody>
-          <a:bodyPr wrap="square" anchor="t" lIns="0" rIns="0" tIns="0" bIns="0">
-            <a:spAutoFit/>
-          </a:bodyPr>
-          <a:lstStyle/>
-          <a:p>
-            <a:pPr algn="r">
-              <a:spcBef>
-                <a:spcPts val="0"/>
-              </a:spcBef>
-            </a:pPr>
-            <a:r>
-              <a:rPr sz="1400" b="1" i="0">
-                <a:solidFill>
-                  <a:srgbClr val="1F4E79"/>
-                </a:solidFill>
-                <a:latin typeface="Calibri"/>
-              </a:rPr>
-              <a:t>j30</a:t>
-            </a:r>
-          </a:p>
-        </p:txBody>
-      </p:sp>
-      <p:sp>
-        <p:nvSpPr>
-          <p:cNvPr id="19" name="Rounded Rectangle 18"/>
+            <a:off x="10698480" y="3447288"/>
+            <a:ext cx="868680" cy="548640"/>
+          </a:xfrm>
+          <a:prstGeom prst="rect">
+            <a:avLst/>
+          </a:prstGeom>
+          <a:noFill/>
+        </p:spPr>
+        <p:txBody>
+          <a:bodyPr wrap="square" anchor="t" lIns="0" rIns="0" tIns="0" bIns="0">
+            <a:spAutoFit/>
+          </a:bodyPr>
+          <a:lstStyle/>
+          <a:p>
+            <a:pPr algn="ctr">
+              <a:spcBef>
+                <a:spcPts val="0"/>
+              </a:spcBef>
+            </a:pPr>
+            <a:r>
+              <a:rPr sz="2200" b="1" i="0">
+                <a:solidFill>
+                  <a:srgbClr val="E67E22"/>
+                </a:solidFill>
+                <a:latin typeface="Calibri"/>
+              </a:rPr>
+              <a:t>9</a:t>
+            </a:r>
+          </a:p>
+        </p:txBody>
+      </p:sp>
+      <p:sp>
+        <p:nvSpPr>
+          <p:cNvPr id="18" name="Rounded Rectangle 17"/>
           <p:cNvSpPr/>
           <p:nvPr/>
         </p:nvSpPr>
         <p:spPr>
           <a:xfrm>
-            <a:off x="6766560" y="3438144"/>
-            <a:ext cx="4937760" cy="603504"/>
+            <a:off x="7498079" y="4343400"/>
+            <a:ext cx="4206240" cy="960120"/>
           </a:xfrm>
           <a:prstGeom prst="roundRect">
             <a:avLst/>
@@ -5149,137 +4494,20 @@
       </p:sp>
       <p:sp>
         <p:nvSpPr>
-          <p:cNvPr id="20" name="TextBox 19"/>
-          <p:cNvSpPr txBox="1"/>
-          <p:nvPr/>
-        </p:nvSpPr>
-        <p:spPr>
-          <a:xfrm>
-            <a:off x="6949440" y="3547872"/>
-            <a:ext cx="640080" cy="457200"/>
-          </a:xfrm>
-          <a:prstGeom prst="rect">
-            <a:avLst/>
-          </a:prstGeom>
-          <a:noFill/>
-        </p:spPr>
-        <p:txBody>
-          <a:bodyPr wrap="square" anchor="t" lIns="0" rIns="0" tIns="0" bIns="0">
-            <a:spAutoFit/>
-          </a:bodyPr>
-          <a:lstStyle/>
-          <a:p>
-            <a:pPr algn="l">
-              <a:spcBef>
-                <a:spcPts val="0"/>
-              </a:spcBef>
-            </a:pPr>
-            <a:r>
-              <a:rPr sz="1400" b="1" i="0">
-                <a:solidFill>
-                  <a:srgbClr val="2E6BA8"/>
-                </a:solidFill>
-                <a:latin typeface="Calibri"/>
-              </a:rPr>
-              <a:t>J3</a:t>
-            </a:r>
-          </a:p>
-        </p:txBody>
-      </p:sp>
-      <p:sp>
-        <p:nvSpPr>
-          <p:cNvPr id="21" name="TextBox 20"/>
-          <p:cNvSpPr txBox="1"/>
-          <p:nvPr/>
-        </p:nvSpPr>
-        <p:spPr>
-          <a:xfrm>
-            <a:off x="7589520" y="3547872"/>
-            <a:ext cx="2926080" cy="457200"/>
-          </a:xfrm>
-          <a:prstGeom prst="rect">
-            <a:avLst/>
-          </a:prstGeom>
-          <a:noFill/>
-        </p:spPr>
-        <p:txBody>
-          <a:bodyPr wrap="square" anchor="t" lIns="0" rIns="0" tIns="0" bIns="0">
-            <a:spAutoFit/>
-          </a:bodyPr>
-          <a:lstStyle/>
-          <a:p>
-            <a:pPr algn="l">
-              <a:spcBef>
-                <a:spcPts val="0"/>
-              </a:spcBef>
-            </a:pPr>
-            <a:r>
-              <a:rPr sz="1400" b="0" i="0">
-                <a:solidFill>
-                  <a:srgbClr val="404040"/>
-                </a:solidFill>
-                <a:latin typeface="Calibri"/>
-              </a:rPr>
-              <a:t>Maquette fixée</a:t>
-            </a:r>
-          </a:p>
-        </p:txBody>
-      </p:sp>
-      <p:sp>
-        <p:nvSpPr>
-          <p:cNvPr id="22" name="TextBox 21"/>
-          <p:cNvSpPr txBox="1"/>
-          <p:nvPr/>
-        </p:nvSpPr>
-        <p:spPr>
-          <a:xfrm>
-            <a:off x="10607040" y="3547872"/>
-            <a:ext cx="914400" cy="457200"/>
-          </a:xfrm>
-          <a:prstGeom prst="rect">
-            <a:avLst/>
-          </a:prstGeom>
-          <a:noFill/>
-        </p:spPr>
-        <p:txBody>
-          <a:bodyPr wrap="square" anchor="t" lIns="0" rIns="0" tIns="0" bIns="0">
-            <a:spAutoFit/>
-          </a:bodyPr>
-          <a:lstStyle/>
-          <a:p>
-            <a:pPr algn="r">
-              <a:spcBef>
-                <a:spcPts val="0"/>
-              </a:spcBef>
-            </a:pPr>
-            <a:r>
-              <a:rPr sz="1400" b="1" i="0">
-                <a:solidFill>
-                  <a:srgbClr val="1F4E79"/>
-                </a:solidFill>
-                <a:latin typeface="Calibri"/>
-              </a:rPr>
-              <a:t>j34</a:t>
-            </a:r>
-          </a:p>
-        </p:txBody>
-      </p:sp>
-      <p:sp>
-        <p:nvSpPr>
-          <p:cNvPr id="23" name="Rounded Rectangle 22"/>
+          <p:cNvPr id="19" name="Rectangle 18"/>
           <p:cNvSpPr/>
           <p:nvPr/>
         </p:nvSpPr>
         <p:spPr>
           <a:xfrm>
-            <a:off x="6766560" y="4151376"/>
-            <a:ext cx="4937760" cy="603504"/>
-          </a:xfrm>
-          <a:prstGeom prst="roundRect">
+            <a:off x="7498079" y="4343400"/>
+            <a:ext cx="146304" cy="960120"/>
+          </a:xfrm>
+          <a:prstGeom prst="rect">
             <a:avLst/>
           </a:prstGeom>
           <a:solidFill>
-            <a:srgbClr val="EAF1F8"/>
+            <a:srgbClr val="E67E22"/>
           </a:solidFill>
           <a:ln>
             <a:noFill/>
@@ -5310,14 +4538,14 @@
       </p:sp>
       <p:sp>
         <p:nvSpPr>
-          <p:cNvPr id="24" name="TextBox 23"/>
-          <p:cNvSpPr txBox="1"/>
-          <p:nvPr/>
-        </p:nvSpPr>
-        <p:spPr>
-          <a:xfrm>
-            <a:off x="6949440" y="4261104"/>
-            <a:ext cx="640080" cy="457200"/>
+          <p:cNvPr id="20" name="TextBox 19"/>
+          <p:cNvSpPr txBox="1"/>
+          <p:nvPr/>
+        </p:nvSpPr>
+        <p:spPr>
+          <a:xfrm>
+            <a:off x="7726679" y="4434840"/>
+            <a:ext cx="2926080" cy="822960"/>
           </a:xfrm>
           <a:prstGeom prst="rect">
             <a:avLst/>
@@ -5334,40 +4562,20 @@
               <a:spcBef>
                 <a:spcPts val="0"/>
               </a:spcBef>
+              <a:spcAft>
+                <a:spcPts val="200"/>
+              </a:spcAft>
             </a:pPr>
             <a:r>
               <a:rPr sz="1400" b="1" i="0">
                 <a:solidFill>
-                  <a:srgbClr val="2E6BA8"/>
-                </a:solidFill>
-                <a:latin typeface="Calibri"/>
-              </a:rPr>
-              <a:t>J4</a:t>
-            </a:r>
-          </a:p>
-        </p:txBody>
-      </p:sp>
-      <p:sp>
-        <p:nvSpPr>
-          <p:cNvPr id="25" name="TextBox 24"/>
-          <p:cNvSpPr txBox="1"/>
-          <p:nvPr/>
-        </p:nvSpPr>
-        <p:spPr>
-          <a:xfrm>
-            <a:off x="7589520" y="4261104"/>
-            <a:ext cx="2926080" cy="457200"/>
-          </a:xfrm>
-          <a:prstGeom prst="rect">
-            <a:avLst/>
-          </a:prstGeom>
-          <a:noFill/>
-        </p:spPr>
-        <p:txBody>
-          <a:bodyPr wrap="square" anchor="t" lIns="0" rIns="0" tIns="0" bIns="0">
-            <a:spAutoFit/>
-          </a:bodyPr>
-          <a:lstStyle/>
+                  <a:srgbClr val="E67E22"/>
+                </a:solidFill>
+                <a:latin typeface="Calibri"/>
+              </a:rPr>
+              <a:t>R7</a:t>
+            </a:r>
+          </a:p>
           <a:p>
             <a:pPr algn="l">
               <a:spcBef>
@@ -5375,213 +4583,52 @@
               </a:spcBef>
             </a:pPr>
             <a:r>
-              <a:rPr sz="1400" b="0" i="0">
+              <a:rPr sz="1250" b="0" i="0">
                 <a:solidFill>
                   <a:srgbClr val="404040"/>
                 </a:solidFill>
                 <a:latin typeface="Calibri"/>
               </a:rPr>
-              <a:t>Revue client</a:t>
-            </a:r>
-          </a:p>
-        </p:txBody>
-      </p:sp>
-      <p:sp>
-        <p:nvSpPr>
-          <p:cNvPr id="26" name="TextBox 25"/>
-          <p:cNvSpPr txBox="1"/>
-          <p:nvPr/>
-        </p:nvSpPr>
-        <p:spPr>
-          <a:xfrm>
-            <a:off x="10607040" y="4261104"/>
-            <a:ext cx="914400" cy="457200"/>
-          </a:xfrm>
-          <a:prstGeom prst="rect">
-            <a:avLst/>
-          </a:prstGeom>
-          <a:noFill/>
-        </p:spPr>
-        <p:txBody>
-          <a:bodyPr wrap="square" anchor="t" lIns="0" rIns="0" tIns="0" bIns="0">
-            <a:spAutoFit/>
-          </a:bodyPr>
-          <a:lstStyle/>
-          <a:p>
-            <a:pPr algn="r">
-              <a:spcBef>
-                <a:spcPts val="0"/>
-              </a:spcBef>
-            </a:pPr>
-            <a:r>
-              <a:rPr sz="1400" b="1" i="0">
-                <a:solidFill>
-                  <a:srgbClr val="1F4E79"/>
-                </a:solidFill>
-                <a:latin typeface="Calibri"/>
-              </a:rPr>
-              <a:t>j39</a:t>
-            </a:r>
-          </a:p>
-        </p:txBody>
-      </p:sp>
-      <p:sp>
-        <p:nvSpPr>
-          <p:cNvPr id="27" name="Rounded Rectangle 26"/>
-          <p:cNvSpPr/>
-          <p:nvPr/>
-        </p:nvSpPr>
-        <p:spPr>
-          <a:xfrm>
-            <a:off x="6766560" y="4864608"/>
-            <a:ext cx="4937760" cy="603504"/>
-          </a:xfrm>
-          <a:prstGeom prst="roundRect">
-            <a:avLst/>
-          </a:prstGeom>
-          <a:solidFill>
-            <a:srgbClr val="EAF1F8"/>
-          </a:solidFill>
-          <a:ln>
-            <a:noFill/>
-          </a:ln>
-          <a:effectLst/>
-        </p:spPr>
-        <p:style>
-          <a:lnRef idx="1">
-            <a:schemeClr val="accent1"/>
-          </a:lnRef>
-          <a:fillRef idx="3">
-            <a:schemeClr val="accent1"/>
-          </a:fillRef>
-          <a:effectRef idx="2">
-            <a:schemeClr val="accent1"/>
-          </a:effectRef>
-          <a:fontRef idx="minor">
-            <a:schemeClr val="lt1"/>
-          </a:fontRef>
-        </p:style>
-        <p:txBody>
-          <a:bodyPr rtlCol="0" anchor="ctr"/>
-          <a:lstStyle/>
-          <a:p>
-            <a:pPr algn="ctr"/>
-          </a:p>
-        </p:txBody>
-      </p:sp>
-      <p:sp>
-        <p:nvSpPr>
-          <p:cNvPr id="28" name="TextBox 27"/>
-          <p:cNvSpPr txBox="1"/>
-          <p:nvPr/>
-        </p:nvSpPr>
-        <p:spPr>
-          <a:xfrm>
-            <a:off x="6949440" y="4974336"/>
-            <a:ext cx="640080" cy="457200"/>
-          </a:xfrm>
-          <a:prstGeom prst="rect">
-            <a:avLst/>
-          </a:prstGeom>
-          <a:noFill/>
-        </p:spPr>
-        <p:txBody>
-          <a:bodyPr wrap="square" anchor="t" lIns="0" rIns="0" tIns="0" bIns="0">
-            <a:spAutoFit/>
-          </a:bodyPr>
-          <a:lstStyle/>
-          <a:p>
-            <a:pPr algn="l">
-              <a:spcBef>
-                <a:spcPts val="0"/>
-              </a:spcBef>
-            </a:pPr>
-            <a:r>
-              <a:rPr sz="1400" b="1" i="0">
-                <a:solidFill>
-                  <a:srgbClr val="2E6BA8"/>
-                </a:solidFill>
-                <a:latin typeface="Calibri"/>
-              </a:rPr>
-              <a:t>J5</a:t>
-            </a:r>
-          </a:p>
-        </p:txBody>
-      </p:sp>
-      <p:sp>
-        <p:nvSpPr>
-          <p:cNvPr id="29" name="TextBox 28"/>
-          <p:cNvSpPr txBox="1"/>
-          <p:nvPr/>
-        </p:nvSpPr>
-        <p:spPr>
-          <a:xfrm>
-            <a:off x="7589520" y="4974336"/>
-            <a:ext cx="2926080" cy="457200"/>
-          </a:xfrm>
-          <a:prstGeom prst="rect">
-            <a:avLst/>
-          </a:prstGeom>
-          <a:noFill/>
-        </p:spPr>
-        <p:txBody>
-          <a:bodyPr wrap="square" anchor="t" lIns="0" rIns="0" tIns="0" bIns="0">
-            <a:spAutoFit/>
-          </a:bodyPr>
-          <a:lstStyle/>
-          <a:p>
-            <a:pPr algn="l">
-              <a:spcBef>
-                <a:spcPts val="0"/>
-              </a:spcBef>
-            </a:pPr>
-            <a:r>
-              <a:rPr sz="1400" b="0" i="0">
-                <a:solidFill>
-                  <a:srgbClr val="404040"/>
-                </a:solidFill>
-                <a:latin typeface="Calibri"/>
-              </a:rPr>
-              <a:t>Maquette prête</a:t>
-            </a:r>
-          </a:p>
-        </p:txBody>
-      </p:sp>
-      <p:sp>
-        <p:nvSpPr>
-          <p:cNvPr id="30" name="TextBox 29"/>
-          <p:cNvSpPr txBox="1"/>
-          <p:nvPr/>
-        </p:nvSpPr>
-        <p:spPr>
-          <a:xfrm>
-            <a:off x="10607040" y="4974336"/>
-            <a:ext cx="914400" cy="457200"/>
-          </a:xfrm>
-          <a:prstGeom prst="rect">
-            <a:avLst/>
-          </a:prstGeom>
-          <a:noFill/>
-        </p:spPr>
-        <p:txBody>
-          <a:bodyPr wrap="square" anchor="t" lIns="0" rIns="0" tIns="0" bIns="0">
-            <a:spAutoFit/>
-          </a:bodyPr>
-          <a:lstStyle/>
-          <a:p>
-            <a:pPr algn="r">
-              <a:spcBef>
-                <a:spcPts val="0"/>
-              </a:spcBef>
-            </a:pPr>
-            <a:r>
-              <a:rPr sz="1400" b="1" i="0">
-                <a:solidFill>
-                  <a:srgbClr val="1F4E79"/>
-                </a:solidFill>
-                <a:latin typeface="Calibri"/>
-              </a:rPr>
-              <a:t>j45</a:t>
+              <a:t>Aucune marge sur le chemin critique</a:t>
+            </a:r>
+          </a:p>
+        </p:txBody>
+      </p:sp>
+      <p:sp>
+        <p:nvSpPr>
+          <p:cNvPr id="21" name="TextBox 20"/>
+          <p:cNvSpPr txBox="1"/>
+          <p:nvPr/>
+        </p:nvSpPr>
+        <p:spPr>
+          <a:xfrm>
+            <a:off x="10698480" y="4544568"/>
+            <a:ext cx="868680" cy="548640"/>
+          </a:xfrm>
+          <a:prstGeom prst="rect">
+            <a:avLst/>
+          </a:prstGeom>
+          <a:noFill/>
+        </p:spPr>
+        <p:txBody>
+          <a:bodyPr wrap="square" anchor="t" lIns="0" rIns="0" tIns="0" bIns="0">
+            <a:spAutoFit/>
+          </a:bodyPr>
+          <a:lstStyle/>
+          <a:p>
+            <a:pPr algn="ctr">
+              <a:spcBef>
+                <a:spcPts val="0"/>
+              </a:spcBef>
+            </a:pPr>
+            <a:r>
+              <a:rPr sz="2200" b="1" i="0">
+                <a:solidFill>
+                  <a:srgbClr val="E67E22"/>
+                </a:solidFill>
+                <a:latin typeface="Calibri"/>
+              </a:rPr>
+              <a:t>9</a:t>
             </a:r>
           </a:p>
         </p:txBody>
@@ -5708,7 +4755,7 @@
         </p:nvSpPr>
         <p:spPr>
           <a:xfrm>
-            <a:off x="502920" y="146304"/>
+            <a:off x="502920" y="164592"/>
             <a:ext cx="10515600" cy="320040"/>
           </a:xfrm>
           <a:prstGeom prst="rect">
@@ -5734,7 +4781,7 @@
                 </a:solidFill>
                 <a:latin typeface="Calibri"/>
               </a:rPr>
-              <a:t>SYNTHÈSE</a:t>
+              <a:t>6 · PILOTAGE</a:t>
             </a:r>
           </a:p>
         </p:txBody>
@@ -5747,7 +4794,7 @@
         </p:nvSpPr>
         <p:spPr>
           <a:xfrm>
-            <a:off x="502920" y="411480"/>
+            <a:off x="502920" y="420624"/>
             <a:ext cx="11155680" cy="640080"/>
           </a:xfrm>
           <a:prstGeom prst="rect">
@@ -5773,7 +4820,7 @@
                 </a:solidFill>
                 <a:latin typeface="Calibri"/>
               </a:rPr>
-              <a:t>Conclusion</a:t>
+              <a:t>Pilotage de la réalisation</a:t>
             </a:r>
           </a:p>
         </p:txBody>
@@ -5812,7 +4859,7 @@
                 </a:solidFill>
                 <a:latin typeface="Calibri"/>
               </a:rPr>
-              <a:t>Projet GREMLIN — Soutenance</a:t>
+              <a:t>Projet GREMLIN — Phase de préparation</a:t>
             </a:r>
           </a:p>
         </p:txBody>
@@ -5851,21 +4898,217 @@
                 </a:solidFill>
                 <a:latin typeface="Calibri"/>
               </a:rPr>
-              <a:t>12</a:t>
-            </a:r>
-          </a:p>
-        </p:txBody>
-      </p:sp>
-      <p:sp>
-        <p:nvSpPr>
-          <p:cNvPr id="8" name="Rounded Rectangle 7"/>
+              <a:t>11</a:t>
+            </a:r>
+          </a:p>
+        </p:txBody>
+      </p:sp>
+      <p:sp>
+        <p:nvSpPr>
+          <p:cNvPr id="8" name="TextBox 7"/>
+          <p:cNvSpPr txBox="1"/>
+          <p:nvPr/>
+        </p:nvSpPr>
+        <p:spPr>
+          <a:xfrm>
+            <a:off x="548640" y="1463040"/>
+            <a:ext cx="5486400" cy="457200"/>
+          </a:xfrm>
+          <a:prstGeom prst="rect">
+            <a:avLst/>
+          </a:prstGeom>
+          <a:noFill/>
+        </p:spPr>
+        <p:txBody>
+          <a:bodyPr wrap="square" anchor="t" lIns="0" rIns="0" tIns="0" bIns="0">
+            <a:spAutoFit/>
+          </a:bodyPr>
+          <a:lstStyle/>
+          <a:p>
+            <a:pPr algn="l">
+              <a:spcBef>
+                <a:spcPts val="0"/>
+              </a:spcBef>
+            </a:pPr>
+            <a:r>
+              <a:rPr sz="1700" b="1" i="0">
+                <a:solidFill>
+                  <a:srgbClr val="1F4E79"/>
+                </a:solidFill>
+                <a:latin typeface="Calibri"/>
+              </a:rPr>
+              <a:t>Tenir le cap : suivi simple et réactif</a:t>
+            </a:r>
+          </a:p>
+        </p:txBody>
+      </p:sp>
+      <p:sp>
+        <p:nvSpPr>
+          <p:cNvPr id="9" name="TextBox 8"/>
+          <p:cNvSpPr txBox="1"/>
+          <p:nvPr/>
+        </p:nvSpPr>
+        <p:spPr>
+          <a:xfrm>
+            <a:off x="548640" y="2011680"/>
+            <a:ext cx="5852160" cy="3657600"/>
+          </a:xfrm>
+          <a:prstGeom prst="rect">
+            <a:avLst/>
+          </a:prstGeom>
+          <a:noFill/>
+        </p:spPr>
+        <p:txBody>
+          <a:bodyPr wrap="square" anchor="t" lIns="0" rIns="0" tIns="0" bIns="0">
+            <a:spAutoFit/>
+          </a:bodyPr>
+          <a:lstStyle/>
+          <a:p>
+            <a:pPr algn="l">
+              <a:spcBef>
+                <a:spcPts val="0"/>
+              </a:spcBef>
+              <a:spcAft>
+                <a:spcPts val="1100"/>
+              </a:spcAft>
+            </a:pPr>
+            <a:r>
+              <a:rPr sz="1550" b="0" i="0">
+                <a:solidFill>
+                  <a:srgbClr val="404040"/>
+                </a:solidFill>
+                <a:latin typeface="Calibri"/>
+              </a:rPr>
+              <a:t>•  Revues régulières avec le client, calées sur les jalons.</a:t>
+            </a:r>
+          </a:p>
+          <a:p>
+            <a:pPr algn="l">
+              <a:spcBef>
+                <a:spcPts val="0"/>
+              </a:spcBef>
+              <a:spcAft>
+                <a:spcPts val="1100"/>
+              </a:spcAft>
+            </a:pPr>
+            <a:r>
+              <a:rPr sz="1550" b="0" i="0">
+                <a:solidFill>
+                  <a:srgbClr val="404040"/>
+                </a:solidFill>
+                <a:latin typeface="Calibri"/>
+              </a:rPr>
+              <a:t>•  Mise à jour hebdomadaire du Gantt.</a:t>
+            </a:r>
+          </a:p>
+          <a:p>
+            <a:pPr algn="l">
+              <a:spcBef>
+                <a:spcPts val="0"/>
+              </a:spcBef>
+              <a:spcAft>
+                <a:spcPts val="1100"/>
+              </a:spcAft>
+            </a:pPr>
+            <a:r>
+              <a:rPr sz="1550" b="0" i="0">
+                <a:solidFill>
+                  <a:srgbClr val="404040"/>
+                </a:solidFill>
+                <a:latin typeface="Calibri"/>
+              </a:rPr>
+              <a:t>•  Surveillance des tâches critiques (marge nulle).</a:t>
+            </a:r>
+          </a:p>
+          <a:p>
+            <a:pPr algn="l">
+              <a:spcBef>
+                <a:spcPts val="0"/>
+              </a:spcBef>
+              <a:spcAft>
+                <a:spcPts val="1100"/>
+              </a:spcAft>
+            </a:pPr>
+            <a:r>
+              <a:rPr sz="1550" b="0" i="0">
+                <a:solidFill>
+                  <a:srgbClr val="404040"/>
+                </a:solidFill>
+                <a:latin typeface="Calibri"/>
+              </a:rPr>
+              <a:t>•  Marges « support » (8 j) et « appro » (3 j) en amortisseur.</a:t>
+            </a:r>
+          </a:p>
+          <a:p>
+            <a:pPr algn="l">
+              <a:spcBef>
+                <a:spcPts val="0"/>
+              </a:spcBef>
+              <a:spcAft>
+                <a:spcPts val="1100"/>
+              </a:spcAft>
+            </a:pPr>
+            <a:r>
+              <a:rPr sz="1550" b="0" i="0">
+                <a:solidFill>
+                  <a:srgbClr val="404040"/>
+                </a:solidFill>
+                <a:latin typeface="Calibri"/>
+              </a:rPr>
+              <a:t>•  Suivi des dépenses vs courbe en S.</a:t>
+            </a:r>
+          </a:p>
+        </p:txBody>
+      </p:sp>
+      <p:sp>
+        <p:nvSpPr>
+          <p:cNvPr id="10" name="TextBox 9"/>
+          <p:cNvSpPr txBox="1"/>
+          <p:nvPr/>
+        </p:nvSpPr>
+        <p:spPr>
+          <a:xfrm>
+            <a:off x="6766560" y="1463040"/>
+            <a:ext cx="4937760" cy="457200"/>
+          </a:xfrm>
+          <a:prstGeom prst="rect">
+            <a:avLst/>
+          </a:prstGeom>
+          <a:noFill/>
+        </p:spPr>
+        <p:txBody>
+          <a:bodyPr wrap="square" anchor="t" lIns="0" rIns="0" tIns="0" bIns="0">
+            <a:spAutoFit/>
+          </a:bodyPr>
+          <a:lstStyle/>
+          <a:p>
+            <a:pPr algn="l">
+              <a:spcBef>
+                <a:spcPts val="0"/>
+              </a:spcBef>
+            </a:pPr>
+            <a:r>
+              <a:rPr sz="1700" b="1" i="0">
+                <a:solidFill>
+                  <a:srgbClr val="1F4E79"/>
+                </a:solidFill>
+                <a:latin typeface="Calibri"/>
+              </a:rPr>
+              <a:t>Jalons clés</a:t>
+            </a:r>
+          </a:p>
+        </p:txBody>
+      </p:sp>
+      <p:sp>
+        <p:nvSpPr>
+          <p:cNvPr id="11" name="Rounded Rectangle 10"/>
           <p:cNvSpPr/>
           <p:nvPr/>
         </p:nvSpPr>
         <p:spPr>
           <a:xfrm>
-            <a:off x="548640" y="1554480"/>
-            <a:ext cx="3566160" cy="1234440"/>
+            <a:off x="6766560" y="2011680"/>
+            <a:ext cx="4937760" cy="603504"/>
           </a:xfrm>
           <a:prstGeom prst="roundRect">
             <a:avLst/>
@@ -5902,92 +5145,131 @@
       </p:sp>
       <p:sp>
         <p:nvSpPr>
-          <p:cNvPr id="9" name="TextBox 8"/>
-          <p:cNvSpPr txBox="1"/>
-          <p:nvPr/>
-        </p:nvSpPr>
-        <p:spPr>
-          <a:xfrm>
-            <a:off x="548640" y="1700784"/>
-            <a:ext cx="3566160" cy="640080"/>
-          </a:xfrm>
-          <a:prstGeom prst="rect">
-            <a:avLst/>
-          </a:prstGeom>
-          <a:noFill/>
-        </p:spPr>
-        <p:txBody>
-          <a:bodyPr wrap="square" anchor="t" lIns="0" rIns="0" tIns="0" bIns="0">
-            <a:spAutoFit/>
-          </a:bodyPr>
-          <a:lstStyle/>
-          <a:p>
-            <a:pPr algn="ctr">
-              <a:spcBef>
-                <a:spcPts val="0"/>
-              </a:spcBef>
-            </a:pPr>
-            <a:r>
-              <a:rPr sz="3000" b="1" i="0">
-                <a:solidFill>
-                  <a:srgbClr val="2E7D32"/>
-                </a:solidFill>
-                <a:latin typeface="Calibri"/>
-              </a:rPr>
-              <a:t>45 / 45 j</a:t>
-            </a:r>
-          </a:p>
-        </p:txBody>
-      </p:sp>
-      <p:sp>
-        <p:nvSpPr>
-          <p:cNvPr id="10" name="TextBox 9"/>
-          <p:cNvSpPr txBox="1"/>
-          <p:nvPr/>
-        </p:nvSpPr>
-        <p:spPr>
-          <a:xfrm>
-            <a:off x="548640" y="2340864"/>
-            <a:ext cx="3566160" cy="411480"/>
-          </a:xfrm>
-          <a:prstGeom prst="rect">
-            <a:avLst/>
-          </a:prstGeom>
-          <a:noFill/>
-        </p:spPr>
-        <p:txBody>
-          <a:bodyPr wrap="square" anchor="t" lIns="0" rIns="0" tIns="0" bIns="0">
-            <a:spAutoFit/>
-          </a:bodyPr>
-          <a:lstStyle/>
-          <a:p>
-            <a:pPr algn="ctr">
-              <a:spcBef>
-                <a:spcPts val="0"/>
-              </a:spcBef>
-            </a:pPr>
-            <a:r>
-              <a:rPr sz="1250" b="0" i="0">
+          <p:cNvPr id="12" name="TextBox 11"/>
+          <p:cNvSpPr txBox="1"/>
+          <p:nvPr/>
+        </p:nvSpPr>
+        <p:spPr>
+          <a:xfrm>
+            <a:off x="6949440" y="2121408"/>
+            <a:ext cx="640080" cy="457200"/>
+          </a:xfrm>
+          <a:prstGeom prst="rect">
+            <a:avLst/>
+          </a:prstGeom>
+          <a:noFill/>
+        </p:spPr>
+        <p:txBody>
+          <a:bodyPr wrap="square" anchor="t" lIns="0" rIns="0" tIns="0" bIns="0">
+            <a:spAutoFit/>
+          </a:bodyPr>
+          <a:lstStyle/>
+          <a:p>
+            <a:pPr algn="l">
+              <a:spcBef>
+                <a:spcPts val="0"/>
+              </a:spcBef>
+            </a:pPr>
+            <a:r>
+              <a:rPr sz="1400" b="1" i="0">
+                <a:solidFill>
+                  <a:srgbClr val="2E6BA8"/>
+                </a:solidFill>
+                <a:latin typeface="Calibri"/>
+              </a:rPr>
+              <a:t>J1</a:t>
+            </a:r>
+          </a:p>
+        </p:txBody>
+      </p:sp>
+      <p:sp>
+        <p:nvSpPr>
+          <p:cNvPr id="13" name="TextBox 12"/>
+          <p:cNvSpPr txBox="1"/>
+          <p:nvPr/>
+        </p:nvSpPr>
+        <p:spPr>
+          <a:xfrm>
+            <a:off x="7589520" y="2121408"/>
+            <a:ext cx="2926080" cy="457200"/>
+          </a:xfrm>
+          <a:prstGeom prst="rect">
+            <a:avLst/>
+          </a:prstGeom>
+          <a:noFill/>
+        </p:spPr>
+        <p:txBody>
+          <a:bodyPr wrap="square" anchor="t" lIns="0" rIns="0" tIns="0" bIns="0">
+            <a:spAutoFit/>
+          </a:bodyPr>
+          <a:lstStyle/>
+          <a:p>
+            <a:pPr algn="l">
+              <a:spcBef>
+                <a:spcPts val="0"/>
+              </a:spcBef>
+            </a:pPr>
+            <a:r>
+              <a:rPr sz="1400" b="0" i="0">
                 <a:solidFill>
                   <a:srgbClr val="404040"/>
                 </a:solidFill>
                 <a:latin typeface="Calibri"/>
               </a:rPr>
-              <a:t>Délai : respecté, sans marge</a:t>
-            </a:r>
-          </a:p>
-        </p:txBody>
-      </p:sp>
-      <p:sp>
-        <p:nvSpPr>
-          <p:cNvPr id="11" name="Rounded Rectangle 10"/>
+              <a:t>Étude validée</a:t>
+            </a:r>
+          </a:p>
+        </p:txBody>
+      </p:sp>
+      <p:sp>
+        <p:nvSpPr>
+          <p:cNvPr id="14" name="TextBox 13"/>
+          <p:cNvSpPr txBox="1"/>
+          <p:nvPr/>
+        </p:nvSpPr>
+        <p:spPr>
+          <a:xfrm>
+            <a:off x="10607040" y="2121408"/>
+            <a:ext cx="914400" cy="457200"/>
+          </a:xfrm>
+          <a:prstGeom prst="rect">
+            <a:avLst/>
+          </a:prstGeom>
+          <a:noFill/>
+        </p:spPr>
+        <p:txBody>
+          <a:bodyPr wrap="square" anchor="t" lIns="0" rIns="0" tIns="0" bIns="0">
+            <a:spAutoFit/>
+          </a:bodyPr>
+          <a:lstStyle/>
+          <a:p>
+            <a:pPr algn="r">
+              <a:spcBef>
+                <a:spcPts val="0"/>
+              </a:spcBef>
+            </a:pPr>
+            <a:r>
+              <a:rPr sz="1400" b="1" i="0">
+                <a:solidFill>
+                  <a:srgbClr val="1F4E79"/>
+                </a:solidFill>
+                <a:latin typeface="Calibri"/>
+              </a:rPr>
+              <a:t>j10</a:t>
+            </a:r>
+          </a:p>
+        </p:txBody>
+      </p:sp>
+      <p:sp>
+        <p:nvSpPr>
+          <p:cNvPr id="15" name="Rounded Rectangle 14"/>
           <p:cNvSpPr/>
           <p:nvPr/>
         </p:nvSpPr>
         <p:spPr>
           <a:xfrm>
-            <a:off x="4297680" y="1554480"/>
-            <a:ext cx="3566160" cy="1234440"/>
+            <a:off x="6766560" y="2724912"/>
+            <a:ext cx="4937760" cy="603504"/>
           </a:xfrm>
           <a:prstGeom prst="roundRect">
             <a:avLst/>
@@ -6024,92 +5306,131 @@
       </p:sp>
       <p:sp>
         <p:nvSpPr>
-          <p:cNvPr id="12" name="TextBox 11"/>
-          <p:cNvSpPr txBox="1"/>
-          <p:nvPr/>
-        </p:nvSpPr>
-        <p:spPr>
-          <a:xfrm>
-            <a:off x="4297680" y="1700784"/>
-            <a:ext cx="3566160" cy="640080"/>
-          </a:xfrm>
-          <a:prstGeom prst="rect">
-            <a:avLst/>
-          </a:prstGeom>
-          <a:noFill/>
-        </p:spPr>
-        <p:txBody>
-          <a:bodyPr wrap="square" anchor="t" lIns="0" rIns="0" tIns="0" bIns="0">
-            <a:spAutoFit/>
-          </a:bodyPr>
-          <a:lstStyle/>
-          <a:p>
-            <a:pPr algn="ctr">
-              <a:spcBef>
-                <a:spcPts val="0"/>
-              </a:spcBef>
-            </a:pPr>
-            <a:r>
-              <a:rPr sz="3000" b="1" i="0">
-                <a:solidFill>
-                  <a:srgbClr val="C0392B"/>
-                </a:solidFill>
-                <a:latin typeface="Calibri"/>
-              </a:rPr>
-              <a:t>+ 1 436 €</a:t>
-            </a:r>
-          </a:p>
-        </p:txBody>
-      </p:sp>
-      <p:sp>
-        <p:nvSpPr>
-          <p:cNvPr id="13" name="TextBox 12"/>
-          <p:cNvSpPr txBox="1"/>
-          <p:nvPr/>
-        </p:nvSpPr>
-        <p:spPr>
-          <a:xfrm>
-            <a:off x="4297680" y="2340864"/>
-            <a:ext cx="3566160" cy="411480"/>
-          </a:xfrm>
-          <a:prstGeom prst="rect">
-            <a:avLst/>
-          </a:prstGeom>
-          <a:noFill/>
-        </p:spPr>
-        <p:txBody>
-          <a:bodyPr wrap="square" anchor="t" lIns="0" rIns="0" tIns="0" bIns="0">
-            <a:spAutoFit/>
-          </a:bodyPr>
-          <a:lstStyle/>
-          <a:p>
-            <a:pPr algn="ctr">
-              <a:spcBef>
-                <a:spcPts val="0"/>
-              </a:spcBef>
-            </a:pPr>
-            <a:r>
-              <a:rPr sz="1250" b="0" i="0">
+          <p:cNvPr id="16" name="TextBox 15"/>
+          <p:cNvSpPr txBox="1"/>
+          <p:nvPr/>
+        </p:nvSpPr>
+        <p:spPr>
+          <a:xfrm>
+            <a:off x="6949440" y="2834640"/>
+            <a:ext cx="640080" cy="457200"/>
+          </a:xfrm>
+          <a:prstGeom prst="rect">
+            <a:avLst/>
+          </a:prstGeom>
+          <a:noFill/>
+        </p:spPr>
+        <p:txBody>
+          <a:bodyPr wrap="square" anchor="t" lIns="0" rIns="0" tIns="0" bIns="0">
+            <a:spAutoFit/>
+          </a:bodyPr>
+          <a:lstStyle/>
+          <a:p>
+            <a:pPr algn="l">
+              <a:spcBef>
+                <a:spcPts val="0"/>
+              </a:spcBef>
+            </a:pPr>
+            <a:r>
+              <a:rPr sz="1400" b="1" i="0">
+                <a:solidFill>
+                  <a:srgbClr val="2E6BA8"/>
+                </a:solidFill>
+                <a:latin typeface="Calibri"/>
+              </a:rPr>
+              <a:t>J2</a:t>
+            </a:r>
+          </a:p>
+        </p:txBody>
+      </p:sp>
+      <p:sp>
+        <p:nvSpPr>
+          <p:cNvPr id="17" name="TextBox 16"/>
+          <p:cNvSpPr txBox="1"/>
+          <p:nvPr/>
+        </p:nvSpPr>
+        <p:spPr>
+          <a:xfrm>
+            <a:off x="7589520" y="2834640"/>
+            <a:ext cx="2926080" cy="457200"/>
+          </a:xfrm>
+          <a:prstGeom prst="rect">
+            <a:avLst/>
+          </a:prstGeom>
+          <a:noFill/>
+        </p:spPr>
+        <p:txBody>
+          <a:bodyPr wrap="square" anchor="t" lIns="0" rIns="0" tIns="0" bIns="0">
+            <a:spAutoFit/>
+          </a:bodyPr>
+          <a:lstStyle/>
+          <a:p>
+            <a:pPr algn="l">
+              <a:spcBef>
+                <a:spcPts val="0"/>
+              </a:spcBef>
+            </a:pPr>
+            <a:r>
+              <a:rPr sz="1400" b="0" i="0">
                 <a:solidFill>
                   <a:srgbClr val="404040"/>
                 </a:solidFill>
                 <a:latin typeface="Calibri"/>
               </a:rPr>
-              <a:t>Budget : à corriger</a:t>
-            </a:r>
-          </a:p>
-        </p:txBody>
-      </p:sp>
-      <p:sp>
-        <p:nvSpPr>
-          <p:cNvPr id="14" name="Rounded Rectangle 13"/>
+              <a:t>Pièces prêtes</a:t>
+            </a:r>
+          </a:p>
+        </p:txBody>
+      </p:sp>
+      <p:sp>
+        <p:nvSpPr>
+          <p:cNvPr id="18" name="TextBox 17"/>
+          <p:cNvSpPr txBox="1"/>
+          <p:nvPr/>
+        </p:nvSpPr>
+        <p:spPr>
+          <a:xfrm>
+            <a:off x="10607040" y="2834640"/>
+            <a:ext cx="914400" cy="457200"/>
+          </a:xfrm>
+          <a:prstGeom prst="rect">
+            <a:avLst/>
+          </a:prstGeom>
+          <a:noFill/>
+        </p:spPr>
+        <p:txBody>
+          <a:bodyPr wrap="square" anchor="t" lIns="0" rIns="0" tIns="0" bIns="0">
+            <a:spAutoFit/>
+          </a:bodyPr>
+          <a:lstStyle/>
+          <a:p>
+            <a:pPr algn="r">
+              <a:spcBef>
+                <a:spcPts val="0"/>
+              </a:spcBef>
+            </a:pPr>
+            <a:r>
+              <a:rPr sz="1400" b="1" i="0">
+                <a:solidFill>
+                  <a:srgbClr val="1F4E79"/>
+                </a:solidFill>
+                <a:latin typeface="Calibri"/>
+              </a:rPr>
+              <a:t>j30</a:t>
+            </a:r>
+          </a:p>
+        </p:txBody>
+      </p:sp>
+      <p:sp>
+        <p:nvSpPr>
+          <p:cNvPr id="19" name="Rounded Rectangle 18"/>
           <p:cNvSpPr/>
           <p:nvPr/>
         </p:nvSpPr>
         <p:spPr>
           <a:xfrm>
-            <a:off x="8046720" y="1554480"/>
-            <a:ext cx="3566160" cy="1234440"/>
+            <a:off x="6766560" y="3438144"/>
+            <a:ext cx="4937760" cy="603504"/>
           </a:xfrm>
           <a:prstGeom prst="roundRect">
             <a:avLst/>
@@ -6146,92 +5467,175 @@
       </p:sp>
       <p:sp>
         <p:nvSpPr>
-          <p:cNvPr id="15" name="TextBox 14"/>
-          <p:cNvSpPr txBox="1"/>
-          <p:nvPr/>
-        </p:nvSpPr>
-        <p:spPr>
-          <a:xfrm>
-            <a:off x="8046720" y="1700784"/>
-            <a:ext cx="3566160" cy="640080"/>
-          </a:xfrm>
-          <a:prstGeom prst="rect">
-            <a:avLst/>
-          </a:prstGeom>
-          <a:noFill/>
-        </p:spPr>
-        <p:txBody>
-          <a:bodyPr wrap="square" anchor="t" lIns="0" rIns="0" tIns="0" bIns="0">
-            <a:spAutoFit/>
-          </a:bodyPr>
-          <a:lstStyle/>
-          <a:p>
-            <a:pPr algn="ctr">
-              <a:spcBef>
-                <a:spcPts val="0"/>
-              </a:spcBef>
-            </a:pPr>
-            <a:r>
-              <a:rPr sz="3000" b="1" i="0">
-                <a:solidFill>
-                  <a:srgbClr val="E67E22"/>
-                </a:solidFill>
-                <a:latin typeface="Calibri"/>
-              </a:rPr>
-              <a:t>3</a:t>
-            </a:r>
-          </a:p>
-        </p:txBody>
-      </p:sp>
-      <p:sp>
-        <p:nvSpPr>
-          <p:cNvPr id="16" name="TextBox 15"/>
-          <p:cNvSpPr txBox="1"/>
-          <p:nvPr/>
-        </p:nvSpPr>
-        <p:spPr>
-          <a:xfrm>
-            <a:off x="8046720" y="2340864"/>
-            <a:ext cx="3566160" cy="411480"/>
-          </a:xfrm>
-          <a:prstGeom prst="rect">
-            <a:avLst/>
-          </a:prstGeom>
-          <a:noFill/>
-        </p:spPr>
-        <p:txBody>
-          <a:bodyPr wrap="square" anchor="t" lIns="0" rIns="0" tIns="0" bIns="0">
-            <a:spAutoFit/>
-          </a:bodyPr>
-          <a:lstStyle/>
-          <a:p>
-            <a:pPr algn="ctr">
-              <a:spcBef>
-                <a:spcPts val="0"/>
-              </a:spcBef>
-            </a:pPr>
-            <a:r>
-              <a:rPr sz="1250" b="0" i="0">
+          <p:cNvPr id="20" name="TextBox 19"/>
+          <p:cNvSpPr txBox="1"/>
+          <p:nvPr/>
+        </p:nvSpPr>
+        <p:spPr>
+          <a:xfrm>
+            <a:off x="6949440" y="3547872"/>
+            <a:ext cx="640080" cy="457200"/>
+          </a:xfrm>
+          <a:prstGeom prst="rect">
+            <a:avLst/>
+          </a:prstGeom>
+          <a:noFill/>
+        </p:spPr>
+        <p:txBody>
+          <a:bodyPr wrap="square" anchor="t" lIns="0" rIns="0" tIns="0" bIns="0">
+            <a:spAutoFit/>
+          </a:bodyPr>
+          <a:lstStyle/>
+          <a:p>
+            <a:pPr algn="l">
+              <a:spcBef>
+                <a:spcPts val="0"/>
+              </a:spcBef>
+            </a:pPr>
+            <a:r>
+              <a:rPr sz="1400" b="1" i="0">
+                <a:solidFill>
+                  <a:srgbClr val="2E6BA8"/>
+                </a:solidFill>
+                <a:latin typeface="Calibri"/>
+              </a:rPr>
+              <a:t>J3</a:t>
+            </a:r>
+          </a:p>
+        </p:txBody>
+      </p:sp>
+      <p:sp>
+        <p:nvSpPr>
+          <p:cNvPr id="21" name="TextBox 20"/>
+          <p:cNvSpPr txBox="1"/>
+          <p:nvPr/>
+        </p:nvSpPr>
+        <p:spPr>
+          <a:xfrm>
+            <a:off x="7589520" y="3547872"/>
+            <a:ext cx="2926080" cy="457200"/>
+          </a:xfrm>
+          <a:prstGeom prst="rect">
+            <a:avLst/>
+          </a:prstGeom>
+          <a:noFill/>
+        </p:spPr>
+        <p:txBody>
+          <a:bodyPr wrap="square" anchor="t" lIns="0" rIns="0" tIns="0" bIns="0">
+            <a:spAutoFit/>
+          </a:bodyPr>
+          <a:lstStyle/>
+          <a:p>
+            <a:pPr algn="l">
+              <a:spcBef>
+                <a:spcPts val="0"/>
+              </a:spcBef>
+            </a:pPr>
+            <a:r>
+              <a:rPr sz="1400" b="0" i="0">
                 <a:solidFill>
                   <a:srgbClr val="404040"/>
                 </a:solidFill>
                 <a:latin typeface="Calibri"/>
               </a:rPr>
-              <a:t>Risques prioritaires</a:t>
-            </a:r>
-          </a:p>
-        </p:txBody>
-      </p:sp>
-      <p:sp>
-        <p:nvSpPr>
-          <p:cNvPr id="17" name="TextBox 16"/>
-          <p:cNvSpPr txBox="1"/>
-          <p:nvPr/>
-        </p:nvSpPr>
-        <p:spPr>
-          <a:xfrm>
-            <a:off x="548640" y="3200400"/>
-            <a:ext cx="10972800" cy="457200"/>
+              <a:t>Maquette fixée</a:t>
+            </a:r>
+          </a:p>
+        </p:txBody>
+      </p:sp>
+      <p:sp>
+        <p:nvSpPr>
+          <p:cNvPr id="22" name="TextBox 21"/>
+          <p:cNvSpPr txBox="1"/>
+          <p:nvPr/>
+        </p:nvSpPr>
+        <p:spPr>
+          <a:xfrm>
+            <a:off x="10607040" y="3547872"/>
+            <a:ext cx="914400" cy="457200"/>
+          </a:xfrm>
+          <a:prstGeom prst="rect">
+            <a:avLst/>
+          </a:prstGeom>
+          <a:noFill/>
+        </p:spPr>
+        <p:txBody>
+          <a:bodyPr wrap="square" anchor="t" lIns="0" rIns="0" tIns="0" bIns="0">
+            <a:spAutoFit/>
+          </a:bodyPr>
+          <a:lstStyle/>
+          <a:p>
+            <a:pPr algn="r">
+              <a:spcBef>
+                <a:spcPts val="0"/>
+              </a:spcBef>
+            </a:pPr>
+            <a:r>
+              <a:rPr sz="1400" b="1" i="0">
+                <a:solidFill>
+                  <a:srgbClr val="1F4E79"/>
+                </a:solidFill>
+                <a:latin typeface="Calibri"/>
+              </a:rPr>
+              <a:t>j34</a:t>
+            </a:r>
+          </a:p>
+        </p:txBody>
+      </p:sp>
+      <p:sp>
+        <p:nvSpPr>
+          <p:cNvPr id="23" name="Rounded Rectangle 22"/>
+          <p:cNvSpPr/>
+          <p:nvPr/>
+        </p:nvSpPr>
+        <p:spPr>
+          <a:xfrm>
+            <a:off x="6766560" y="4151376"/>
+            <a:ext cx="4937760" cy="603504"/>
+          </a:xfrm>
+          <a:prstGeom prst="roundRect">
+            <a:avLst/>
+          </a:prstGeom>
+          <a:solidFill>
+            <a:srgbClr val="EAF1F8"/>
+          </a:solidFill>
+          <a:ln>
+            <a:noFill/>
+          </a:ln>
+          <a:effectLst/>
+        </p:spPr>
+        <p:style>
+          <a:lnRef idx="1">
+            <a:schemeClr val="accent1"/>
+          </a:lnRef>
+          <a:fillRef idx="3">
+            <a:schemeClr val="accent1"/>
+          </a:fillRef>
+          <a:effectRef idx="2">
+            <a:schemeClr val="accent1"/>
+          </a:effectRef>
+          <a:fontRef idx="minor">
+            <a:schemeClr val="lt1"/>
+          </a:fontRef>
+        </p:style>
+        <p:txBody>
+          <a:bodyPr rtlCol="0" anchor="ctr"/>
+          <a:lstStyle/>
+          <a:p>
+            <a:pPr algn="ctr"/>
+          </a:p>
+        </p:txBody>
+      </p:sp>
+      <p:sp>
+        <p:nvSpPr>
+          <p:cNvPr id="24" name="TextBox 23"/>
+          <p:cNvSpPr txBox="1"/>
+          <p:nvPr/>
+        </p:nvSpPr>
+        <p:spPr>
+          <a:xfrm>
+            <a:off x="6949440" y="4261104"/>
+            <a:ext cx="640080" cy="457200"/>
           </a:xfrm>
           <a:prstGeom prst="rect">
             <a:avLst/>
@@ -6250,27 +5654,149 @@
               </a:spcBef>
             </a:pPr>
             <a:r>
-              <a:rPr sz="1800" b="1" i="0">
+              <a:rPr sz="1400" b="1" i="0">
+                <a:solidFill>
+                  <a:srgbClr val="2E6BA8"/>
+                </a:solidFill>
+                <a:latin typeface="Calibri"/>
+              </a:rPr>
+              <a:t>J4</a:t>
+            </a:r>
+          </a:p>
+        </p:txBody>
+      </p:sp>
+      <p:sp>
+        <p:nvSpPr>
+          <p:cNvPr id="25" name="TextBox 24"/>
+          <p:cNvSpPr txBox="1"/>
+          <p:nvPr/>
+        </p:nvSpPr>
+        <p:spPr>
+          <a:xfrm>
+            <a:off x="7589520" y="4261104"/>
+            <a:ext cx="2926080" cy="457200"/>
+          </a:xfrm>
+          <a:prstGeom prst="rect">
+            <a:avLst/>
+          </a:prstGeom>
+          <a:noFill/>
+        </p:spPr>
+        <p:txBody>
+          <a:bodyPr wrap="square" anchor="t" lIns="0" rIns="0" tIns="0" bIns="0">
+            <a:spAutoFit/>
+          </a:bodyPr>
+          <a:lstStyle/>
+          <a:p>
+            <a:pPr algn="l">
+              <a:spcBef>
+                <a:spcPts val="0"/>
+              </a:spcBef>
+            </a:pPr>
+            <a:r>
+              <a:rPr sz="1400" b="0" i="0">
+                <a:solidFill>
+                  <a:srgbClr val="404040"/>
+                </a:solidFill>
+                <a:latin typeface="Calibri"/>
+              </a:rPr>
+              <a:t>Revue client</a:t>
+            </a:r>
+          </a:p>
+        </p:txBody>
+      </p:sp>
+      <p:sp>
+        <p:nvSpPr>
+          <p:cNvPr id="26" name="TextBox 25"/>
+          <p:cNvSpPr txBox="1"/>
+          <p:nvPr/>
+        </p:nvSpPr>
+        <p:spPr>
+          <a:xfrm>
+            <a:off x="10607040" y="4261104"/>
+            <a:ext cx="914400" cy="457200"/>
+          </a:xfrm>
+          <a:prstGeom prst="rect">
+            <a:avLst/>
+          </a:prstGeom>
+          <a:noFill/>
+        </p:spPr>
+        <p:txBody>
+          <a:bodyPr wrap="square" anchor="t" lIns="0" rIns="0" tIns="0" bIns="0">
+            <a:spAutoFit/>
+          </a:bodyPr>
+          <a:lstStyle/>
+          <a:p>
+            <a:pPr algn="r">
+              <a:spcBef>
+                <a:spcPts val="0"/>
+              </a:spcBef>
+            </a:pPr>
+            <a:r>
+              <a:rPr sz="1400" b="1" i="0">
                 <a:solidFill>
                   <a:srgbClr val="1F4E79"/>
                 </a:solidFill>
                 <a:latin typeface="Calibri"/>
               </a:rPr>
-              <a:t>Le projet est tenable, mais ne laisse aucune place à l’improvisation.</a:t>
-            </a:r>
-          </a:p>
-        </p:txBody>
-      </p:sp>
-      <p:sp>
-        <p:nvSpPr>
-          <p:cNvPr id="18" name="TextBox 17"/>
-          <p:cNvSpPr txBox="1"/>
-          <p:nvPr/>
-        </p:nvSpPr>
-        <p:spPr>
-          <a:xfrm>
-            <a:off x="548640" y="3794760"/>
-            <a:ext cx="10972800" cy="457200"/>
+              <a:t>j39</a:t>
+            </a:r>
+          </a:p>
+        </p:txBody>
+      </p:sp>
+      <p:sp>
+        <p:nvSpPr>
+          <p:cNvPr id="27" name="Rounded Rectangle 26"/>
+          <p:cNvSpPr/>
+          <p:nvPr/>
+        </p:nvSpPr>
+        <p:spPr>
+          <a:xfrm>
+            <a:off x="6766560" y="4864608"/>
+            <a:ext cx="4937760" cy="603504"/>
+          </a:xfrm>
+          <a:prstGeom prst="roundRect">
+            <a:avLst/>
+          </a:prstGeom>
+          <a:solidFill>
+            <a:srgbClr val="EAF1F8"/>
+          </a:solidFill>
+          <a:ln>
+            <a:noFill/>
+          </a:ln>
+          <a:effectLst/>
+        </p:spPr>
+        <p:style>
+          <a:lnRef idx="1">
+            <a:schemeClr val="accent1"/>
+          </a:lnRef>
+          <a:fillRef idx="3">
+            <a:schemeClr val="accent1"/>
+          </a:fillRef>
+          <a:effectRef idx="2">
+            <a:schemeClr val="accent1"/>
+          </a:effectRef>
+          <a:fontRef idx="minor">
+            <a:schemeClr val="lt1"/>
+          </a:fontRef>
+        </p:style>
+        <p:txBody>
+          <a:bodyPr rtlCol="0" anchor="ctr"/>
+          <a:lstStyle/>
+          <a:p>
+            <a:pPr algn="ctr"/>
+          </a:p>
+        </p:txBody>
+      </p:sp>
+      <p:sp>
+        <p:nvSpPr>
+          <p:cNvPr id="28" name="TextBox 27"/>
+          <p:cNvSpPr txBox="1"/>
+          <p:nvPr/>
+        </p:nvSpPr>
+        <p:spPr>
+          <a:xfrm>
+            <a:off x="6949440" y="4974336"/>
+            <a:ext cx="640080" cy="457200"/>
           </a:xfrm>
           <a:prstGeom prst="rect">
             <a:avLst/>
@@ -6289,107 +5815,175 @@
               </a:spcBef>
             </a:pPr>
             <a:r>
-              <a:rPr sz="1600" b="0" i="0">
+              <a:rPr sz="1400" b="1" i="0">
+                <a:solidFill>
+                  <a:srgbClr val="2E6BA8"/>
+                </a:solidFill>
+                <a:latin typeface="Calibri"/>
+              </a:rPr>
+              <a:t>J5</a:t>
+            </a:r>
+          </a:p>
+        </p:txBody>
+      </p:sp>
+      <p:sp>
+        <p:nvSpPr>
+          <p:cNvPr id="29" name="TextBox 28"/>
+          <p:cNvSpPr txBox="1"/>
+          <p:nvPr/>
+        </p:nvSpPr>
+        <p:spPr>
+          <a:xfrm>
+            <a:off x="7589520" y="4974336"/>
+            <a:ext cx="2926080" cy="457200"/>
+          </a:xfrm>
+          <a:prstGeom prst="rect">
+            <a:avLst/>
+          </a:prstGeom>
+          <a:noFill/>
+        </p:spPr>
+        <p:txBody>
+          <a:bodyPr wrap="square" anchor="t" lIns="0" rIns="0" tIns="0" bIns="0">
+            <a:spAutoFit/>
+          </a:bodyPr>
+          <a:lstStyle/>
+          <a:p>
+            <a:pPr algn="l">
+              <a:spcBef>
+                <a:spcPts val="0"/>
+              </a:spcBef>
+            </a:pPr>
+            <a:r>
+              <a:rPr sz="1400" b="0" i="0">
                 <a:solidFill>
                   <a:srgbClr val="404040"/>
                 </a:solidFill>
                 <a:latin typeface="Calibri"/>
               </a:rPr>
-              <a:t>Trois conditions pour honorer l’engagement des 85 jours :</a:t>
-            </a:r>
-          </a:p>
-        </p:txBody>
-      </p:sp>
-      <p:sp>
-        <p:nvSpPr>
-          <p:cNvPr id="19" name="TextBox 18"/>
-          <p:cNvSpPr txBox="1"/>
-          <p:nvPr/>
-        </p:nvSpPr>
-        <p:spPr>
-          <a:xfrm>
-            <a:off x="822960" y="4343400"/>
-            <a:ext cx="10515600" cy="1828800"/>
-          </a:xfrm>
-          <a:prstGeom prst="rect">
-            <a:avLst/>
-          </a:prstGeom>
-          <a:noFill/>
-        </p:spPr>
-        <p:txBody>
-          <a:bodyPr wrap="square" anchor="t" lIns="0" rIns="0" tIns="0" bIns="0">
-            <a:spAutoFit/>
-          </a:bodyPr>
-          <a:lstStyle/>
-          <a:p>
-            <a:pPr algn="l">
-              <a:spcBef>
-                <a:spcPts val="0"/>
-              </a:spcBef>
-              <a:spcAft>
-                <a:spcPts val="1000"/>
-              </a:spcAft>
-            </a:pPr>
-            <a:r>
-              <a:rPr sz="1600" b="0" i="0">
-                <a:solidFill>
-                  <a:srgbClr val="404040"/>
-                </a:solidFill>
-                <a:latin typeface="Calibri"/>
-              </a:rPr>
-              <a:t>•  sécuriser la fabrication des pièces (tâche H, point dur du planning) ;</a:t>
-            </a:r>
-          </a:p>
-          <a:p>
-            <a:pPr algn="l">
-              <a:spcBef>
-                <a:spcPts val="0"/>
-              </a:spcBef>
-              <a:spcAft>
-                <a:spcPts val="1000"/>
-              </a:spcAft>
-            </a:pPr>
-            <a:r>
-              <a:rPr sz="1600" b="0" i="0">
-                <a:solidFill>
-                  <a:srgbClr val="404040"/>
-                </a:solidFill>
-                <a:latin typeface="Calibri"/>
-              </a:rPr>
-              <a:t>•  faire valider le plan d’économies par la Direction avant le lancement ;</a:t>
-            </a:r>
-          </a:p>
-          <a:p>
-            <a:pPr algn="l">
-              <a:spcBef>
-                <a:spcPts val="0"/>
-              </a:spcBef>
-              <a:spcAft>
-                <a:spcPts val="1000"/>
-              </a:spcAft>
-            </a:pPr>
-            <a:r>
-              <a:rPr sz="1600" b="0" i="0">
-                <a:solidFill>
-                  <a:srgbClr val="404040"/>
-                </a:solidFill>
-                <a:latin typeface="Calibri"/>
-              </a:rPr>
-              <a:t>•  tenir les revues avec le client pour verrouiller les jalons.</a:t>
-            </a:r>
-          </a:p>
-        </p:txBody>
-      </p:sp>
-      <p:sp>
-        <p:nvSpPr>
-          <p:cNvPr id="20" name="Rectangle 19"/>
+              <a:t>Maquette prête</a:t>
+            </a:r>
+          </a:p>
+        </p:txBody>
+      </p:sp>
+      <p:sp>
+        <p:nvSpPr>
+          <p:cNvPr id="30" name="TextBox 29"/>
+          <p:cNvSpPr txBox="1"/>
+          <p:nvPr/>
+        </p:nvSpPr>
+        <p:spPr>
+          <a:xfrm>
+            <a:off x="10607040" y="4974336"/>
+            <a:ext cx="914400" cy="457200"/>
+          </a:xfrm>
+          <a:prstGeom prst="rect">
+            <a:avLst/>
+          </a:prstGeom>
+          <a:noFill/>
+        </p:spPr>
+        <p:txBody>
+          <a:bodyPr wrap="square" anchor="t" lIns="0" rIns="0" tIns="0" bIns="0">
+            <a:spAutoFit/>
+          </a:bodyPr>
+          <a:lstStyle/>
+          <a:p>
+            <a:pPr algn="r">
+              <a:spcBef>
+                <a:spcPts val="0"/>
+              </a:spcBef>
+            </a:pPr>
+            <a:r>
+              <a:rPr sz="1400" b="1" i="0">
+                <a:solidFill>
+                  <a:srgbClr val="1F4E79"/>
+                </a:solidFill>
+                <a:latin typeface="Calibri"/>
+              </a:rPr>
+              <a:t>j45</a:t>
+            </a:r>
+          </a:p>
+        </p:txBody>
+      </p:sp>
+    </p:spTree>
+  </p:cSld>
+  <p:clrMapOvr>
+    <a:masterClrMapping/>
+  </p:clrMapOvr>
+</p:sld>
+</file>
+
+<file path=ppt/slides/slide13.xml><?xml version="1.0" encoding="utf-8"?>
+<p:sld xmlns:a="http://schemas.openxmlformats.org/drawingml/2006/main" xmlns:p="http://schemas.openxmlformats.org/presentationml/2006/main" xmlns:r="http://schemas.openxmlformats.org/officeDocument/2006/relationships">
+  <p:cSld>
+    <p:bg>
+      <p:bgPr>
+        <a:solidFill>
+          <a:srgbClr val="FFFFFF"/>
+        </a:solidFill>
+        <a:effectLst/>
+      </p:bgPr>
+    </p:bg>
+    <p:spTree>
+      <p:nvGrpSpPr>
+        <p:cNvPr id="1" name=""/>
+        <p:cNvGrpSpPr/>
+        <p:nvPr/>
+      </p:nvGrpSpPr>
+      <p:grpSpPr/>
+      <p:sp>
+        <p:nvSpPr>
+          <p:cNvPr id="2" name="Rectangle 1"/>
           <p:cNvSpPr/>
           <p:nvPr/>
         </p:nvSpPr>
         <p:spPr>
           <a:xfrm>
-            <a:off x="548640" y="6172200"/>
-            <a:ext cx="11094415" cy="31750"/>
+            <a:off x="0" y="0"/>
+            <a:ext cx="12191695" cy="1143000"/>
+          </a:xfrm>
+          <a:prstGeom prst="rect">
+            <a:avLst/>
+          </a:prstGeom>
+          <a:solidFill>
+            <a:srgbClr val="1F4E79"/>
+          </a:solidFill>
+          <a:ln>
+            <a:noFill/>
+          </a:ln>
+          <a:effectLst/>
+        </p:spPr>
+        <p:style>
+          <a:lnRef idx="1">
+            <a:schemeClr val="accent1"/>
+          </a:lnRef>
+          <a:fillRef idx="3">
+            <a:schemeClr val="accent1"/>
+          </a:fillRef>
+          <a:effectRef idx="2">
+            <a:schemeClr val="accent1"/>
+          </a:effectRef>
+          <a:fontRef idx="minor">
+            <a:schemeClr val="lt1"/>
+          </a:fontRef>
+        </p:style>
+        <p:txBody>
+          <a:bodyPr rtlCol="0" anchor="ctr"/>
+          <a:lstStyle/>
+          <a:p>
+            <a:pPr algn="ctr"/>
+          </a:p>
+        </p:txBody>
+      </p:sp>
+      <p:sp>
+        <p:nvSpPr>
+          <p:cNvPr id="3" name="Rectangle 2"/>
+          <p:cNvSpPr/>
+          <p:nvPr/>
+        </p:nvSpPr>
+        <p:spPr>
+          <a:xfrm>
+            <a:off x="0" y="1143000"/>
+            <a:ext cx="12191695" cy="38100"/>
           </a:xfrm>
           <a:prstGeom prst="rect">
             <a:avLst/>
@@ -6426,13 +6020,737 @@
       </p:sp>
       <p:sp>
         <p:nvSpPr>
+          <p:cNvPr id="4" name="TextBox 3"/>
+          <p:cNvSpPr txBox="1"/>
+          <p:nvPr/>
+        </p:nvSpPr>
+        <p:spPr>
+          <a:xfrm>
+            <a:off x="502920" y="164592"/>
+            <a:ext cx="10515600" cy="320040"/>
+          </a:xfrm>
+          <a:prstGeom prst="rect">
+            <a:avLst/>
+          </a:prstGeom>
+          <a:noFill/>
+        </p:spPr>
+        <p:txBody>
+          <a:bodyPr wrap="square" anchor="t" lIns="0" rIns="0" tIns="0" bIns="0">
+            <a:spAutoFit/>
+          </a:bodyPr>
+          <a:lstStyle/>
+          <a:p>
+            <a:pPr algn="l">
+              <a:spcBef>
+                <a:spcPts val="0"/>
+              </a:spcBef>
+            </a:pPr>
+            <a:r>
+              <a:rPr sz="1200" b="1" i="0">
+                <a:solidFill>
+                  <a:srgbClr val="BED3E9"/>
+                </a:solidFill>
+                <a:latin typeface="Calibri"/>
+              </a:rPr>
+              <a:t>SYNTHÈSE</a:t>
+            </a:r>
+          </a:p>
+        </p:txBody>
+      </p:sp>
+      <p:sp>
+        <p:nvSpPr>
+          <p:cNvPr id="5" name="TextBox 4"/>
+          <p:cNvSpPr txBox="1"/>
+          <p:nvPr/>
+        </p:nvSpPr>
+        <p:spPr>
+          <a:xfrm>
+            <a:off x="502920" y="420624"/>
+            <a:ext cx="11155680" cy="640080"/>
+          </a:xfrm>
+          <a:prstGeom prst="rect">
+            <a:avLst/>
+          </a:prstGeom>
+          <a:noFill/>
+        </p:spPr>
+        <p:txBody>
+          <a:bodyPr wrap="square" anchor="t" lIns="0" rIns="0" tIns="0" bIns="0">
+            <a:spAutoFit/>
+          </a:bodyPr>
+          <a:lstStyle/>
+          <a:p>
+            <a:pPr algn="l">
+              <a:spcBef>
+                <a:spcPts val="0"/>
+              </a:spcBef>
+            </a:pPr>
+            <a:r>
+              <a:rPr sz="2600" b="1" i="0">
+                <a:solidFill>
+                  <a:srgbClr val="FFFFFF"/>
+                </a:solidFill>
+                <a:latin typeface="Calibri"/>
+              </a:rPr>
+              <a:t>Conclusion</a:t>
+            </a:r>
+          </a:p>
+        </p:txBody>
+      </p:sp>
+      <p:sp>
+        <p:nvSpPr>
+          <p:cNvPr id="6" name="TextBox 5"/>
+          <p:cNvSpPr txBox="1"/>
+          <p:nvPr/>
+        </p:nvSpPr>
+        <p:spPr>
+          <a:xfrm>
+            <a:off x="502920" y="6446520"/>
+            <a:ext cx="5486400" cy="274320"/>
+          </a:xfrm>
+          <a:prstGeom prst="rect">
+            <a:avLst/>
+          </a:prstGeom>
+          <a:noFill/>
+        </p:spPr>
+        <p:txBody>
+          <a:bodyPr wrap="square" anchor="t" lIns="0" rIns="0" tIns="0" bIns="0">
+            <a:spAutoFit/>
+          </a:bodyPr>
+          <a:lstStyle/>
+          <a:p>
+            <a:pPr algn="l">
+              <a:spcBef>
+                <a:spcPts val="0"/>
+              </a:spcBef>
+            </a:pPr>
+            <a:r>
+              <a:rPr sz="900" b="0" i="0">
+                <a:solidFill>
+                  <a:srgbClr val="8A8A8A"/>
+                </a:solidFill>
+                <a:latin typeface="Calibri"/>
+              </a:rPr>
+              <a:t>Projet GREMLIN — Phase de préparation</a:t>
+            </a:r>
+          </a:p>
+        </p:txBody>
+      </p:sp>
+      <p:sp>
+        <p:nvSpPr>
+          <p:cNvPr id="7" name="TextBox 6"/>
+          <p:cNvSpPr txBox="1"/>
+          <p:nvPr/>
+        </p:nvSpPr>
+        <p:spPr>
+          <a:xfrm>
+            <a:off x="10332720" y="6446520"/>
+            <a:ext cx="1371600" cy="274320"/>
+          </a:xfrm>
+          <a:prstGeom prst="rect">
+            <a:avLst/>
+          </a:prstGeom>
+          <a:noFill/>
+        </p:spPr>
+        <p:txBody>
+          <a:bodyPr wrap="square" anchor="t" lIns="0" rIns="0" tIns="0" bIns="0">
+            <a:spAutoFit/>
+          </a:bodyPr>
+          <a:lstStyle/>
+          <a:p>
+            <a:pPr algn="r">
+              <a:spcBef>
+                <a:spcPts val="0"/>
+              </a:spcBef>
+            </a:pPr>
+            <a:r>
+              <a:rPr sz="900" b="0" i="0">
+                <a:solidFill>
+                  <a:srgbClr val="8A8A8A"/>
+                </a:solidFill>
+                <a:latin typeface="Calibri"/>
+              </a:rPr>
+              <a:t>12</a:t>
+            </a:r>
+          </a:p>
+        </p:txBody>
+      </p:sp>
+      <p:sp>
+        <p:nvSpPr>
+          <p:cNvPr id="8" name="Rounded Rectangle 7"/>
+          <p:cNvSpPr/>
+          <p:nvPr/>
+        </p:nvSpPr>
+        <p:spPr>
+          <a:xfrm>
+            <a:off x="548640" y="1554480"/>
+            <a:ext cx="3566160" cy="1234440"/>
+          </a:xfrm>
+          <a:prstGeom prst="roundRect">
+            <a:avLst/>
+          </a:prstGeom>
+          <a:solidFill>
+            <a:srgbClr val="EAF1F8"/>
+          </a:solidFill>
+          <a:ln>
+            <a:noFill/>
+          </a:ln>
+          <a:effectLst/>
+        </p:spPr>
+        <p:style>
+          <a:lnRef idx="1">
+            <a:schemeClr val="accent1"/>
+          </a:lnRef>
+          <a:fillRef idx="3">
+            <a:schemeClr val="accent1"/>
+          </a:fillRef>
+          <a:effectRef idx="2">
+            <a:schemeClr val="accent1"/>
+          </a:effectRef>
+          <a:fontRef idx="minor">
+            <a:schemeClr val="lt1"/>
+          </a:fontRef>
+        </p:style>
+        <p:txBody>
+          <a:bodyPr rtlCol="0" anchor="ctr"/>
+          <a:lstStyle/>
+          <a:p>
+            <a:pPr algn="ctr"/>
+          </a:p>
+        </p:txBody>
+      </p:sp>
+      <p:sp>
+        <p:nvSpPr>
+          <p:cNvPr id="9" name="TextBox 8"/>
+          <p:cNvSpPr txBox="1"/>
+          <p:nvPr/>
+        </p:nvSpPr>
+        <p:spPr>
+          <a:xfrm>
+            <a:off x="548640" y="1700784"/>
+            <a:ext cx="3566160" cy="640080"/>
+          </a:xfrm>
+          <a:prstGeom prst="rect">
+            <a:avLst/>
+          </a:prstGeom>
+          <a:noFill/>
+        </p:spPr>
+        <p:txBody>
+          <a:bodyPr wrap="square" anchor="t" lIns="0" rIns="0" tIns="0" bIns="0">
+            <a:spAutoFit/>
+          </a:bodyPr>
+          <a:lstStyle/>
+          <a:p>
+            <a:pPr algn="ctr">
+              <a:spcBef>
+                <a:spcPts val="0"/>
+              </a:spcBef>
+            </a:pPr>
+            <a:r>
+              <a:rPr sz="3000" b="1" i="0">
+                <a:solidFill>
+                  <a:srgbClr val="2E7D32"/>
+                </a:solidFill>
+                <a:latin typeface="Calibri"/>
+              </a:rPr>
+              <a:t>45 / 45 j</a:t>
+            </a:r>
+          </a:p>
+        </p:txBody>
+      </p:sp>
+      <p:sp>
+        <p:nvSpPr>
+          <p:cNvPr id="10" name="TextBox 9"/>
+          <p:cNvSpPr txBox="1"/>
+          <p:nvPr/>
+        </p:nvSpPr>
+        <p:spPr>
+          <a:xfrm>
+            <a:off x="548640" y="2340864"/>
+            <a:ext cx="3566160" cy="411480"/>
+          </a:xfrm>
+          <a:prstGeom prst="rect">
+            <a:avLst/>
+          </a:prstGeom>
+          <a:noFill/>
+        </p:spPr>
+        <p:txBody>
+          <a:bodyPr wrap="square" anchor="t" lIns="0" rIns="0" tIns="0" bIns="0">
+            <a:spAutoFit/>
+          </a:bodyPr>
+          <a:lstStyle/>
+          <a:p>
+            <a:pPr algn="ctr">
+              <a:spcBef>
+                <a:spcPts val="0"/>
+              </a:spcBef>
+            </a:pPr>
+            <a:r>
+              <a:rPr sz="1250" b="0" i="0">
+                <a:solidFill>
+                  <a:srgbClr val="404040"/>
+                </a:solidFill>
+                <a:latin typeface="Calibri"/>
+              </a:rPr>
+              <a:t>Délai : respecté, sans marge</a:t>
+            </a:r>
+          </a:p>
+        </p:txBody>
+      </p:sp>
+      <p:sp>
+        <p:nvSpPr>
+          <p:cNvPr id="11" name="Rounded Rectangle 10"/>
+          <p:cNvSpPr/>
+          <p:nvPr/>
+        </p:nvSpPr>
+        <p:spPr>
+          <a:xfrm>
+            <a:off x="4297680" y="1554480"/>
+            <a:ext cx="3566160" cy="1234440"/>
+          </a:xfrm>
+          <a:prstGeom prst="roundRect">
+            <a:avLst/>
+          </a:prstGeom>
+          <a:solidFill>
+            <a:srgbClr val="EAF1F8"/>
+          </a:solidFill>
+          <a:ln>
+            <a:noFill/>
+          </a:ln>
+          <a:effectLst/>
+        </p:spPr>
+        <p:style>
+          <a:lnRef idx="1">
+            <a:schemeClr val="accent1"/>
+          </a:lnRef>
+          <a:fillRef idx="3">
+            <a:schemeClr val="accent1"/>
+          </a:fillRef>
+          <a:effectRef idx="2">
+            <a:schemeClr val="accent1"/>
+          </a:effectRef>
+          <a:fontRef idx="minor">
+            <a:schemeClr val="lt1"/>
+          </a:fontRef>
+        </p:style>
+        <p:txBody>
+          <a:bodyPr rtlCol="0" anchor="ctr"/>
+          <a:lstStyle/>
+          <a:p>
+            <a:pPr algn="ctr"/>
+          </a:p>
+        </p:txBody>
+      </p:sp>
+      <p:sp>
+        <p:nvSpPr>
+          <p:cNvPr id="12" name="TextBox 11"/>
+          <p:cNvSpPr txBox="1"/>
+          <p:nvPr/>
+        </p:nvSpPr>
+        <p:spPr>
+          <a:xfrm>
+            <a:off x="4297680" y="1700784"/>
+            <a:ext cx="3566160" cy="640080"/>
+          </a:xfrm>
+          <a:prstGeom prst="rect">
+            <a:avLst/>
+          </a:prstGeom>
+          <a:noFill/>
+        </p:spPr>
+        <p:txBody>
+          <a:bodyPr wrap="square" anchor="t" lIns="0" rIns="0" tIns="0" bIns="0">
+            <a:spAutoFit/>
+          </a:bodyPr>
+          <a:lstStyle/>
+          <a:p>
+            <a:pPr algn="ctr">
+              <a:spcBef>
+                <a:spcPts val="0"/>
+              </a:spcBef>
+            </a:pPr>
+            <a:r>
+              <a:rPr sz="3000" b="1" i="0">
+                <a:solidFill>
+                  <a:srgbClr val="C0392B"/>
+                </a:solidFill>
+                <a:latin typeface="Calibri"/>
+              </a:rPr>
+              <a:t>+ 1 436 €</a:t>
+            </a:r>
+          </a:p>
+        </p:txBody>
+      </p:sp>
+      <p:sp>
+        <p:nvSpPr>
+          <p:cNvPr id="13" name="TextBox 12"/>
+          <p:cNvSpPr txBox="1"/>
+          <p:nvPr/>
+        </p:nvSpPr>
+        <p:spPr>
+          <a:xfrm>
+            <a:off x="4297680" y="2340864"/>
+            <a:ext cx="3566160" cy="411480"/>
+          </a:xfrm>
+          <a:prstGeom prst="rect">
+            <a:avLst/>
+          </a:prstGeom>
+          <a:noFill/>
+        </p:spPr>
+        <p:txBody>
+          <a:bodyPr wrap="square" anchor="t" lIns="0" rIns="0" tIns="0" bIns="0">
+            <a:spAutoFit/>
+          </a:bodyPr>
+          <a:lstStyle/>
+          <a:p>
+            <a:pPr algn="ctr">
+              <a:spcBef>
+                <a:spcPts val="0"/>
+              </a:spcBef>
+            </a:pPr>
+            <a:r>
+              <a:rPr sz="1250" b="0" i="0">
+                <a:solidFill>
+                  <a:srgbClr val="404040"/>
+                </a:solidFill>
+                <a:latin typeface="Calibri"/>
+              </a:rPr>
+              <a:t>Budget : à corriger</a:t>
+            </a:r>
+          </a:p>
+        </p:txBody>
+      </p:sp>
+      <p:sp>
+        <p:nvSpPr>
+          <p:cNvPr id="14" name="Rounded Rectangle 13"/>
+          <p:cNvSpPr/>
+          <p:nvPr/>
+        </p:nvSpPr>
+        <p:spPr>
+          <a:xfrm>
+            <a:off x="8046720" y="1554480"/>
+            <a:ext cx="3566160" cy="1234440"/>
+          </a:xfrm>
+          <a:prstGeom prst="roundRect">
+            <a:avLst/>
+          </a:prstGeom>
+          <a:solidFill>
+            <a:srgbClr val="EAF1F8"/>
+          </a:solidFill>
+          <a:ln>
+            <a:noFill/>
+          </a:ln>
+          <a:effectLst/>
+        </p:spPr>
+        <p:style>
+          <a:lnRef idx="1">
+            <a:schemeClr val="accent1"/>
+          </a:lnRef>
+          <a:fillRef idx="3">
+            <a:schemeClr val="accent1"/>
+          </a:fillRef>
+          <a:effectRef idx="2">
+            <a:schemeClr val="accent1"/>
+          </a:effectRef>
+          <a:fontRef idx="minor">
+            <a:schemeClr val="lt1"/>
+          </a:fontRef>
+        </p:style>
+        <p:txBody>
+          <a:bodyPr rtlCol="0" anchor="ctr"/>
+          <a:lstStyle/>
+          <a:p>
+            <a:pPr algn="ctr"/>
+          </a:p>
+        </p:txBody>
+      </p:sp>
+      <p:sp>
+        <p:nvSpPr>
+          <p:cNvPr id="15" name="TextBox 14"/>
+          <p:cNvSpPr txBox="1"/>
+          <p:nvPr/>
+        </p:nvSpPr>
+        <p:spPr>
+          <a:xfrm>
+            <a:off x="8046720" y="1700784"/>
+            <a:ext cx="3566160" cy="640080"/>
+          </a:xfrm>
+          <a:prstGeom prst="rect">
+            <a:avLst/>
+          </a:prstGeom>
+          <a:noFill/>
+        </p:spPr>
+        <p:txBody>
+          <a:bodyPr wrap="square" anchor="t" lIns="0" rIns="0" tIns="0" bIns="0">
+            <a:spAutoFit/>
+          </a:bodyPr>
+          <a:lstStyle/>
+          <a:p>
+            <a:pPr algn="ctr">
+              <a:spcBef>
+                <a:spcPts val="0"/>
+              </a:spcBef>
+            </a:pPr>
+            <a:r>
+              <a:rPr sz="3000" b="1" i="0">
+                <a:solidFill>
+                  <a:srgbClr val="E67E22"/>
+                </a:solidFill>
+                <a:latin typeface="Calibri"/>
+              </a:rPr>
+              <a:t>3</a:t>
+            </a:r>
+          </a:p>
+        </p:txBody>
+      </p:sp>
+      <p:sp>
+        <p:nvSpPr>
+          <p:cNvPr id="16" name="TextBox 15"/>
+          <p:cNvSpPr txBox="1"/>
+          <p:nvPr/>
+        </p:nvSpPr>
+        <p:spPr>
+          <a:xfrm>
+            <a:off x="8046720" y="2340864"/>
+            <a:ext cx="3566160" cy="411480"/>
+          </a:xfrm>
+          <a:prstGeom prst="rect">
+            <a:avLst/>
+          </a:prstGeom>
+          <a:noFill/>
+        </p:spPr>
+        <p:txBody>
+          <a:bodyPr wrap="square" anchor="t" lIns="0" rIns="0" tIns="0" bIns="0">
+            <a:spAutoFit/>
+          </a:bodyPr>
+          <a:lstStyle/>
+          <a:p>
+            <a:pPr algn="ctr">
+              <a:spcBef>
+                <a:spcPts val="0"/>
+              </a:spcBef>
+            </a:pPr>
+            <a:r>
+              <a:rPr sz="1250" b="0" i="0">
+                <a:solidFill>
+                  <a:srgbClr val="404040"/>
+                </a:solidFill>
+                <a:latin typeface="Calibri"/>
+              </a:rPr>
+              <a:t>Risques prioritaires</a:t>
+            </a:r>
+          </a:p>
+        </p:txBody>
+      </p:sp>
+      <p:sp>
+        <p:nvSpPr>
+          <p:cNvPr id="17" name="TextBox 16"/>
+          <p:cNvSpPr txBox="1"/>
+          <p:nvPr/>
+        </p:nvSpPr>
+        <p:spPr>
+          <a:xfrm>
+            <a:off x="548640" y="3200400"/>
+            <a:ext cx="10972800" cy="457200"/>
+          </a:xfrm>
+          <a:prstGeom prst="rect">
+            <a:avLst/>
+          </a:prstGeom>
+          <a:noFill/>
+        </p:spPr>
+        <p:txBody>
+          <a:bodyPr wrap="square" anchor="t" lIns="0" rIns="0" tIns="0" bIns="0">
+            <a:spAutoFit/>
+          </a:bodyPr>
+          <a:lstStyle/>
+          <a:p>
+            <a:pPr algn="l">
+              <a:spcBef>
+                <a:spcPts val="0"/>
+              </a:spcBef>
+            </a:pPr>
+            <a:r>
+              <a:rPr sz="1800" b="1" i="0">
+                <a:solidFill>
+                  <a:srgbClr val="1F4E79"/>
+                </a:solidFill>
+                <a:latin typeface="Calibri"/>
+              </a:rPr>
+              <a:t>Le projet est tenable, mais ne laisse aucune place à l’improvisation.</a:t>
+            </a:r>
+          </a:p>
+        </p:txBody>
+      </p:sp>
+      <p:sp>
+        <p:nvSpPr>
+          <p:cNvPr id="18" name="TextBox 17"/>
+          <p:cNvSpPr txBox="1"/>
+          <p:nvPr/>
+        </p:nvSpPr>
+        <p:spPr>
+          <a:xfrm>
+            <a:off x="548640" y="3794760"/>
+            <a:ext cx="10972800" cy="457200"/>
+          </a:xfrm>
+          <a:prstGeom prst="rect">
+            <a:avLst/>
+          </a:prstGeom>
+          <a:noFill/>
+        </p:spPr>
+        <p:txBody>
+          <a:bodyPr wrap="square" anchor="t" lIns="0" rIns="0" tIns="0" bIns="0">
+            <a:spAutoFit/>
+          </a:bodyPr>
+          <a:lstStyle/>
+          <a:p>
+            <a:pPr algn="l">
+              <a:spcBef>
+                <a:spcPts val="0"/>
+              </a:spcBef>
+            </a:pPr>
+            <a:r>
+              <a:rPr sz="1600" b="0" i="0">
+                <a:solidFill>
+                  <a:srgbClr val="404040"/>
+                </a:solidFill>
+                <a:latin typeface="Calibri"/>
+              </a:rPr>
+              <a:t>Trois conditions pour honorer l’engagement des 85 jours :</a:t>
+            </a:r>
+          </a:p>
+        </p:txBody>
+      </p:sp>
+      <p:sp>
+        <p:nvSpPr>
+          <p:cNvPr id="19" name="TextBox 18"/>
+          <p:cNvSpPr txBox="1"/>
+          <p:nvPr/>
+        </p:nvSpPr>
+        <p:spPr>
+          <a:xfrm>
+            <a:off x="822960" y="4343400"/>
+            <a:ext cx="10515600" cy="1828800"/>
+          </a:xfrm>
+          <a:prstGeom prst="rect">
+            <a:avLst/>
+          </a:prstGeom>
+          <a:noFill/>
+        </p:spPr>
+        <p:txBody>
+          <a:bodyPr wrap="square" anchor="t" lIns="0" rIns="0" tIns="0" bIns="0">
+            <a:spAutoFit/>
+          </a:bodyPr>
+          <a:lstStyle/>
+          <a:p>
+            <a:pPr algn="l">
+              <a:spcBef>
+                <a:spcPts val="0"/>
+              </a:spcBef>
+              <a:spcAft>
+                <a:spcPts val="1000"/>
+              </a:spcAft>
+            </a:pPr>
+            <a:r>
+              <a:rPr sz="1600" b="0" i="0">
+                <a:solidFill>
+                  <a:srgbClr val="404040"/>
+                </a:solidFill>
+                <a:latin typeface="Calibri"/>
+              </a:rPr>
+              <a:t>•  sécuriser la fabrication des pièces (tâche H, point dur du planning) ;</a:t>
+            </a:r>
+          </a:p>
+          <a:p>
+            <a:pPr algn="l">
+              <a:spcBef>
+                <a:spcPts val="0"/>
+              </a:spcBef>
+              <a:spcAft>
+                <a:spcPts val="1000"/>
+              </a:spcAft>
+            </a:pPr>
+            <a:r>
+              <a:rPr sz="1600" b="0" i="0">
+                <a:solidFill>
+                  <a:srgbClr val="404040"/>
+                </a:solidFill>
+                <a:latin typeface="Calibri"/>
+              </a:rPr>
+              <a:t>•  faire valider le plan d’économies avant le lancement ;</a:t>
+            </a:r>
+          </a:p>
+          <a:p>
+            <a:pPr algn="l">
+              <a:spcBef>
+                <a:spcPts val="0"/>
+              </a:spcBef>
+              <a:spcAft>
+                <a:spcPts val="1000"/>
+              </a:spcAft>
+            </a:pPr>
+            <a:r>
+              <a:rPr sz="1600" b="0" i="0">
+                <a:solidFill>
+                  <a:srgbClr val="404040"/>
+                </a:solidFill>
+                <a:latin typeface="Calibri"/>
+              </a:rPr>
+              <a:t>•  tenir les revues avec le client pour verrouiller les jalons.</a:t>
+            </a:r>
+          </a:p>
+        </p:txBody>
+      </p:sp>
+      <p:sp>
+        <p:nvSpPr>
+          <p:cNvPr id="20" name="Rectangle 19"/>
+          <p:cNvSpPr/>
+          <p:nvPr/>
+        </p:nvSpPr>
+        <p:spPr>
+          <a:xfrm>
+            <a:off x="548640" y="6126480"/>
+            <a:ext cx="11094415" cy="31750"/>
+          </a:xfrm>
+          <a:prstGeom prst="rect">
+            <a:avLst/>
+          </a:prstGeom>
+          <a:solidFill>
+            <a:srgbClr val="E67E22"/>
+          </a:solidFill>
+          <a:ln>
+            <a:noFill/>
+          </a:ln>
+          <a:effectLst/>
+        </p:spPr>
+        <p:style>
+          <a:lnRef idx="1">
+            <a:schemeClr val="accent1"/>
+          </a:lnRef>
+          <a:fillRef idx="3">
+            <a:schemeClr val="accent1"/>
+          </a:fillRef>
+          <a:effectRef idx="2">
+            <a:schemeClr val="accent1"/>
+          </a:effectRef>
+          <a:fontRef idx="minor">
+            <a:schemeClr val="lt1"/>
+          </a:fontRef>
+        </p:style>
+        <p:txBody>
+          <a:bodyPr rtlCol="0" anchor="ctr"/>
+          <a:lstStyle/>
+          <a:p>
+            <a:pPr algn="ctr"/>
+          </a:p>
+        </p:txBody>
+      </p:sp>
+      <p:sp>
+        <p:nvSpPr>
           <p:cNvPr id="21" name="TextBox 20"/>
           <p:cNvSpPr txBox="1"/>
           <p:nvPr/>
         </p:nvSpPr>
         <p:spPr>
           <a:xfrm>
-            <a:off x="548640" y="5989320"/>
+            <a:off x="548640" y="5943600"/>
             <a:ext cx="10972800" cy="365760"/>
           </a:xfrm>
           <a:prstGeom prst="rect">
@@ -6585,7 +6903,7 @@
         </p:nvSpPr>
         <p:spPr>
           <a:xfrm>
-            <a:off x="502920" y="146304"/>
+            <a:off x="502920" y="164592"/>
             <a:ext cx="10515600" cy="320040"/>
           </a:xfrm>
           <a:prstGeom prst="rect">
@@ -6611,7 +6929,7 @@
                 </a:solidFill>
                 <a:latin typeface="Calibri"/>
               </a:rPr>
-              <a:t>CADRAGE</a:t>
+              <a:t>DÉROULÉ</a:t>
             </a:r>
           </a:p>
         </p:txBody>
@@ -6624,7 +6942,7 @@
         </p:nvSpPr>
         <p:spPr>
           <a:xfrm>
-            <a:off x="502920" y="411480"/>
+            <a:off x="502920" y="420624"/>
             <a:ext cx="11155680" cy="640080"/>
           </a:xfrm>
           <a:prstGeom prst="rect">
@@ -6650,7 +6968,7 @@
                 </a:solidFill>
                 <a:latin typeface="Calibri"/>
               </a:rPr>
-              <a:t>Contexte et enjeu</a:t>
+              <a:t>Plan de la présentation</a:t>
             </a:r>
           </a:p>
         </p:txBody>
@@ -6689,7 +7007,7 @@
                 </a:solidFill>
                 <a:latin typeface="Calibri"/>
               </a:rPr>
-              <a:t>Projet GREMLIN — Soutenance</a:t>
+              <a:t>Projet GREMLIN — Phase de préparation</a:t>
             </a:r>
           </a:p>
         </p:txBody>
@@ -6728,145 +7046,27 @@
                 </a:solidFill>
                 <a:latin typeface="Calibri"/>
               </a:rPr>
-              <a:t>2</a:t>
-            </a:r>
-          </a:p>
-        </p:txBody>
-      </p:sp>
-      <p:sp>
-        <p:nvSpPr>
-          <p:cNvPr id="8" name="TextBox 7"/>
-          <p:cNvSpPr txBox="1"/>
-          <p:nvPr/>
-        </p:nvSpPr>
-        <p:spPr>
-          <a:xfrm>
-            <a:off x="548640" y="1554480"/>
-            <a:ext cx="6400800" cy="4572000"/>
-          </a:xfrm>
-          <a:prstGeom prst="rect">
-            <a:avLst/>
-          </a:prstGeom>
-          <a:noFill/>
-        </p:spPr>
-        <p:txBody>
-          <a:bodyPr wrap="square" anchor="t" lIns="0" rIns="0" tIns="0" bIns="0">
-            <a:spAutoFit/>
-          </a:bodyPr>
-          <a:lstStyle/>
-          <a:p>
-            <a:pPr algn="l">
-              <a:spcBef>
-                <a:spcPts val="0"/>
-              </a:spcBef>
-              <a:spcAft>
-                <a:spcPts val="1200"/>
-              </a:spcAft>
-            </a:pPr>
-            <a:r>
-              <a:rPr sz="1700" b="0" i="0">
-                <a:solidFill>
-                  <a:srgbClr val="404040"/>
-                </a:solidFill>
-                <a:latin typeface="Calibri"/>
-              </a:rPr>
-              <a:t>•  Un avionneur étranger de notoriété internationale nous confie l’essai en soufflerie d’une maquette (nouvel avion, projet GREMLIN).</a:t>
-            </a:r>
-          </a:p>
-          <a:p>
-            <a:pPr algn="l" lvl="1">
-              <a:spcBef>
-                <a:spcPts val="0"/>
-              </a:spcBef>
-              <a:spcAft>
-                <a:spcPts val="1200"/>
-              </a:spcAft>
-            </a:pPr>
-            <a:r>
-              <a:rPr sz="1500" b="0" i="0">
-                <a:solidFill>
-                  <a:srgbClr val="8A8A8A"/>
-                </a:solidFill>
-                <a:latin typeface="Calibri"/>
-              </a:rPr>
-              <a:t>–  Opération modeste, mais nouveau client à fort potentiel : la Direction veut absolument décrocher la commande.</a:t>
-            </a:r>
-          </a:p>
-          <a:p>
-            <a:pPr algn="l">
-              <a:spcBef>
-                <a:spcPts val="0"/>
-              </a:spcBef>
-              <a:spcAft>
-                <a:spcPts val="1200"/>
-              </a:spcAft>
-            </a:pPr>
-            <a:r>
-              <a:rPr sz="1700" b="0" i="0">
-                <a:solidFill>
-                  <a:srgbClr val="404040"/>
-                </a:solidFill>
-                <a:latin typeface="Calibri"/>
-              </a:rPr>
-              <a:t>•  Devis initial : 297 K€. Le client le juge élevé (concurrent à 259 K€)…</a:t>
-            </a:r>
-          </a:p>
-          <a:p>
-            <a:pPr algn="l" lvl="1">
-              <a:spcBef>
-                <a:spcPts val="0"/>
-              </a:spcBef>
-              <a:spcAft>
-                <a:spcPts val="1200"/>
-              </a:spcAft>
-            </a:pPr>
-            <a:r>
-              <a:rPr sz="1500" b="0" i="0">
-                <a:solidFill>
-                  <a:srgbClr val="8A8A8A"/>
-                </a:solidFill>
-                <a:latin typeface="Calibri"/>
-              </a:rPr>
-              <a:t>–  … mais il est sensible au sérieux et à l’engagement sur les délais.</a:t>
-            </a:r>
-          </a:p>
-          <a:p>
-            <a:pPr algn="l">
-              <a:spcBef>
-                <a:spcPts val="0"/>
-              </a:spcBef>
-              <a:spcAft>
-                <a:spcPts val="1200"/>
-              </a:spcAft>
-            </a:pPr>
-            <a:r>
-              <a:rPr sz="1700" b="0" i="0">
-                <a:solidFill>
-                  <a:srgbClr val="404040"/>
-                </a:solidFill>
-                <a:latin typeface="Calibri"/>
-              </a:rPr>
-              <a:t>•  Après négociation, commande conclue.</a:t>
-            </a:r>
-          </a:p>
-        </p:txBody>
-      </p:sp>
-      <p:sp>
-        <p:nvSpPr>
-          <p:cNvPr id="9" name="Rounded Rectangle 8"/>
+              <a:t>1</a:t>
+            </a:r>
+          </a:p>
+        </p:txBody>
+      </p:sp>
+      <p:sp>
+        <p:nvSpPr>
+          <p:cNvPr id="8" name="Rounded Rectangle 7"/>
           <p:cNvSpPr/>
           <p:nvPr/>
         </p:nvSpPr>
         <p:spPr>
           <a:xfrm>
-            <a:off x="7315200" y="1737360"/>
-            <a:ext cx="4297680" cy="1828800"/>
+            <a:off x="822960" y="1600200"/>
+            <a:ext cx="685800" cy="685800"/>
           </a:xfrm>
           <a:prstGeom prst="roundRect">
             <a:avLst/>
           </a:prstGeom>
           <a:solidFill>
-            <a:srgbClr val="EAF1F8"/>
+            <a:srgbClr val="1F4E79"/>
           </a:solidFill>
           <a:ln>
             <a:noFill/>
@@ -6897,39 +7097,78 @@
       </p:sp>
       <p:sp>
         <p:nvSpPr>
+          <p:cNvPr id="9" name="TextBox 8"/>
+          <p:cNvSpPr txBox="1"/>
+          <p:nvPr/>
+        </p:nvSpPr>
+        <p:spPr>
+          <a:xfrm>
+            <a:off x="822960" y="1709928"/>
+            <a:ext cx="685800" cy="457200"/>
+          </a:xfrm>
+          <a:prstGeom prst="rect">
+            <a:avLst/>
+          </a:prstGeom>
+          <a:noFill/>
+        </p:spPr>
+        <p:txBody>
+          <a:bodyPr wrap="square" anchor="t" lIns="0" rIns="0" tIns="0" bIns="0">
+            <a:spAutoFit/>
+          </a:bodyPr>
+          <a:lstStyle/>
+          <a:p>
+            <a:pPr algn="ctr">
+              <a:spcBef>
+                <a:spcPts val="0"/>
+              </a:spcBef>
+            </a:pPr>
+            <a:r>
+              <a:rPr sz="2200" b="1" i="0">
+                <a:solidFill>
+                  <a:srgbClr val="FFFFFF"/>
+                </a:solidFill>
+                <a:latin typeface="Calibri"/>
+              </a:rPr>
+              <a:t>1</a:t>
+            </a:r>
+          </a:p>
+        </p:txBody>
+      </p:sp>
+      <p:sp>
+        <p:nvSpPr>
           <p:cNvPr id="10" name="TextBox 9"/>
           <p:cNvSpPr txBox="1"/>
           <p:nvPr/>
         </p:nvSpPr>
         <p:spPr>
           <a:xfrm>
-            <a:off x="7315200" y="1874519"/>
-            <a:ext cx="4297680" cy="365760"/>
-          </a:xfrm>
-          <a:prstGeom prst="rect">
-            <a:avLst/>
-          </a:prstGeom>
-          <a:noFill/>
-        </p:spPr>
-        <p:txBody>
-          <a:bodyPr wrap="square" anchor="t" lIns="0" rIns="0" tIns="0" bIns="0">
-            <a:spAutoFit/>
-          </a:bodyPr>
-          <a:lstStyle/>
-          <a:p>
-            <a:pPr algn="ctr">
-              <a:spcBef>
-                <a:spcPts val="0"/>
-              </a:spcBef>
-            </a:pPr>
-            <a:r>
-              <a:rPr sz="1300" b="1" i="0">
+            <a:off x="1737360" y="1618488"/>
+            <a:ext cx="9601200" cy="365760"/>
+          </a:xfrm>
+          <a:prstGeom prst="rect">
+            <a:avLst/>
+          </a:prstGeom>
+          <a:noFill/>
+        </p:spPr>
+        <p:txBody>
+          <a:bodyPr wrap="square" anchor="t" lIns="0" rIns="0" tIns="0" bIns="0">
+            <a:spAutoFit/>
+          </a:bodyPr>
+          <a:lstStyle/>
+          <a:p>
+            <a:pPr algn="l">
+              <a:spcBef>
+                <a:spcPts val="0"/>
+              </a:spcBef>
+            </a:pPr>
+            <a:r>
+              <a:rPr sz="1900" b="1" i="0">
                 <a:solidFill>
                   <a:srgbClr val="1F4E79"/>
                 </a:solidFill>
                 <a:latin typeface="Calibri"/>
               </a:rPr>
-              <a:t>LA COMMANDE</a:t>
+              <a:t>Contexte et cadrage</a:t>
             </a:r>
           </a:p>
         </p:txBody>
@@ -6942,8 +7181,8 @@
         </p:nvSpPr>
         <p:spPr>
           <a:xfrm>
-            <a:off x="7498079" y="2331720"/>
-            <a:ext cx="3931920" cy="1188720"/>
+            <a:off x="1737360" y="1984248"/>
+            <a:ext cx="9601200" cy="320040"/>
           </a:xfrm>
           <a:prstGeom prst="rect">
             <a:avLst/>
@@ -6960,34 +7199,15 @@
               <a:spcBef>
                 <a:spcPts val="0"/>
               </a:spcBef>
-              <a:spcAft>
-                <a:spcPts val="800"/>
-              </a:spcAft>
-            </a:pPr>
-            <a:r>
-              <a:rPr sz="1800" b="1" i="0">
-                <a:solidFill>
-                  <a:srgbClr val="404040"/>
-                </a:solidFill>
-                <a:latin typeface="Calibri"/>
-              </a:rPr>
-              <a:t>272 000 € — budget global</a:t>
-            </a:r>
-          </a:p>
-          <a:p>
-            <a:pPr algn="l">
-              <a:spcBef>
-                <a:spcPts val="0"/>
-              </a:spcBef>
-            </a:pPr>
-            <a:r>
-              <a:rPr sz="1800" b="1" i="0">
-                <a:solidFill>
-                  <a:srgbClr val="404040"/>
-                </a:solidFill>
-                <a:latin typeface="Calibri"/>
-              </a:rPr>
-              <a:t>85 jours ouvrables — délai ferme</a:t>
+            </a:pPr>
+            <a:r>
+              <a:rPr sz="1300" b="0" i="0">
+                <a:solidFill>
+                  <a:srgbClr val="8A8A8A"/>
+                </a:solidFill>
+                <a:latin typeface="Calibri"/>
+              </a:rPr>
+              <a:t>L’affaire, les objectifs, les contraintes</a:t>
             </a:r>
           </a:p>
         </p:txBody>
@@ -7000,14 +7220,14 @@
         </p:nvSpPr>
         <p:spPr>
           <a:xfrm>
-            <a:off x="7315200" y="3749039"/>
-            <a:ext cx="4297680" cy="2194560"/>
+            <a:off x="822960" y="2359152"/>
+            <a:ext cx="685800" cy="685800"/>
           </a:xfrm>
           <a:prstGeom prst="roundRect">
             <a:avLst/>
           </a:prstGeom>
           <a:solidFill>
-            <a:srgbClr val="FDECEA"/>
+            <a:srgbClr val="1F4E79"/>
           </a:solidFill>
           <a:ln>
             <a:noFill/>
@@ -7044,8 +7264,47 @@
         </p:nvSpPr>
         <p:spPr>
           <a:xfrm>
-            <a:off x="7498079" y="3931920"/>
-            <a:ext cx="3931920" cy="1920240"/>
+            <a:off x="822960" y="2468880"/>
+            <a:ext cx="685800" cy="457200"/>
+          </a:xfrm>
+          <a:prstGeom prst="rect">
+            <a:avLst/>
+          </a:prstGeom>
+          <a:noFill/>
+        </p:spPr>
+        <p:txBody>
+          <a:bodyPr wrap="square" anchor="t" lIns="0" rIns="0" tIns="0" bIns="0">
+            <a:spAutoFit/>
+          </a:bodyPr>
+          <a:lstStyle/>
+          <a:p>
+            <a:pPr algn="ctr">
+              <a:spcBef>
+                <a:spcPts val="0"/>
+              </a:spcBef>
+            </a:pPr>
+            <a:r>
+              <a:rPr sz="2200" b="1" i="0">
+                <a:solidFill>
+                  <a:srgbClr val="FFFFFF"/>
+                </a:solidFill>
+                <a:latin typeface="Calibri"/>
+              </a:rPr>
+              <a:t>2</a:t>
+            </a:r>
+          </a:p>
+        </p:txBody>
+      </p:sp>
+      <p:sp>
+        <p:nvSpPr>
+          <p:cNvPr id="14" name="TextBox 13"/>
+          <p:cNvSpPr txBox="1"/>
+          <p:nvPr/>
+        </p:nvSpPr>
+        <p:spPr>
+          <a:xfrm>
+            <a:off x="1737360" y="2377440"/>
+            <a:ext cx="9601200" cy="365760"/>
           </a:xfrm>
           <a:prstGeom prst="rect">
             <a:avLst/>
@@ -7062,20 +7321,40 @@
               <a:spcBef>
                 <a:spcPts val="0"/>
               </a:spcBef>
-              <a:spcAft>
-                <a:spcPts val="600"/>
-              </a:spcAft>
-            </a:pPr>
-            <a:r>
-              <a:rPr sz="1400" b="1" i="0">
-                <a:solidFill>
-                  <a:srgbClr val="C0392B"/>
-                </a:solidFill>
-                <a:latin typeface="Calibri"/>
-              </a:rPr>
-              <a:t>L’enjeu</a:t>
-            </a:r>
-          </a:p>
+            </a:pPr>
+            <a:r>
+              <a:rPr sz="1900" b="1" i="0">
+                <a:solidFill>
+                  <a:srgbClr val="1F4E79"/>
+                </a:solidFill>
+                <a:latin typeface="Calibri"/>
+              </a:rPr>
+              <a:t>Scénario du projet</a:t>
+            </a:r>
+          </a:p>
+        </p:txBody>
+      </p:sp>
+      <p:sp>
+        <p:nvSpPr>
+          <p:cNvPr id="15" name="TextBox 14"/>
+          <p:cNvSpPr txBox="1"/>
+          <p:nvPr/>
+        </p:nvSpPr>
+        <p:spPr>
+          <a:xfrm>
+            <a:off x="1737360" y="2743200"/>
+            <a:ext cx="9601200" cy="320040"/>
+          </a:xfrm>
+          <a:prstGeom prst="rect">
+            <a:avLst/>
+          </a:prstGeom>
+          <a:noFill/>
+        </p:spPr>
+        <p:txBody>
+          <a:bodyPr wrap="square" anchor="t" lIns="0" rIns="0" tIns="0" bIns="0">
+            <a:spAutoFit/>
+          </a:bodyPr>
+          <a:lstStyle/>
           <a:p>
             <a:pPr algn="l">
               <a:spcBef>
@@ -7083,13 +7362,657 @@
               </a:spcBef>
             </a:pPr>
             <a:r>
-              <a:rPr sz="1450" b="0" i="0">
-                <a:solidFill>
-                  <a:srgbClr val="404040"/>
-                </a:solidFill>
-                <a:latin typeface="Calibri"/>
-              </a:rPr>
-              <a:t>Réussir ce premier essai pour ouvrir une relation durable avec un client capable de générer des débouchés importants.</a:t>
+              <a:rPr sz="1300" b="0" i="0">
+                <a:solidFill>
+                  <a:srgbClr val="8A8A8A"/>
+                </a:solidFill>
+                <a:latin typeface="Calibri"/>
+              </a:rPr>
+              <a:t>Les grandes étapes dans le temps</a:t>
+            </a:r>
+          </a:p>
+        </p:txBody>
+      </p:sp>
+      <p:sp>
+        <p:nvSpPr>
+          <p:cNvPr id="16" name="Rounded Rectangle 15"/>
+          <p:cNvSpPr/>
+          <p:nvPr/>
+        </p:nvSpPr>
+        <p:spPr>
+          <a:xfrm>
+            <a:off x="822960" y="3118104"/>
+            <a:ext cx="685800" cy="685800"/>
+          </a:xfrm>
+          <a:prstGeom prst="roundRect">
+            <a:avLst/>
+          </a:prstGeom>
+          <a:solidFill>
+            <a:srgbClr val="1F4E79"/>
+          </a:solidFill>
+          <a:ln>
+            <a:noFill/>
+          </a:ln>
+          <a:effectLst/>
+        </p:spPr>
+        <p:style>
+          <a:lnRef idx="1">
+            <a:schemeClr val="accent1"/>
+          </a:lnRef>
+          <a:fillRef idx="3">
+            <a:schemeClr val="accent1"/>
+          </a:fillRef>
+          <a:effectRef idx="2">
+            <a:schemeClr val="accent1"/>
+          </a:effectRef>
+          <a:fontRef idx="minor">
+            <a:schemeClr val="lt1"/>
+          </a:fontRef>
+        </p:style>
+        <p:txBody>
+          <a:bodyPr rtlCol="0" anchor="ctr"/>
+          <a:lstStyle/>
+          <a:p>
+            <a:pPr algn="ctr"/>
+          </a:p>
+        </p:txBody>
+      </p:sp>
+      <p:sp>
+        <p:nvSpPr>
+          <p:cNvPr id="17" name="TextBox 16"/>
+          <p:cNvSpPr txBox="1"/>
+          <p:nvPr/>
+        </p:nvSpPr>
+        <p:spPr>
+          <a:xfrm>
+            <a:off x="822960" y="3227832"/>
+            <a:ext cx="685800" cy="457200"/>
+          </a:xfrm>
+          <a:prstGeom prst="rect">
+            <a:avLst/>
+          </a:prstGeom>
+          <a:noFill/>
+        </p:spPr>
+        <p:txBody>
+          <a:bodyPr wrap="square" anchor="t" lIns="0" rIns="0" tIns="0" bIns="0">
+            <a:spAutoFit/>
+          </a:bodyPr>
+          <a:lstStyle/>
+          <a:p>
+            <a:pPr algn="ctr">
+              <a:spcBef>
+                <a:spcPts val="0"/>
+              </a:spcBef>
+            </a:pPr>
+            <a:r>
+              <a:rPr sz="2200" b="1" i="0">
+                <a:solidFill>
+                  <a:srgbClr val="FFFFFF"/>
+                </a:solidFill>
+                <a:latin typeface="Calibri"/>
+              </a:rPr>
+              <a:t>3</a:t>
+            </a:r>
+          </a:p>
+        </p:txBody>
+      </p:sp>
+      <p:sp>
+        <p:nvSpPr>
+          <p:cNvPr id="18" name="TextBox 17"/>
+          <p:cNvSpPr txBox="1"/>
+          <p:nvPr/>
+        </p:nvSpPr>
+        <p:spPr>
+          <a:xfrm>
+            <a:off x="1737360" y="3136392"/>
+            <a:ext cx="9601200" cy="365760"/>
+          </a:xfrm>
+          <a:prstGeom prst="rect">
+            <a:avLst/>
+          </a:prstGeom>
+          <a:noFill/>
+        </p:spPr>
+        <p:txBody>
+          <a:bodyPr wrap="square" anchor="t" lIns="0" rIns="0" tIns="0" bIns="0">
+            <a:spAutoFit/>
+          </a:bodyPr>
+          <a:lstStyle/>
+          <a:p>
+            <a:pPr algn="l">
+              <a:spcBef>
+                <a:spcPts val="0"/>
+              </a:spcBef>
+            </a:pPr>
+            <a:r>
+              <a:rPr sz="1900" b="1" i="0">
+                <a:solidFill>
+                  <a:srgbClr val="1F4E79"/>
+                </a:solidFill>
+                <a:latin typeface="Calibri"/>
+              </a:rPr>
+              <a:t>Organigramme des tâches</a:t>
+            </a:r>
+          </a:p>
+        </p:txBody>
+      </p:sp>
+      <p:sp>
+        <p:nvSpPr>
+          <p:cNvPr id="19" name="TextBox 18"/>
+          <p:cNvSpPr txBox="1"/>
+          <p:nvPr/>
+        </p:nvSpPr>
+        <p:spPr>
+          <a:xfrm>
+            <a:off x="1737360" y="3502152"/>
+            <a:ext cx="9601200" cy="320040"/>
+          </a:xfrm>
+          <a:prstGeom prst="rect">
+            <a:avLst/>
+          </a:prstGeom>
+          <a:noFill/>
+        </p:spPr>
+        <p:txBody>
+          <a:bodyPr wrap="square" anchor="t" lIns="0" rIns="0" tIns="0" bIns="0">
+            <a:spAutoFit/>
+          </a:bodyPr>
+          <a:lstStyle/>
+          <a:p>
+            <a:pPr algn="l">
+              <a:spcBef>
+                <a:spcPts val="0"/>
+              </a:spcBef>
+            </a:pPr>
+            <a:r>
+              <a:rPr sz="1300" b="0" i="0">
+                <a:solidFill>
+                  <a:srgbClr val="8A8A8A"/>
+                </a:solidFill>
+                <a:latin typeface="Calibri"/>
+              </a:rPr>
+              <a:t>Le découpage du travail (WBS)</a:t>
+            </a:r>
+          </a:p>
+        </p:txBody>
+      </p:sp>
+      <p:sp>
+        <p:nvSpPr>
+          <p:cNvPr id="20" name="Rounded Rectangle 19"/>
+          <p:cNvSpPr/>
+          <p:nvPr/>
+        </p:nvSpPr>
+        <p:spPr>
+          <a:xfrm>
+            <a:off x="822960" y="3877056"/>
+            <a:ext cx="685800" cy="685800"/>
+          </a:xfrm>
+          <a:prstGeom prst="roundRect">
+            <a:avLst/>
+          </a:prstGeom>
+          <a:solidFill>
+            <a:srgbClr val="1F4E79"/>
+          </a:solidFill>
+          <a:ln>
+            <a:noFill/>
+          </a:ln>
+          <a:effectLst/>
+        </p:spPr>
+        <p:style>
+          <a:lnRef idx="1">
+            <a:schemeClr val="accent1"/>
+          </a:lnRef>
+          <a:fillRef idx="3">
+            <a:schemeClr val="accent1"/>
+          </a:fillRef>
+          <a:effectRef idx="2">
+            <a:schemeClr val="accent1"/>
+          </a:effectRef>
+          <a:fontRef idx="minor">
+            <a:schemeClr val="lt1"/>
+          </a:fontRef>
+        </p:style>
+        <p:txBody>
+          <a:bodyPr rtlCol="0" anchor="ctr"/>
+          <a:lstStyle/>
+          <a:p>
+            <a:pPr algn="ctr"/>
+          </a:p>
+        </p:txBody>
+      </p:sp>
+      <p:sp>
+        <p:nvSpPr>
+          <p:cNvPr id="21" name="TextBox 20"/>
+          <p:cNvSpPr txBox="1"/>
+          <p:nvPr/>
+        </p:nvSpPr>
+        <p:spPr>
+          <a:xfrm>
+            <a:off x="822960" y="3986784"/>
+            <a:ext cx="685800" cy="457200"/>
+          </a:xfrm>
+          <a:prstGeom prst="rect">
+            <a:avLst/>
+          </a:prstGeom>
+          <a:noFill/>
+        </p:spPr>
+        <p:txBody>
+          <a:bodyPr wrap="square" anchor="t" lIns="0" rIns="0" tIns="0" bIns="0">
+            <a:spAutoFit/>
+          </a:bodyPr>
+          <a:lstStyle/>
+          <a:p>
+            <a:pPr algn="ctr">
+              <a:spcBef>
+                <a:spcPts val="0"/>
+              </a:spcBef>
+            </a:pPr>
+            <a:r>
+              <a:rPr sz="2200" b="1" i="0">
+                <a:solidFill>
+                  <a:srgbClr val="FFFFFF"/>
+                </a:solidFill>
+                <a:latin typeface="Calibri"/>
+              </a:rPr>
+              <a:t>4</a:t>
+            </a:r>
+          </a:p>
+        </p:txBody>
+      </p:sp>
+      <p:sp>
+        <p:nvSpPr>
+          <p:cNvPr id="22" name="TextBox 21"/>
+          <p:cNvSpPr txBox="1"/>
+          <p:nvPr/>
+        </p:nvSpPr>
+        <p:spPr>
+          <a:xfrm>
+            <a:off x="1737360" y="3895344"/>
+            <a:ext cx="9601200" cy="365760"/>
+          </a:xfrm>
+          <a:prstGeom prst="rect">
+            <a:avLst/>
+          </a:prstGeom>
+          <a:noFill/>
+        </p:spPr>
+        <p:txBody>
+          <a:bodyPr wrap="square" anchor="t" lIns="0" rIns="0" tIns="0" bIns="0">
+            <a:spAutoFit/>
+          </a:bodyPr>
+          <a:lstStyle/>
+          <a:p>
+            <a:pPr algn="l">
+              <a:spcBef>
+                <a:spcPts val="0"/>
+              </a:spcBef>
+            </a:pPr>
+            <a:r>
+              <a:rPr sz="1900" b="1" i="0">
+                <a:solidFill>
+                  <a:srgbClr val="1F4E79"/>
+                </a:solidFill>
+                <a:latin typeface="Calibri"/>
+              </a:rPr>
+              <a:t>Planning de réalisation</a:t>
+            </a:r>
+          </a:p>
+        </p:txBody>
+      </p:sp>
+      <p:sp>
+        <p:nvSpPr>
+          <p:cNvPr id="23" name="TextBox 22"/>
+          <p:cNvSpPr txBox="1"/>
+          <p:nvPr/>
+        </p:nvSpPr>
+        <p:spPr>
+          <a:xfrm>
+            <a:off x="1737360" y="4261104"/>
+            <a:ext cx="9601200" cy="320040"/>
+          </a:xfrm>
+          <a:prstGeom prst="rect">
+            <a:avLst/>
+          </a:prstGeom>
+          <a:noFill/>
+        </p:spPr>
+        <p:txBody>
+          <a:bodyPr wrap="square" anchor="t" lIns="0" rIns="0" tIns="0" bIns="0">
+            <a:spAutoFit/>
+          </a:bodyPr>
+          <a:lstStyle/>
+          <a:p>
+            <a:pPr algn="l">
+              <a:spcBef>
+                <a:spcPts val="0"/>
+              </a:spcBef>
+            </a:pPr>
+            <a:r>
+              <a:rPr sz="1300" b="0" i="0">
+                <a:solidFill>
+                  <a:srgbClr val="8A8A8A"/>
+                </a:solidFill>
+                <a:latin typeface="Calibri"/>
+              </a:rPr>
+              <a:t>Chemin critique, Gantt, délai</a:t>
+            </a:r>
+          </a:p>
+        </p:txBody>
+      </p:sp>
+      <p:sp>
+        <p:nvSpPr>
+          <p:cNvPr id="24" name="Rounded Rectangle 23"/>
+          <p:cNvSpPr/>
+          <p:nvPr/>
+        </p:nvSpPr>
+        <p:spPr>
+          <a:xfrm>
+            <a:off x="822960" y="4636008"/>
+            <a:ext cx="685800" cy="685800"/>
+          </a:xfrm>
+          <a:prstGeom prst="roundRect">
+            <a:avLst/>
+          </a:prstGeom>
+          <a:solidFill>
+            <a:srgbClr val="1F4E79"/>
+          </a:solidFill>
+          <a:ln>
+            <a:noFill/>
+          </a:ln>
+          <a:effectLst/>
+        </p:spPr>
+        <p:style>
+          <a:lnRef idx="1">
+            <a:schemeClr val="accent1"/>
+          </a:lnRef>
+          <a:fillRef idx="3">
+            <a:schemeClr val="accent1"/>
+          </a:fillRef>
+          <a:effectRef idx="2">
+            <a:schemeClr val="accent1"/>
+          </a:effectRef>
+          <a:fontRef idx="minor">
+            <a:schemeClr val="lt1"/>
+          </a:fontRef>
+        </p:style>
+        <p:txBody>
+          <a:bodyPr rtlCol="0" anchor="ctr"/>
+          <a:lstStyle/>
+          <a:p>
+            <a:pPr algn="ctr"/>
+          </a:p>
+        </p:txBody>
+      </p:sp>
+      <p:sp>
+        <p:nvSpPr>
+          <p:cNvPr id="25" name="TextBox 24"/>
+          <p:cNvSpPr txBox="1"/>
+          <p:nvPr/>
+        </p:nvSpPr>
+        <p:spPr>
+          <a:xfrm>
+            <a:off x="822960" y="4745736"/>
+            <a:ext cx="685800" cy="457200"/>
+          </a:xfrm>
+          <a:prstGeom prst="rect">
+            <a:avLst/>
+          </a:prstGeom>
+          <a:noFill/>
+        </p:spPr>
+        <p:txBody>
+          <a:bodyPr wrap="square" anchor="t" lIns="0" rIns="0" tIns="0" bIns="0">
+            <a:spAutoFit/>
+          </a:bodyPr>
+          <a:lstStyle/>
+          <a:p>
+            <a:pPr algn="ctr">
+              <a:spcBef>
+                <a:spcPts val="0"/>
+              </a:spcBef>
+            </a:pPr>
+            <a:r>
+              <a:rPr sz="2200" b="1" i="0">
+                <a:solidFill>
+                  <a:srgbClr val="FFFFFF"/>
+                </a:solidFill>
+                <a:latin typeface="Calibri"/>
+              </a:rPr>
+              <a:t>5</a:t>
+            </a:r>
+          </a:p>
+        </p:txBody>
+      </p:sp>
+      <p:sp>
+        <p:nvSpPr>
+          <p:cNvPr id="26" name="TextBox 25"/>
+          <p:cNvSpPr txBox="1"/>
+          <p:nvPr/>
+        </p:nvSpPr>
+        <p:spPr>
+          <a:xfrm>
+            <a:off x="1737360" y="4654296"/>
+            <a:ext cx="9601200" cy="365760"/>
+          </a:xfrm>
+          <a:prstGeom prst="rect">
+            <a:avLst/>
+          </a:prstGeom>
+          <a:noFill/>
+        </p:spPr>
+        <p:txBody>
+          <a:bodyPr wrap="square" anchor="t" lIns="0" rIns="0" tIns="0" bIns="0">
+            <a:spAutoFit/>
+          </a:bodyPr>
+          <a:lstStyle/>
+          <a:p>
+            <a:pPr algn="l">
+              <a:spcBef>
+                <a:spcPts val="0"/>
+              </a:spcBef>
+            </a:pPr>
+            <a:r>
+              <a:rPr sz="1900" b="1" i="0">
+                <a:solidFill>
+                  <a:srgbClr val="1F4E79"/>
+                </a:solidFill>
+                <a:latin typeface="Calibri"/>
+              </a:rPr>
+              <a:t>Budget</a:t>
+            </a:r>
+          </a:p>
+        </p:txBody>
+      </p:sp>
+      <p:sp>
+        <p:nvSpPr>
+          <p:cNvPr id="27" name="TextBox 26"/>
+          <p:cNvSpPr txBox="1"/>
+          <p:nvPr/>
+        </p:nvSpPr>
+        <p:spPr>
+          <a:xfrm>
+            <a:off x="1737360" y="5020056"/>
+            <a:ext cx="9601200" cy="320040"/>
+          </a:xfrm>
+          <a:prstGeom prst="rect">
+            <a:avLst/>
+          </a:prstGeom>
+          <a:noFill/>
+        </p:spPr>
+        <p:txBody>
+          <a:bodyPr wrap="square" anchor="t" lIns="0" rIns="0" tIns="0" bIns="0">
+            <a:spAutoFit/>
+          </a:bodyPr>
+          <a:lstStyle/>
+          <a:p>
+            <a:pPr algn="l">
+              <a:spcBef>
+                <a:spcPts val="0"/>
+              </a:spcBef>
+            </a:pPr>
+            <a:r>
+              <a:rPr sz="1300" b="0" i="0">
+                <a:solidFill>
+                  <a:srgbClr val="8A8A8A"/>
+                </a:solidFill>
+                <a:latin typeface="Calibri"/>
+              </a:rPr>
+              <a:t>Coût de la phase et courbe en S</a:t>
+            </a:r>
+          </a:p>
+        </p:txBody>
+      </p:sp>
+      <p:sp>
+        <p:nvSpPr>
+          <p:cNvPr id="28" name="Rounded Rectangle 27"/>
+          <p:cNvSpPr/>
+          <p:nvPr/>
+        </p:nvSpPr>
+        <p:spPr>
+          <a:xfrm>
+            <a:off x="822960" y="5394960"/>
+            <a:ext cx="685800" cy="685800"/>
+          </a:xfrm>
+          <a:prstGeom prst="roundRect">
+            <a:avLst/>
+          </a:prstGeom>
+          <a:solidFill>
+            <a:srgbClr val="1F4E79"/>
+          </a:solidFill>
+          <a:ln>
+            <a:noFill/>
+          </a:ln>
+          <a:effectLst/>
+        </p:spPr>
+        <p:style>
+          <a:lnRef idx="1">
+            <a:schemeClr val="accent1"/>
+          </a:lnRef>
+          <a:fillRef idx="3">
+            <a:schemeClr val="accent1"/>
+          </a:fillRef>
+          <a:effectRef idx="2">
+            <a:schemeClr val="accent1"/>
+          </a:effectRef>
+          <a:fontRef idx="minor">
+            <a:schemeClr val="lt1"/>
+          </a:fontRef>
+        </p:style>
+        <p:txBody>
+          <a:bodyPr rtlCol="0" anchor="ctr"/>
+          <a:lstStyle/>
+          <a:p>
+            <a:pPr algn="ctr"/>
+          </a:p>
+        </p:txBody>
+      </p:sp>
+      <p:sp>
+        <p:nvSpPr>
+          <p:cNvPr id="29" name="TextBox 28"/>
+          <p:cNvSpPr txBox="1"/>
+          <p:nvPr/>
+        </p:nvSpPr>
+        <p:spPr>
+          <a:xfrm>
+            <a:off x="822960" y="5504688"/>
+            <a:ext cx="685800" cy="457200"/>
+          </a:xfrm>
+          <a:prstGeom prst="rect">
+            <a:avLst/>
+          </a:prstGeom>
+          <a:noFill/>
+        </p:spPr>
+        <p:txBody>
+          <a:bodyPr wrap="square" anchor="t" lIns="0" rIns="0" tIns="0" bIns="0">
+            <a:spAutoFit/>
+          </a:bodyPr>
+          <a:lstStyle/>
+          <a:p>
+            <a:pPr algn="ctr">
+              <a:spcBef>
+                <a:spcPts val="0"/>
+              </a:spcBef>
+            </a:pPr>
+            <a:r>
+              <a:rPr sz="2200" b="1" i="0">
+                <a:solidFill>
+                  <a:srgbClr val="FFFFFF"/>
+                </a:solidFill>
+                <a:latin typeface="Calibri"/>
+              </a:rPr>
+              <a:t>6</a:t>
+            </a:r>
+          </a:p>
+        </p:txBody>
+      </p:sp>
+      <p:sp>
+        <p:nvSpPr>
+          <p:cNvPr id="30" name="TextBox 29"/>
+          <p:cNvSpPr txBox="1"/>
+          <p:nvPr/>
+        </p:nvSpPr>
+        <p:spPr>
+          <a:xfrm>
+            <a:off x="1737360" y="5413248"/>
+            <a:ext cx="9601200" cy="365760"/>
+          </a:xfrm>
+          <a:prstGeom prst="rect">
+            <a:avLst/>
+          </a:prstGeom>
+          <a:noFill/>
+        </p:spPr>
+        <p:txBody>
+          <a:bodyPr wrap="square" anchor="t" lIns="0" rIns="0" tIns="0" bIns="0">
+            <a:spAutoFit/>
+          </a:bodyPr>
+          <a:lstStyle/>
+          <a:p>
+            <a:pPr algn="l">
+              <a:spcBef>
+                <a:spcPts val="0"/>
+              </a:spcBef>
+            </a:pPr>
+            <a:r>
+              <a:rPr sz="1900" b="1" i="0">
+                <a:solidFill>
+                  <a:srgbClr val="1F4E79"/>
+                </a:solidFill>
+                <a:latin typeface="Calibri"/>
+              </a:rPr>
+              <a:t>Risques et pilotage</a:t>
+            </a:r>
+          </a:p>
+        </p:txBody>
+      </p:sp>
+      <p:sp>
+        <p:nvSpPr>
+          <p:cNvPr id="31" name="TextBox 30"/>
+          <p:cNvSpPr txBox="1"/>
+          <p:nvPr/>
+        </p:nvSpPr>
+        <p:spPr>
+          <a:xfrm>
+            <a:off x="1737360" y="5779008"/>
+            <a:ext cx="9601200" cy="320040"/>
+          </a:xfrm>
+          <a:prstGeom prst="rect">
+            <a:avLst/>
+          </a:prstGeom>
+          <a:noFill/>
+        </p:spPr>
+        <p:txBody>
+          <a:bodyPr wrap="square" anchor="t" lIns="0" rIns="0" tIns="0" bIns="0">
+            <a:spAutoFit/>
+          </a:bodyPr>
+          <a:lstStyle/>
+          <a:p>
+            <a:pPr algn="l">
+              <a:spcBef>
+                <a:spcPts val="0"/>
+              </a:spcBef>
+            </a:pPr>
+            <a:r>
+              <a:rPr sz="1300" b="0" i="0">
+                <a:solidFill>
+                  <a:srgbClr val="8A8A8A"/>
+                </a:solidFill>
+                <a:latin typeface="Calibri"/>
+              </a:rPr>
+              <a:t>Maîtrise et suivi du projet</a:t>
             </a:r>
           </a:p>
         </p:txBody>
@@ -7216,7 +8139,7 @@
         </p:nvSpPr>
         <p:spPr>
           <a:xfrm>
-            <a:off x="502920" y="146304"/>
+            <a:off x="502920" y="164592"/>
             <a:ext cx="10515600" cy="320040"/>
           </a:xfrm>
           <a:prstGeom prst="rect">
@@ -7242,7 +8165,7 @@
                 </a:solidFill>
                 <a:latin typeface="Calibri"/>
               </a:rPr>
-              <a:t>CADRAGE</a:t>
+              <a:t>1 · CADRAGE</a:t>
             </a:r>
           </a:p>
         </p:txBody>
@@ -7255,7 +8178,7 @@
         </p:nvSpPr>
         <p:spPr>
           <a:xfrm>
-            <a:off x="502920" y="411480"/>
+            <a:off x="502920" y="420624"/>
             <a:ext cx="11155680" cy="640080"/>
           </a:xfrm>
           <a:prstGeom prst="rect">
@@ -7281,7 +8204,7 @@
                 </a:solidFill>
                 <a:latin typeface="Calibri"/>
               </a:rPr>
-              <a:t>Périmètre étudié et contraintes</a:t>
+              <a:t>Contexte et enjeu</a:t>
             </a:r>
           </a:p>
         </p:txBody>
@@ -7320,7 +8243,7 @@
                 </a:solidFill>
                 <a:latin typeface="Calibri"/>
               </a:rPr>
-              <a:t>Projet GREMLIN — Soutenance</a:t>
+              <a:t>Projet GREMLIN — Phase de préparation</a:t>
             </a:r>
           </a:p>
         </p:txBody>
@@ -7359,7 +8282,7 @@
                 </a:solidFill>
                 <a:latin typeface="Calibri"/>
               </a:rPr>
-              <a:t>3</a:t>
+              <a:t>2</a:t>
             </a:r>
           </a:p>
         </p:txBody>
@@ -7372,8 +8295,8 @@
         </p:nvSpPr>
         <p:spPr>
           <a:xfrm>
-            <a:off x="548640" y="1417320"/>
-            <a:ext cx="10972800" cy="731520"/>
+            <a:off x="548640" y="1554480"/>
+            <a:ext cx="6400800" cy="4572000"/>
           </a:xfrm>
           <a:prstGeom prst="rect">
             <a:avLst/>
@@ -7390,15 +8313,75 @@
               <a:spcBef>
                 <a:spcPts val="0"/>
               </a:spcBef>
-            </a:pPr>
-            <a:r>
-              <a:rPr sz="1650" b="0" i="0">
+              <a:spcAft>
+                <a:spcPts val="1200"/>
+              </a:spcAft>
+            </a:pPr>
+            <a:r>
+              <a:rPr sz="1700" b="0" i="0">
                 <a:solidFill>
                   <a:srgbClr val="404040"/>
                 </a:solidFill>
                 <a:latin typeface="Calibri"/>
               </a:rPr>
-              <a:t>Ce dossier traite la 1re phase du projet : la préparation de la maquette — la fixer sur son support et l’équiper en capteurs, jusqu’à une maquette « prête à l’expérimentation ».</a:t>
+              <a:t>•  Un avionneur étranger de notoriété internationale nous confie l’essai en soufflerie d’une maquette (nouvel avion).</a:t>
+            </a:r>
+          </a:p>
+          <a:p>
+            <a:pPr algn="l" lvl="1">
+              <a:spcBef>
+                <a:spcPts val="0"/>
+              </a:spcBef>
+              <a:spcAft>
+                <a:spcPts val="1200"/>
+              </a:spcAft>
+            </a:pPr>
+            <a:r>
+              <a:rPr sz="1500" b="0" i="0">
+                <a:solidFill>
+                  <a:srgbClr val="8A8A8A"/>
+                </a:solidFill>
+                <a:latin typeface="Calibri"/>
+              </a:rPr>
+              <a:t>–  Affaire modeste, mais nouveau client à fort potentiel : il faut décrocher la commande.</a:t>
+            </a:r>
+          </a:p>
+          <a:p>
+            <a:pPr algn="l">
+              <a:spcBef>
+                <a:spcPts val="0"/>
+              </a:spcBef>
+              <a:spcAft>
+                <a:spcPts val="1200"/>
+              </a:spcAft>
+            </a:pPr>
+            <a:r>
+              <a:rPr sz="1700" b="0" i="0">
+                <a:solidFill>
+                  <a:srgbClr val="404040"/>
+                </a:solidFill>
+                <a:latin typeface="Calibri"/>
+              </a:rPr>
+              <a:t>•  Devis initial 297 K€, jugé élevé (concurrent à 259 K€)…</a:t>
+            </a:r>
+          </a:p>
+          <a:p>
+            <a:pPr algn="l" lvl="1">
+              <a:spcBef>
+                <a:spcPts val="0"/>
+              </a:spcBef>
+              <a:spcAft>
+                <a:spcPts val="1200"/>
+              </a:spcAft>
+            </a:pPr>
+            <a:r>
+              <a:rPr sz="1500" b="0" i="0">
+                <a:solidFill>
+                  <a:srgbClr val="8A8A8A"/>
+                </a:solidFill>
+                <a:latin typeface="Calibri"/>
+              </a:rPr>
+              <a:t>–  … mais le client est sensible au sérieux et au respect des délais.</a:t>
             </a:r>
           </a:p>
         </p:txBody>
@@ -7411,8 +8394,8 @@
         </p:nvSpPr>
         <p:spPr>
           <a:xfrm>
-            <a:off x="548640" y="2468880"/>
-            <a:ext cx="3566160" cy="1234440"/>
+            <a:off x="7315200" y="1691640"/>
+            <a:ext cx="4297680" cy="1828800"/>
           </a:xfrm>
           <a:prstGeom prst="roundRect">
             <a:avLst/>
@@ -7455,8 +8438,8 @@
         </p:nvSpPr>
         <p:spPr>
           <a:xfrm>
-            <a:off x="548640" y="2615184"/>
-            <a:ext cx="3566160" cy="640080"/>
+            <a:off x="7315200" y="1828800"/>
+            <a:ext cx="4297680" cy="365760"/>
           </a:xfrm>
           <a:prstGeom prst="rect">
             <a:avLst/>
@@ -7475,13 +8458,13 @@
               </a:spcBef>
             </a:pPr>
             <a:r>
-              <a:rPr sz="3000" b="1" i="0">
+              <a:rPr sz="1300" b="1" i="0">
                 <a:solidFill>
                   <a:srgbClr val="1F4E79"/>
                 </a:solidFill>
                 <a:latin typeface="Calibri"/>
               </a:rPr>
-              <a:t>≤ 45 j</a:t>
+              <a:t>LA COMMANDE</a:t>
             </a:r>
           </a:p>
         </p:txBody>
@@ -7494,33 +8477,52 @@
         </p:nvSpPr>
         <p:spPr>
           <a:xfrm>
-            <a:off x="548640" y="3255264"/>
-            <a:ext cx="3566160" cy="411480"/>
-          </a:xfrm>
-          <a:prstGeom prst="rect">
-            <a:avLst/>
-          </a:prstGeom>
-          <a:noFill/>
-        </p:spPr>
-        <p:txBody>
-          <a:bodyPr wrap="square" anchor="t" lIns="0" rIns="0" tIns="0" bIns="0">
-            <a:spAutoFit/>
-          </a:bodyPr>
-          <a:lstStyle/>
-          <a:p>
-            <a:pPr algn="ctr">
-              <a:spcBef>
-                <a:spcPts val="0"/>
-              </a:spcBef>
-            </a:pPr>
-            <a:r>
-              <a:rPr sz="1250" b="0" i="0">
+            <a:off x="7498079" y="2286000"/>
+            <a:ext cx="3931920" cy="1188720"/>
+          </a:xfrm>
+          <a:prstGeom prst="rect">
+            <a:avLst/>
+          </a:prstGeom>
+          <a:noFill/>
+        </p:spPr>
+        <p:txBody>
+          <a:bodyPr wrap="square" anchor="t" lIns="0" rIns="0" tIns="0" bIns="0">
+            <a:spAutoFit/>
+          </a:bodyPr>
+          <a:lstStyle/>
+          <a:p>
+            <a:pPr algn="l">
+              <a:spcBef>
+                <a:spcPts val="0"/>
+              </a:spcBef>
+              <a:spcAft>
+                <a:spcPts val="800"/>
+              </a:spcAft>
+            </a:pPr>
+            <a:r>
+              <a:rPr sz="1800" b="1" i="0">
                 <a:solidFill>
                   <a:srgbClr val="404040"/>
                 </a:solidFill>
                 <a:latin typeface="Calibri"/>
               </a:rPr>
-              <a:t>Délai de la phase</a:t>
+              <a:t>272 000 € — budget</a:t>
+            </a:r>
+          </a:p>
+          <a:p>
+            <a:pPr algn="l">
+              <a:spcBef>
+                <a:spcPts val="0"/>
+              </a:spcBef>
+            </a:pPr>
+            <a:r>
+              <a:rPr sz="1800" b="1" i="0">
+                <a:solidFill>
+                  <a:srgbClr val="404040"/>
+                </a:solidFill>
+                <a:latin typeface="Calibri"/>
+              </a:rPr>
+              <a:t>85 jours ouvrables — délai ferme</a:t>
             </a:r>
           </a:p>
         </p:txBody>
@@ -7533,14 +8535,14 @@
         </p:nvSpPr>
         <p:spPr>
           <a:xfrm>
-            <a:off x="4297680" y="2468880"/>
-            <a:ext cx="3566160" cy="1234440"/>
+            <a:off x="7315200" y="3703320"/>
+            <a:ext cx="4297680" cy="2103120"/>
           </a:xfrm>
           <a:prstGeom prst="roundRect">
             <a:avLst/>
           </a:prstGeom>
           <a:solidFill>
-            <a:srgbClr val="EAF1F8"/>
+            <a:srgbClr val="FDECEA"/>
           </a:solidFill>
           <a:ln>
             <a:noFill/>
@@ -7577,316 +8579,52 @@
         </p:nvSpPr>
         <p:spPr>
           <a:xfrm>
-            <a:off x="4297680" y="2615184"/>
-            <a:ext cx="3566160" cy="640080"/>
-          </a:xfrm>
-          <a:prstGeom prst="rect">
-            <a:avLst/>
-          </a:prstGeom>
-          <a:noFill/>
-        </p:spPr>
-        <p:txBody>
-          <a:bodyPr wrap="square" anchor="t" lIns="0" rIns="0" tIns="0" bIns="0">
-            <a:spAutoFit/>
-          </a:bodyPr>
-          <a:lstStyle/>
-          <a:p>
-            <a:pPr algn="ctr">
-              <a:spcBef>
-                <a:spcPts val="0"/>
-              </a:spcBef>
-            </a:pPr>
-            <a:r>
-              <a:rPr sz="3000" b="1" i="0">
-                <a:solidFill>
-                  <a:srgbClr val="1F4E79"/>
-                </a:solidFill>
-                <a:latin typeface="Calibri"/>
-              </a:rPr>
-              <a:t>≤ 48 500 €</a:t>
-            </a:r>
-          </a:p>
-        </p:txBody>
-      </p:sp>
-      <p:sp>
-        <p:nvSpPr>
-          <p:cNvPr id="14" name="TextBox 13"/>
-          <p:cNvSpPr txBox="1"/>
-          <p:nvPr/>
-        </p:nvSpPr>
-        <p:spPr>
-          <a:xfrm>
-            <a:off x="4297680" y="3255264"/>
-            <a:ext cx="3566160" cy="411480"/>
-          </a:xfrm>
-          <a:prstGeom prst="rect">
-            <a:avLst/>
-          </a:prstGeom>
-          <a:noFill/>
-        </p:spPr>
-        <p:txBody>
-          <a:bodyPr wrap="square" anchor="t" lIns="0" rIns="0" tIns="0" bIns="0">
-            <a:spAutoFit/>
-          </a:bodyPr>
-          <a:lstStyle/>
-          <a:p>
-            <a:pPr algn="ctr">
-              <a:spcBef>
-                <a:spcPts val="0"/>
-              </a:spcBef>
-            </a:pPr>
-            <a:r>
-              <a:rPr sz="1250" b="0" i="0">
+            <a:off x="7498079" y="3886200"/>
+            <a:ext cx="3931920" cy="1828800"/>
+          </a:xfrm>
+          <a:prstGeom prst="rect">
+            <a:avLst/>
+          </a:prstGeom>
+          <a:noFill/>
+        </p:spPr>
+        <p:txBody>
+          <a:bodyPr wrap="square" anchor="t" lIns="0" rIns="0" tIns="0" bIns="0">
+            <a:spAutoFit/>
+          </a:bodyPr>
+          <a:lstStyle/>
+          <a:p>
+            <a:pPr algn="l">
+              <a:spcBef>
+                <a:spcPts val="0"/>
+              </a:spcBef>
+              <a:spcAft>
+                <a:spcPts val="600"/>
+              </a:spcAft>
+            </a:pPr>
+            <a:r>
+              <a:rPr sz="1400" b="1" i="0">
+                <a:solidFill>
+                  <a:srgbClr val="C0392B"/>
+                </a:solidFill>
+                <a:latin typeface="Calibri"/>
+              </a:rPr>
+              <a:t>L’enjeu</a:t>
+            </a:r>
+          </a:p>
+          <a:p>
+            <a:pPr algn="l">
+              <a:spcBef>
+                <a:spcPts val="0"/>
+              </a:spcBef>
+            </a:pPr>
+            <a:r>
+              <a:rPr sz="1450" b="0" i="0">
                 <a:solidFill>
                   <a:srgbClr val="404040"/>
                 </a:solidFill>
                 <a:latin typeface="Calibri"/>
               </a:rPr>
-              <a:t>Budget de la phase</a:t>
-            </a:r>
-          </a:p>
-        </p:txBody>
-      </p:sp>
-      <p:sp>
-        <p:nvSpPr>
-          <p:cNvPr id="15" name="Rounded Rectangle 14"/>
-          <p:cNvSpPr/>
-          <p:nvPr/>
-        </p:nvSpPr>
-        <p:spPr>
-          <a:xfrm>
-            <a:off x="8046720" y="2468880"/>
-            <a:ext cx="3566160" cy="1234440"/>
-          </a:xfrm>
-          <a:prstGeom prst="roundRect">
-            <a:avLst/>
-          </a:prstGeom>
-          <a:solidFill>
-            <a:srgbClr val="EAF1F8"/>
-          </a:solidFill>
-          <a:ln>
-            <a:noFill/>
-          </a:ln>
-          <a:effectLst/>
-        </p:spPr>
-        <p:style>
-          <a:lnRef idx="1">
-            <a:schemeClr val="accent1"/>
-          </a:lnRef>
-          <a:fillRef idx="3">
-            <a:schemeClr val="accent1"/>
-          </a:fillRef>
-          <a:effectRef idx="2">
-            <a:schemeClr val="accent1"/>
-          </a:effectRef>
-          <a:fontRef idx="minor">
-            <a:schemeClr val="lt1"/>
-          </a:fontRef>
-        </p:style>
-        <p:txBody>
-          <a:bodyPr rtlCol="0" anchor="ctr"/>
-          <a:lstStyle/>
-          <a:p>
-            <a:pPr algn="ctr"/>
-          </a:p>
-        </p:txBody>
-      </p:sp>
-      <p:sp>
-        <p:nvSpPr>
-          <p:cNvPr id="16" name="TextBox 15"/>
-          <p:cNvSpPr txBox="1"/>
-          <p:nvPr/>
-        </p:nvSpPr>
-        <p:spPr>
-          <a:xfrm>
-            <a:off x="8046720" y="2615184"/>
-            <a:ext cx="3566160" cy="640080"/>
-          </a:xfrm>
-          <a:prstGeom prst="rect">
-            <a:avLst/>
-          </a:prstGeom>
-          <a:noFill/>
-        </p:spPr>
-        <p:txBody>
-          <a:bodyPr wrap="square" anchor="t" lIns="0" rIns="0" tIns="0" bIns="0">
-            <a:spAutoFit/>
-          </a:bodyPr>
-          <a:lstStyle/>
-          <a:p>
-            <a:pPr algn="ctr">
-              <a:spcBef>
-                <a:spcPts val="0"/>
-              </a:spcBef>
-            </a:pPr>
-            <a:r>
-              <a:rPr sz="3000" b="1" i="0">
-                <a:solidFill>
-                  <a:srgbClr val="1F4E79"/>
-                </a:solidFill>
-                <a:latin typeface="Calibri"/>
-              </a:rPr>
-              <a:t>Qualité</a:t>
-            </a:r>
-          </a:p>
-        </p:txBody>
-      </p:sp>
-      <p:sp>
-        <p:nvSpPr>
-          <p:cNvPr id="17" name="TextBox 16"/>
-          <p:cNvSpPr txBox="1"/>
-          <p:nvPr/>
-        </p:nvSpPr>
-        <p:spPr>
-          <a:xfrm>
-            <a:off x="8046720" y="3255264"/>
-            <a:ext cx="3566160" cy="411480"/>
-          </a:xfrm>
-          <a:prstGeom prst="rect">
-            <a:avLst/>
-          </a:prstGeom>
-          <a:noFill/>
-        </p:spPr>
-        <p:txBody>
-          <a:bodyPr wrap="square" anchor="t" lIns="0" rIns="0" tIns="0" bIns="0">
-            <a:spAutoFit/>
-          </a:bodyPr>
-          <a:lstStyle/>
-          <a:p>
-            <a:pPr algn="ctr">
-              <a:spcBef>
-                <a:spcPts val="0"/>
-              </a:spcBef>
-            </a:pPr>
-            <a:r>
-              <a:rPr sz="1250" b="0" i="0">
-                <a:solidFill>
-                  <a:srgbClr val="404040"/>
-                </a:solidFill>
-                <a:latin typeface="Calibri"/>
-              </a:rPr>
-              <a:t>Essai réussi + DVD</a:t>
-            </a:r>
-          </a:p>
-        </p:txBody>
-      </p:sp>
-      <p:sp>
-        <p:nvSpPr>
-          <p:cNvPr id="18" name="TextBox 17"/>
-          <p:cNvSpPr txBox="1"/>
-          <p:nvPr/>
-        </p:nvSpPr>
-        <p:spPr>
-          <a:xfrm>
-            <a:off x="548640" y="4114800"/>
-            <a:ext cx="10972800" cy="1828800"/>
-          </a:xfrm>
-          <a:prstGeom prst="rect">
-            <a:avLst/>
-          </a:prstGeom>
-          <a:noFill/>
-        </p:spPr>
-        <p:txBody>
-          <a:bodyPr wrap="square" anchor="t" lIns="0" rIns="0" tIns="0" bIns="0">
-            <a:spAutoFit/>
-          </a:bodyPr>
-          <a:lstStyle/>
-          <a:p>
-            <a:pPr algn="l">
-              <a:spcBef>
-                <a:spcPts val="0"/>
-              </a:spcBef>
-              <a:spcAft>
-                <a:spcPts val="800"/>
-              </a:spcAft>
-            </a:pPr>
-            <a:r>
-              <a:rPr sz="1600" b="1" i="0">
-                <a:solidFill>
-                  <a:srgbClr val="1F4E79"/>
-                </a:solidFill>
-                <a:latin typeface="Calibri"/>
-              </a:rPr>
-              <a:t>Pourquoi cette phase est sensible</a:t>
-            </a:r>
-          </a:p>
-        </p:txBody>
-      </p:sp>
-      <p:sp>
-        <p:nvSpPr>
-          <p:cNvPr id="19" name="TextBox 18"/>
-          <p:cNvSpPr txBox="1"/>
-          <p:nvPr/>
-        </p:nvSpPr>
-        <p:spPr>
-          <a:xfrm>
-            <a:off x="548640" y="4572000"/>
-            <a:ext cx="10972800" cy="1828800"/>
-          </a:xfrm>
-          <a:prstGeom prst="rect">
-            <a:avLst/>
-          </a:prstGeom>
-          <a:noFill/>
-        </p:spPr>
-        <p:txBody>
-          <a:bodyPr wrap="square" anchor="t" lIns="0" rIns="0" tIns="0" bIns="0">
-            <a:spAutoFit/>
-          </a:bodyPr>
-          <a:lstStyle/>
-          <a:p>
-            <a:pPr algn="l">
-              <a:spcBef>
-                <a:spcPts val="0"/>
-              </a:spcBef>
-              <a:spcAft>
-                <a:spcPts val="800"/>
-              </a:spcAft>
-            </a:pPr>
-            <a:r>
-              <a:rPr sz="1600" b="0" i="0">
-                <a:solidFill>
-                  <a:srgbClr val="404040"/>
-                </a:solidFill>
-                <a:latin typeface="Calibri"/>
-              </a:rPr>
-              <a:t>•  C’est le point de départ : si elle dérape, tout l’engagement des 85 jours est menacé.</a:t>
-            </a:r>
-          </a:p>
-          <a:p>
-            <a:pPr algn="l">
-              <a:spcBef>
-                <a:spcPts val="0"/>
-              </a:spcBef>
-              <a:spcAft>
-                <a:spcPts val="800"/>
-              </a:spcAft>
-            </a:pPr>
-            <a:r>
-              <a:rPr sz="1600" b="0" i="0">
-                <a:solidFill>
-                  <a:srgbClr val="404040"/>
-                </a:solidFill>
-                <a:latin typeface="Calibri"/>
-              </a:rPr>
-              <a:t>•  Les pièces de fixation sont fabriquées en interne ; les équipements de mesure sont achetés à l’extérieur.</a:t>
-            </a:r>
-          </a:p>
-          <a:p>
-            <a:pPr algn="l">
-              <a:spcBef>
-                <a:spcPts val="0"/>
-              </a:spcBef>
-              <a:spcAft>
-                <a:spcPts val="800"/>
-              </a:spcAft>
-            </a:pPr>
-            <a:r>
-              <a:rPr sz="1600" b="0" i="0">
-                <a:solidFill>
-                  <a:srgbClr val="404040"/>
-                </a:solidFill>
-                <a:latin typeface="Calibri"/>
-              </a:rPr>
-              <a:t>•  L’équipe de préparation ne participe pas aux mesures : elle laisse un mode opératoire.</a:t>
+              <a:t>Réussir ce premier essai pour ouvrir une relation durable avec un client à fort potentiel.</a:t>
             </a:r>
           </a:p>
         </p:txBody>
@@ -8013,7 +8751,7 @@
         </p:nvSpPr>
         <p:spPr>
           <a:xfrm>
-            <a:off x="502920" y="146304"/>
+            <a:off x="502920" y="164592"/>
             <a:ext cx="10515600" cy="320040"/>
           </a:xfrm>
           <a:prstGeom prst="rect">
@@ -8039,7 +8777,7 @@
                 </a:solidFill>
                 <a:latin typeface="Calibri"/>
               </a:rPr>
-              <a:t>LIVRABLE 1</a:t>
+              <a:t>1 · CADRAGE</a:t>
             </a:r>
           </a:p>
         </p:txBody>
@@ -8052,7 +8790,7 @@
         </p:nvSpPr>
         <p:spPr>
           <a:xfrm>
-            <a:off x="502920" y="411480"/>
+            <a:off x="502920" y="420624"/>
             <a:ext cx="11155680" cy="640080"/>
           </a:xfrm>
           <a:prstGeom prst="rect">
@@ -8078,7 +8816,7 @@
                 </a:solidFill>
                 <a:latin typeface="Calibri"/>
               </a:rPr>
-              <a:t>Scénario du projet</a:t>
+              <a:t>Périmètre et contraintes</a:t>
             </a:r>
           </a:p>
         </p:txBody>
@@ -8117,7 +8855,7 @@
                 </a:solidFill>
                 <a:latin typeface="Calibri"/>
               </a:rPr>
-              <a:t>Projet GREMLIN — Soutenance</a:t>
+              <a:t>Projet GREMLIN — Phase de préparation</a:t>
             </a:r>
           </a:p>
         </p:txBody>
@@ -8156,7 +8894,7 @@
                 </a:solidFill>
                 <a:latin typeface="Calibri"/>
               </a:rPr>
-              <a:t>4</a:t>
+              <a:t>3</a:t>
             </a:r>
           </a:p>
         </p:txBody>
@@ -8169,8 +8907,8 @@
         </p:nvSpPr>
         <p:spPr>
           <a:xfrm>
-            <a:off x="548640" y="1371600"/>
-            <a:ext cx="11064240" cy="548640"/>
+            <a:off x="548640" y="1417320"/>
+            <a:ext cx="11064240" cy="731520"/>
           </a:xfrm>
           <a:prstGeom prst="rect">
             <a:avLst/>
@@ -8189,41 +8927,502 @@
               </a:spcBef>
             </a:pPr>
             <a:r>
-              <a:rPr sz="1550" b="0" i="0">
+              <a:rPr sz="1650" b="0" i="0">
                 <a:solidFill>
                   <a:srgbClr val="404040"/>
                 </a:solidFill>
                 <a:latin typeface="Calibri"/>
               </a:rPr>
-              <a:t>Cinq grandes étapes ; trois peuvent avancer en parallèle, ce qui sera la clé pour tenir le délai.</a:t>
-            </a:r>
-          </a:p>
-        </p:txBody>
-      </p:sp>
-      <p:pic>
-        <p:nvPicPr>
-          <p:cNvPr id="9" name="Picture 8" descr="scenario.png"/>
-          <p:cNvPicPr>
-            <a:picLocks noChangeAspect="1"/>
-          </p:cNvPicPr>
-          <p:nvPr/>
-        </p:nvPicPr>
-        <p:blipFill>
-          <a:blip r:embed="rId2"/>
-          <a:stretch>
-            <a:fillRect/>
-          </a:stretch>
-        </p:blipFill>
-        <p:spPr>
-          <a:xfrm>
-            <a:off x="1597645" y="1965960"/>
-            <a:ext cx="8996404" cy="4297680"/>
-          </a:xfrm>
-          <a:prstGeom prst="rect">
-            <a:avLst/>
-          </a:prstGeom>
-        </p:spPr>
-      </p:pic>
+              <a:t>Ce dossier traite la 1re phase : préparer la maquette — la fixer sur son support et l’équiper en capteurs, jusqu’à une maquette « prête à l’expérimentation ».</a:t>
+            </a:r>
+          </a:p>
+        </p:txBody>
+      </p:sp>
+      <p:sp>
+        <p:nvSpPr>
+          <p:cNvPr id="9" name="Rounded Rectangle 8"/>
+          <p:cNvSpPr/>
+          <p:nvPr/>
+        </p:nvSpPr>
+        <p:spPr>
+          <a:xfrm>
+            <a:off x="548640" y="2468880"/>
+            <a:ext cx="3566160" cy="1234440"/>
+          </a:xfrm>
+          <a:prstGeom prst="roundRect">
+            <a:avLst/>
+          </a:prstGeom>
+          <a:solidFill>
+            <a:srgbClr val="EAF1F8"/>
+          </a:solidFill>
+          <a:ln>
+            <a:noFill/>
+          </a:ln>
+          <a:effectLst/>
+        </p:spPr>
+        <p:style>
+          <a:lnRef idx="1">
+            <a:schemeClr val="accent1"/>
+          </a:lnRef>
+          <a:fillRef idx="3">
+            <a:schemeClr val="accent1"/>
+          </a:fillRef>
+          <a:effectRef idx="2">
+            <a:schemeClr val="accent1"/>
+          </a:effectRef>
+          <a:fontRef idx="minor">
+            <a:schemeClr val="lt1"/>
+          </a:fontRef>
+        </p:style>
+        <p:txBody>
+          <a:bodyPr rtlCol="0" anchor="ctr"/>
+          <a:lstStyle/>
+          <a:p>
+            <a:pPr algn="ctr"/>
+          </a:p>
+        </p:txBody>
+      </p:sp>
+      <p:sp>
+        <p:nvSpPr>
+          <p:cNvPr id="10" name="TextBox 9"/>
+          <p:cNvSpPr txBox="1"/>
+          <p:nvPr/>
+        </p:nvSpPr>
+        <p:spPr>
+          <a:xfrm>
+            <a:off x="548640" y="2615184"/>
+            <a:ext cx="3566160" cy="640080"/>
+          </a:xfrm>
+          <a:prstGeom prst="rect">
+            <a:avLst/>
+          </a:prstGeom>
+          <a:noFill/>
+        </p:spPr>
+        <p:txBody>
+          <a:bodyPr wrap="square" anchor="t" lIns="0" rIns="0" tIns="0" bIns="0">
+            <a:spAutoFit/>
+          </a:bodyPr>
+          <a:lstStyle/>
+          <a:p>
+            <a:pPr algn="ctr">
+              <a:spcBef>
+                <a:spcPts val="0"/>
+              </a:spcBef>
+            </a:pPr>
+            <a:r>
+              <a:rPr sz="3000" b="1" i="0">
+                <a:solidFill>
+                  <a:srgbClr val="1F4E79"/>
+                </a:solidFill>
+                <a:latin typeface="Calibri"/>
+              </a:rPr>
+              <a:t>≤ 45 j</a:t>
+            </a:r>
+          </a:p>
+        </p:txBody>
+      </p:sp>
+      <p:sp>
+        <p:nvSpPr>
+          <p:cNvPr id="11" name="TextBox 10"/>
+          <p:cNvSpPr txBox="1"/>
+          <p:nvPr/>
+        </p:nvSpPr>
+        <p:spPr>
+          <a:xfrm>
+            <a:off x="548640" y="3255264"/>
+            <a:ext cx="3566160" cy="411480"/>
+          </a:xfrm>
+          <a:prstGeom prst="rect">
+            <a:avLst/>
+          </a:prstGeom>
+          <a:noFill/>
+        </p:spPr>
+        <p:txBody>
+          <a:bodyPr wrap="square" anchor="t" lIns="0" rIns="0" tIns="0" bIns="0">
+            <a:spAutoFit/>
+          </a:bodyPr>
+          <a:lstStyle/>
+          <a:p>
+            <a:pPr algn="ctr">
+              <a:spcBef>
+                <a:spcPts val="0"/>
+              </a:spcBef>
+            </a:pPr>
+            <a:r>
+              <a:rPr sz="1250" b="0" i="0">
+                <a:solidFill>
+                  <a:srgbClr val="404040"/>
+                </a:solidFill>
+                <a:latin typeface="Calibri"/>
+              </a:rPr>
+              <a:t>Délai de la phase</a:t>
+            </a:r>
+          </a:p>
+        </p:txBody>
+      </p:sp>
+      <p:sp>
+        <p:nvSpPr>
+          <p:cNvPr id="12" name="Rounded Rectangle 11"/>
+          <p:cNvSpPr/>
+          <p:nvPr/>
+        </p:nvSpPr>
+        <p:spPr>
+          <a:xfrm>
+            <a:off x="4297680" y="2468880"/>
+            <a:ext cx="3566160" cy="1234440"/>
+          </a:xfrm>
+          <a:prstGeom prst="roundRect">
+            <a:avLst/>
+          </a:prstGeom>
+          <a:solidFill>
+            <a:srgbClr val="EAF1F8"/>
+          </a:solidFill>
+          <a:ln>
+            <a:noFill/>
+          </a:ln>
+          <a:effectLst/>
+        </p:spPr>
+        <p:style>
+          <a:lnRef idx="1">
+            <a:schemeClr val="accent1"/>
+          </a:lnRef>
+          <a:fillRef idx="3">
+            <a:schemeClr val="accent1"/>
+          </a:fillRef>
+          <a:effectRef idx="2">
+            <a:schemeClr val="accent1"/>
+          </a:effectRef>
+          <a:fontRef idx="minor">
+            <a:schemeClr val="lt1"/>
+          </a:fontRef>
+        </p:style>
+        <p:txBody>
+          <a:bodyPr rtlCol="0" anchor="ctr"/>
+          <a:lstStyle/>
+          <a:p>
+            <a:pPr algn="ctr"/>
+          </a:p>
+        </p:txBody>
+      </p:sp>
+      <p:sp>
+        <p:nvSpPr>
+          <p:cNvPr id="13" name="TextBox 12"/>
+          <p:cNvSpPr txBox="1"/>
+          <p:nvPr/>
+        </p:nvSpPr>
+        <p:spPr>
+          <a:xfrm>
+            <a:off x="4297680" y="2615184"/>
+            <a:ext cx="3566160" cy="640080"/>
+          </a:xfrm>
+          <a:prstGeom prst="rect">
+            <a:avLst/>
+          </a:prstGeom>
+          <a:noFill/>
+        </p:spPr>
+        <p:txBody>
+          <a:bodyPr wrap="square" anchor="t" lIns="0" rIns="0" tIns="0" bIns="0">
+            <a:spAutoFit/>
+          </a:bodyPr>
+          <a:lstStyle/>
+          <a:p>
+            <a:pPr algn="ctr">
+              <a:spcBef>
+                <a:spcPts val="0"/>
+              </a:spcBef>
+            </a:pPr>
+            <a:r>
+              <a:rPr sz="3000" b="1" i="0">
+                <a:solidFill>
+                  <a:srgbClr val="1F4E79"/>
+                </a:solidFill>
+                <a:latin typeface="Calibri"/>
+              </a:rPr>
+              <a:t>≤ 48 500 €</a:t>
+            </a:r>
+          </a:p>
+        </p:txBody>
+      </p:sp>
+      <p:sp>
+        <p:nvSpPr>
+          <p:cNvPr id="14" name="TextBox 13"/>
+          <p:cNvSpPr txBox="1"/>
+          <p:nvPr/>
+        </p:nvSpPr>
+        <p:spPr>
+          <a:xfrm>
+            <a:off x="4297680" y="3255264"/>
+            <a:ext cx="3566160" cy="411480"/>
+          </a:xfrm>
+          <a:prstGeom prst="rect">
+            <a:avLst/>
+          </a:prstGeom>
+          <a:noFill/>
+        </p:spPr>
+        <p:txBody>
+          <a:bodyPr wrap="square" anchor="t" lIns="0" rIns="0" tIns="0" bIns="0">
+            <a:spAutoFit/>
+          </a:bodyPr>
+          <a:lstStyle/>
+          <a:p>
+            <a:pPr algn="ctr">
+              <a:spcBef>
+                <a:spcPts val="0"/>
+              </a:spcBef>
+            </a:pPr>
+            <a:r>
+              <a:rPr sz="1250" b="0" i="0">
+                <a:solidFill>
+                  <a:srgbClr val="404040"/>
+                </a:solidFill>
+                <a:latin typeface="Calibri"/>
+              </a:rPr>
+              <a:t>Budget de la phase</a:t>
+            </a:r>
+          </a:p>
+        </p:txBody>
+      </p:sp>
+      <p:sp>
+        <p:nvSpPr>
+          <p:cNvPr id="15" name="Rounded Rectangle 14"/>
+          <p:cNvSpPr/>
+          <p:nvPr/>
+        </p:nvSpPr>
+        <p:spPr>
+          <a:xfrm>
+            <a:off x="8046720" y="2468880"/>
+            <a:ext cx="3566160" cy="1234440"/>
+          </a:xfrm>
+          <a:prstGeom prst="roundRect">
+            <a:avLst/>
+          </a:prstGeom>
+          <a:solidFill>
+            <a:srgbClr val="EAF1F8"/>
+          </a:solidFill>
+          <a:ln>
+            <a:noFill/>
+          </a:ln>
+          <a:effectLst/>
+        </p:spPr>
+        <p:style>
+          <a:lnRef idx="1">
+            <a:schemeClr val="accent1"/>
+          </a:lnRef>
+          <a:fillRef idx="3">
+            <a:schemeClr val="accent1"/>
+          </a:fillRef>
+          <a:effectRef idx="2">
+            <a:schemeClr val="accent1"/>
+          </a:effectRef>
+          <a:fontRef idx="minor">
+            <a:schemeClr val="lt1"/>
+          </a:fontRef>
+        </p:style>
+        <p:txBody>
+          <a:bodyPr rtlCol="0" anchor="ctr"/>
+          <a:lstStyle/>
+          <a:p>
+            <a:pPr algn="ctr"/>
+          </a:p>
+        </p:txBody>
+      </p:sp>
+      <p:sp>
+        <p:nvSpPr>
+          <p:cNvPr id="16" name="TextBox 15"/>
+          <p:cNvSpPr txBox="1"/>
+          <p:nvPr/>
+        </p:nvSpPr>
+        <p:spPr>
+          <a:xfrm>
+            <a:off x="8046720" y="2615184"/>
+            <a:ext cx="3566160" cy="640080"/>
+          </a:xfrm>
+          <a:prstGeom prst="rect">
+            <a:avLst/>
+          </a:prstGeom>
+          <a:noFill/>
+        </p:spPr>
+        <p:txBody>
+          <a:bodyPr wrap="square" anchor="t" lIns="0" rIns="0" tIns="0" bIns="0">
+            <a:spAutoFit/>
+          </a:bodyPr>
+          <a:lstStyle/>
+          <a:p>
+            <a:pPr algn="ctr">
+              <a:spcBef>
+                <a:spcPts val="0"/>
+              </a:spcBef>
+            </a:pPr>
+            <a:r>
+              <a:rPr sz="3000" b="1" i="0">
+                <a:solidFill>
+                  <a:srgbClr val="1F4E79"/>
+                </a:solidFill>
+                <a:latin typeface="Calibri"/>
+              </a:rPr>
+              <a:t>Qualité</a:t>
+            </a:r>
+          </a:p>
+        </p:txBody>
+      </p:sp>
+      <p:sp>
+        <p:nvSpPr>
+          <p:cNvPr id="17" name="TextBox 16"/>
+          <p:cNvSpPr txBox="1"/>
+          <p:nvPr/>
+        </p:nvSpPr>
+        <p:spPr>
+          <a:xfrm>
+            <a:off x="8046720" y="3255264"/>
+            <a:ext cx="3566160" cy="411480"/>
+          </a:xfrm>
+          <a:prstGeom prst="rect">
+            <a:avLst/>
+          </a:prstGeom>
+          <a:noFill/>
+        </p:spPr>
+        <p:txBody>
+          <a:bodyPr wrap="square" anchor="t" lIns="0" rIns="0" tIns="0" bIns="0">
+            <a:spAutoFit/>
+          </a:bodyPr>
+          <a:lstStyle/>
+          <a:p>
+            <a:pPr algn="ctr">
+              <a:spcBef>
+                <a:spcPts val="0"/>
+              </a:spcBef>
+            </a:pPr>
+            <a:r>
+              <a:rPr sz="1250" b="0" i="0">
+                <a:solidFill>
+                  <a:srgbClr val="404040"/>
+                </a:solidFill>
+                <a:latin typeface="Calibri"/>
+              </a:rPr>
+              <a:t>Essai réussi + DVD</a:t>
+            </a:r>
+          </a:p>
+        </p:txBody>
+      </p:sp>
+      <p:sp>
+        <p:nvSpPr>
+          <p:cNvPr id="18" name="TextBox 17"/>
+          <p:cNvSpPr txBox="1"/>
+          <p:nvPr/>
+        </p:nvSpPr>
+        <p:spPr>
+          <a:xfrm>
+            <a:off x="548640" y="4160520"/>
+            <a:ext cx="10972800" cy="457200"/>
+          </a:xfrm>
+          <a:prstGeom prst="rect">
+            <a:avLst/>
+          </a:prstGeom>
+          <a:noFill/>
+        </p:spPr>
+        <p:txBody>
+          <a:bodyPr wrap="square" anchor="t" lIns="0" rIns="0" tIns="0" bIns="0">
+            <a:spAutoFit/>
+          </a:bodyPr>
+          <a:lstStyle/>
+          <a:p>
+            <a:pPr algn="l">
+              <a:spcBef>
+                <a:spcPts val="0"/>
+              </a:spcBef>
+            </a:pPr>
+            <a:r>
+              <a:rPr sz="1600" b="1" i="0">
+                <a:solidFill>
+                  <a:srgbClr val="1F4E79"/>
+                </a:solidFill>
+                <a:latin typeface="Calibri"/>
+              </a:rPr>
+              <a:t>Pourquoi cette phase est sensible</a:t>
+            </a:r>
+          </a:p>
+        </p:txBody>
+      </p:sp>
+      <p:sp>
+        <p:nvSpPr>
+          <p:cNvPr id="19" name="TextBox 18"/>
+          <p:cNvSpPr txBox="1"/>
+          <p:nvPr/>
+        </p:nvSpPr>
+        <p:spPr>
+          <a:xfrm>
+            <a:off x="548640" y="4617720"/>
+            <a:ext cx="10972800" cy="1828800"/>
+          </a:xfrm>
+          <a:prstGeom prst="rect">
+            <a:avLst/>
+          </a:prstGeom>
+          <a:noFill/>
+        </p:spPr>
+        <p:txBody>
+          <a:bodyPr wrap="square" anchor="t" lIns="0" rIns="0" tIns="0" bIns="0">
+            <a:spAutoFit/>
+          </a:bodyPr>
+          <a:lstStyle/>
+          <a:p>
+            <a:pPr algn="l">
+              <a:spcBef>
+                <a:spcPts val="0"/>
+              </a:spcBef>
+              <a:spcAft>
+                <a:spcPts val="800"/>
+              </a:spcAft>
+            </a:pPr>
+            <a:r>
+              <a:rPr sz="1600" b="0" i="0">
+                <a:solidFill>
+                  <a:srgbClr val="404040"/>
+                </a:solidFill>
+                <a:latin typeface="Calibri"/>
+              </a:rPr>
+              <a:t>•  C’est le point de départ : si elle dérape, l’engagement des 85 jours est menacé.</a:t>
+            </a:r>
+          </a:p>
+          <a:p>
+            <a:pPr algn="l">
+              <a:spcBef>
+                <a:spcPts val="0"/>
+              </a:spcBef>
+              <a:spcAft>
+                <a:spcPts val="800"/>
+              </a:spcAft>
+            </a:pPr>
+            <a:r>
+              <a:rPr sz="1600" b="0" i="0">
+                <a:solidFill>
+                  <a:srgbClr val="404040"/>
+                </a:solidFill>
+                <a:latin typeface="Calibri"/>
+              </a:rPr>
+              <a:t>•  Pièces de fixation fabriquées en interne ; équipements de mesure achetés à l’extérieur.</a:t>
+            </a:r>
+          </a:p>
+          <a:p>
+            <a:pPr algn="l">
+              <a:spcBef>
+                <a:spcPts val="0"/>
+              </a:spcBef>
+              <a:spcAft>
+                <a:spcPts val="800"/>
+              </a:spcAft>
+            </a:pPr>
+            <a:r>
+              <a:rPr sz="1600" b="0" i="0">
+                <a:solidFill>
+                  <a:srgbClr val="404040"/>
+                </a:solidFill>
+                <a:latin typeface="Calibri"/>
+              </a:rPr>
+              <a:t>•  L’équipe de préparation ne participe pas aux mesures : elle laisse un mode opératoire.</a:t>
+            </a:r>
+          </a:p>
+        </p:txBody>
+      </p:sp>
     </p:spTree>
   </p:cSld>
   <p:clrMapOvr>
@@ -8346,7 +9545,7 @@
         </p:nvSpPr>
         <p:spPr>
           <a:xfrm>
-            <a:off x="502920" y="146304"/>
+            <a:off x="502920" y="164592"/>
             <a:ext cx="10515600" cy="320040"/>
           </a:xfrm>
           <a:prstGeom prst="rect">
@@ -8372,7 +9571,7 @@
                 </a:solidFill>
                 <a:latin typeface="Calibri"/>
               </a:rPr>
-              <a:t>LIVRABLE 2</a:t>
+              <a:t>2 · SCÉNARIO</a:t>
             </a:r>
           </a:p>
         </p:txBody>
@@ -8385,7 +9584,7 @@
         </p:nvSpPr>
         <p:spPr>
           <a:xfrm>
-            <a:off x="502920" y="411480"/>
+            <a:off x="502920" y="420624"/>
             <a:ext cx="11155680" cy="640080"/>
           </a:xfrm>
           <a:prstGeom prst="rect">
@@ -8411,7 +9610,7 @@
                 </a:solidFill>
                 <a:latin typeface="Calibri"/>
               </a:rPr>
-              <a:t>Organigramme des tâches (WBS)</a:t>
+              <a:t>Scénario du projet</a:t>
             </a:r>
           </a:p>
         </p:txBody>
@@ -8450,7 +9649,7 @@
                 </a:solidFill>
                 <a:latin typeface="Calibri"/>
               </a:rPr>
-              <a:t>Projet GREMLIN — Soutenance</a:t>
+              <a:t>Projet GREMLIN — Phase de préparation</a:t>
             </a:r>
           </a:p>
         </p:txBody>
@@ -8489,7 +9688,7 @@
                 </a:solidFill>
                 <a:latin typeface="Calibri"/>
               </a:rPr>
-              <a:t>5</a:t>
+              <a:t>4</a:t>
             </a:r>
           </a:p>
         </p:txBody>
@@ -8522,20 +9721,20 @@
               </a:spcBef>
             </a:pPr>
             <a:r>
-              <a:rPr sz="1500" b="0" i="0">
+              <a:rPr sz="1550" b="0" i="0">
                 <a:solidFill>
                   <a:srgbClr val="404040"/>
                 </a:solidFill>
                 <a:latin typeface="Calibri"/>
               </a:rPr>
-              <a:t>On part du produit final (maquette prête) que l’on décompose en 6 lots, puis en 22 tâches élémentaires. En rouge : les tâches qui seront critiques.</a:t>
+              <a:t>Cinq grandes étapes ; trois peuvent avancer en parallèle — la clé pour tenir le délai.</a:t>
             </a:r>
           </a:p>
         </p:txBody>
       </p:sp>
       <p:pic>
         <p:nvPicPr>
-          <p:cNvPr id="9" name="Picture 8" descr="wbs.png"/>
+          <p:cNvPr id="9" name="Picture 8" descr="scenario.png"/>
           <p:cNvPicPr>
             <a:picLocks noChangeAspect="1"/>
           </p:cNvPicPr>
@@ -8549,8 +9748,8 @@
         </p:blipFill>
         <p:spPr>
           <a:xfrm>
-            <a:off x="2281605" y="2011680"/>
-            <a:ext cx="7628484" cy="4297680"/>
+            <a:off x="1597645" y="1965960"/>
+            <a:ext cx="8996404" cy="4297680"/>
           </a:xfrm>
           <a:prstGeom prst="rect">
             <a:avLst/>
@@ -8679,7 +9878,7 @@
         </p:nvSpPr>
         <p:spPr>
           <a:xfrm>
-            <a:off x="502920" y="146304"/>
+            <a:off x="502920" y="164592"/>
             <a:ext cx="10515600" cy="320040"/>
           </a:xfrm>
           <a:prstGeom prst="rect">
@@ -8705,7 +9904,7 @@
                 </a:solidFill>
                 <a:latin typeface="Calibri"/>
               </a:rPr>
-              <a:t>LIVRABLE 3</a:t>
+              <a:t>3 · ORGANIGRAMME DES TÂCHES</a:t>
             </a:r>
           </a:p>
         </p:txBody>
@@ -8718,7 +9917,7 @@
         </p:nvSpPr>
         <p:spPr>
           <a:xfrm>
-            <a:off x="502920" y="411480"/>
+            <a:off x="502920" y="420624"/>
             <a:ext cx="11155680" cy="640080"/>
           </a:xfrm>
           <a:prstGeom prst="rect">
@@ -8744,7 +9943,7 @@
                 </a:solidFill>
                 <a:latin typeface="Calibri"/>
               </a:rPr>
-              <a:t>Planning — réseau et chemin critique</a:t>
+              <a:t>Découpage du travail (WBS)</a:t>
             </a:r>
           </a:p>
         </p:txBody>
@@ -8783,7 +9982,7 @@
                 </a:solidFill>
                 <a:latin typeface="Calibri"/>
               </a:rPr>
-              <a:t>Projet GREMLIN — Soutenance</a:t>
+              <a:t>Projet GREMLIN — Phase de préparation</a:t>
             </a:r>
           </a:p>
         </p:txBody>
@@ -8822,14 +10021,53 @@
                 </a:solidFill>
                 <a:latin typeface="Calibri"/>
               </a:rPr>
-              <a:t>6</a:t>
+              <a:t>5</a:t>
+            </a:r>
+          </a:p>
+        </p:txBody>
+      </p:sp>
+      <p:sp>
+        <p:nvSpPr>
+          <p:cNvPr id="8" name="TextBox 7"/>
+          <p:cNvSpPr txBox="1"/>
+          <p:nvPr/>
+        </p:nvSpPr>
+        <p:spPr>
+          <a:xfrm>
+            <a:off x="548640" y="1371600"/>
+            <a:ext cx="11064240" cy="548640"/>
+          </a:xfrm>
+          <a:prstGeom prst="rect">
+            <a:avLst/>
+          </a:prstGeom>
+          <a:noFill/>
+        </p:spPr>
+        <p:txBody>
+          <a:bodyPr wrap="square" anchor="t" lIns="0" rIns="0" tIns="0" bIns="0">
+            <a:spAutoFit/>
+          </a:bodyPr>
+          <a:lstStyle/>
+          <a:p>
+            <a:pPr algn="l">
+              <a:spcBef>
+                <a:spcPts val="0"/>
+              </a:spcBef>
+            </a:pPr>
+            <a:r>
+              <a:rPr sz="1500" b="0" i="0">
+                <a:solidFill>
+                  <a:srgbClr val="404040"/>
+                </a:solidFill>
+                <a:latin typeface="Calibri"/>
+              </a:rPr>
+              <a:t>Du produit final (maquette prête) vers 6 lots et 22 tâches. En rouge : les tâches qui seront critiques.</a:t>
             </a:r>
           </a:p>
         </p:txBody>
       </p:sp>
       <p:pic>
         <p:nvPicPr>
-          <p:cNvPr id="8" name="Picture 7" descr="pert.png"/>
+          <p:cNvPr id="9" name="Picture 8" descr="wbs.png"/>
           <p:cNvPicPr>
             <a:picLocks noChangeAspect="1"/>
           </p:cNvPicPr>
@@ -8843,116 +10081,14 @@
         </p:blipFill>
         <p:spPr>
           <a:xfrm>
-            <a:off x="2606181" y="1417320"/>
-            <a:ext cx="6979333" cy="3703320"/>
+            <a:off x="2281605" y="2011680"/>
+            <a:ext cx="7628484" cy="4297680"/>
           </a:xfrm>
           <a:prstGeom prst="rect">
             <a:avLst/>
           </a:prstGeom>
         </p:spPr>
       </p:pic>
-      <p:sp>
-        <p:nvSpPr>
-          <p:cNvPr id="9" name="Rounded Rectangle 8"/>
-          <p:cNvSpPr/>
-          <p:nvPr/>
-        </p:nvSpPr>
-        <p:spPr>
-          <a:xfrm>
-            <a:off x="640080" y="5349240"/>
-            <a:ext cx="10927080" cy="960120"/>
-          </a:xfrm>
-          <a:prstGeom prst="roundRect">
-            <a:avLst/>
-          </a:prstGeom>
-          <a:solidFill>
-            <a:srgbClr val="EAF1F8"/>
-          </a:solidFill>
-          <a:ln>
-            <a:noFill/>
-          </a:ln>
-          <a:effectLst/>
-        </p:spPr>
-        <p:style>
-          <a:lnRef idx="1">
-            <a:schemeClr val="accent1"/>
-          </a:lnRef>
-          <a:fillRef idx="3">
-            <a:schemeClr val="accent1"/>
-          </a:fillRef>
-          <a:effectRef idx="2">
-            <a:schemeClr val="accent1"/>
-          </a:effectRef>
-          <a:fontRef idx="minor">
-            <a:schemeClr val="lt1"/>
-          </a:fontRef>
-        </p:style>
-        <p:txBody>
-          <a:bodyPr rtlCol="0" anchor="ctr"/>
-          <a:lstStyle/>
-          <a:p>
-            <a:pPr algn="ctr"/>
-          </a:p>
-        </p:txBody>
-      </p:sp>
-      <p:sp>
-        <p:nvSpPr>
-          <p:cNvPr id="10" name="TextBox 9"/>
-          <p:cNvSpPr txBox="1"/>
-          <p:nvPr/>
-        </p:nvSpPr>
-        <p:spPr>
-          <a:xfrm>
-            <a:off x="822960" y="5504688"/>
-            <a:ext cx="10607040" cy="731520"/>
-          </a:xfrm>
-          <a:prstGeom prst="rect">
-            <a:avLst/>
-          </a:prstGeom>
-          <a:noFill/>
-        </p:spPr>
-        <p:txBody>
-          <a:bodyPr wrap="square" anchor="t" lIns="0" rIns="0" tIns="0" bIns="0">
-            <a:spAutoFit/>
-          </a:bodyPr>
-          <a:lstStyle/>
-          <a:p>
-            <a:pPr algn="l">
-              <a:spcBef>
-                <a:spcPts val="0"/>
-              </a:spcBef>
-              <a:spcAft>
-                <a:spcPts val="200"/>
-              </a:spcAft>
-            </a:pPr>
-            <a:r>
-              <a:rPr sz="1600" b="1" i="0">
-                <a:solidFill>
-                  <a:srgbClr val="1F4E79"/>
-                </a:solidFill>
-                <a:latin typeface="Calibri"/>
-              </a:rPr>
-              <a:t>Chemin critique : A → G → H → I → J → S → T → U → V</a:t>
-            </a:r>
-          </a:p>
-          <a:p>
-            <a:pPr algn="l">
-              <a:spcBef>
-                <a:spcPts val="0"/>
-              </a:spcBef>
-            </a:pPr>
-            <a:r>
-              <a:rPr sz="1350" b="0" i="0">
-                <a:solidFill>
-                  <a:srgbClr val="404040"/>
-                </a:solidFill>
-                <a:latin typeface="Calibri"/>
-              </a:rPr>
-              <a:t>Tâche la plus dangereuse : H « fabrication des pièces » (14 jours, aucune marge).</a:t>
-            </a:r>
-          </a:p>
-        </p:txBody>
-      </p:sp>
     </p:spTree>
   </p:cSld>
   <p:clrMapOvr>
@@ -9075,7 +10211,7 @@
         </p:nvSpPr>
         <p:spPr>
           <a:xfrm>
-            <a:off x="502920" y="146304"/>
+            <a:off x="502920" y="164592"/>
             <a:ext cx="10515600" cy="320040"/>
           </a:xfrm>
           <a:prstGeom prst="rect">
@@ -9101,7 +10237,7 @@
                 </a:solidFill>
                 <a:latin typeface="Calibri"/>
               </a:rPr>
-              <a:t>LIVRABLE 3</a:t>
+              <a:t>4 · PLANNING</a:t>
             </a:r>
           </a:p>
         </p:txBody>
@@ -9114,7 +10250,7 @@
         </p:nvSpPr>
         <p:spPr>
           <a:xfrm>
-            <a:off x="502920" y="411480"/>
+            <a:off x="502920" y="420624"/>
             <a:ext cx="11155680" cy="640080"/>
           </a:xfrm>
           <a:prstGeom prst="rect">
@@ -9140,7 +10276,7 @@
                 </a:solidFill>
                 <a:latin typeface="Calibri"/>
               </a:rPr>
-              <a:t>Planning — Gantt et vérification du délai</a:t>
+              <a:t>Réseau et chemin critique</a:t>
             </a:r>
           </a:p>
         </p:txBody>
@@ -9179,7 +10315,7 @@
                 </a:solidFill>
                 <a:latin typeface="Calibri"/>
               </a:rPr>
-              <a:t>Projet GREMLIN — Soutenance</a:t>
+              <a:t>Projet GREMLIN — Phase de préparation</a:t>
             </a:r>
           </a:p>
         </p:txBody>
@@ -9218,14 +10354,14 @@
                 </a:solidFill>
                 <a:latin typeface="Calibri"/>
               </a:rPr>
-              <a:t>7</a:t>
+              <a:t>6</a:t>
             </a:r>
           </a:p>
         </p:txBody>
       </p:sp>
       <p:pic>
         <p:nvPicPr>
-          <p:cNvPr id="8" name="Picture 7" descr="gantt.png"/>
+          <p:cNvPr id="8" name="Picture 7" descr="pert.png"/>
           <p:cNvPicPr>
             <a:picLocks noChangeAspect="1"/>
           </p:cNvPicPr>
@@ -9239,8 +10375,8 @@
         </p:blipFill>
         <p:spPr>
           <a:xfrm>
-            <a:off x="3141192" y="1371600"/>
-            <a:ext cx="5909310" cy="4297680"/>
+            <a:off x="2606181" y="1417320"/>
+            <a:ext cx="6979333" cy="3703320"/>
           </a:xfrm>
           <a:prstGeom prst="rect">
             <a:avLst/>
@@ -9255,14 +10391,14 @@
         </p:nvSpPr>
         <p:spPr>
           <a:xfrm>
-            <a:off x="8732520" y="1463040"/>
-            <a:ext cx="2971800" cy="2011680"/>
+            <a:off x="640080" y="5349240"/>
+            <a:ext cx="10927080" cy="960120"/>
           </a:xfrm>
           <a:prstGeom prst="roundRect">
             <a:avLst/>
           </a:prstGeom>
           <a:solidFill>
-            <a:srgbClr val="E8F5E9"/>
+            <a:srgbClr val="EAF1F8"/>
           </a:solidFill>
           <a:ln>
             <a:noFill/>
@@ -9299,173 +10435,52 @@
         </p:nvSpPr>
         <p:spPr>
           <a:xfrm>
-            <a:off x="8869680" y="1600200"/>
-            <a:ext cx="2697480" cy="1828800"/>
-          </a:xfrm>
-          <a:prstGeom prst="rect">
-            <a:avLst/>
-          </a:prstGeom>
-          <a:noFill/>
-        </p:spPr>
-        <p:txBody>
-          <a:bodyPr wrap="square" anchor="t" lIns="0" rIns="0" tIns="0" bIns="0">
-            <a:spAutoFit/>
-          </a:bodyPr>
-          <a:lstStyle/>
-          <a:p>
-            <a:pPr algn="ctr">
+            <a:off x="822960" y="5504688"/>
+            <a:ext cx="10607040" cy="731520"/>
+          </a:xfrm>
+          <a:prstGeom prst="rect">
+            <a:avLst/>
+          </a:prstGeom>
+          <a:noFill/>
+        </p:spPr>
+        <p:txBody>
+          <a:bodyPr wrap="square" anchor="t" lIns="0" rIns="0" tIns="0" bIns="0">
+            <a:spAutoFit/>
+          </a:bodyPr>
+          <a:lstStyle/>
+          <a:p>
+            <a:pPr algn="l">
               <a:spcBef>
                 <a:spcPts val="0"/>
               </a:spcBef>
               <a:spcAft>
-                <a:spcPts val="400"/>
+                <a:spcPts val="200"/>
               </a:spcAft>
             </a:pPr>
             <a:r>
-              <a:rPr sz="1300" b="1" i="0">
-                <a:solidFill>
-                  <a:srgbClr val="2E7D32"/>
-                </a:solidFill>
-                <a:latin typeface="Calibri"/>
-              </a:rPr>
-              <a:t>DÉLAI</a:t>
-            </a:r>
-          </a:p>
-          <a:p>
-            <a:pPr algn="ctr">
-              <a:spcBef>
-                <a:spcPts val="0"/>
-              </a:spcBef>
-              <a:spcAft>
-                <a:spcPts val="400"/>
-              </a:spcAft>
-            </a:pPr>
-            <a:r>
-              <a:rPr sz="3000" b="1" i="0">
-                <a:solidFill>
-                  <a:srgbClr val="2E7D32"/>
-                </a:solidFill>
-                <a:latin typeface="Calibri"/>
-              </a:rPr>
-              <a:t>45 / 45 j</a:t>
-            </a:r>
-          </a:p>
-          <a:p>
-            <a:pPr algn="ctr">
-              <a:spcBef>
-                <a:spcPts val="0"/>
-              </a:spcBef>
-            </a:pPr>
-            <a:r>
-              <a:rPr sz="1300" b="0" i="0">
+              <a:rPr sz="1600" b="1" i="0">
+                <a:solidFill>
+                  <a:srgbClr val="1F4E79"/>
+                </a:solidFill>
+                <a:latin typeface="Calibri"/>
+              </a:rPr>
+              <a:t>Chemin critique : A → G → H → I → J → S → T → U → V</a:t>
+            </a:r>
+          </a:p>
+          <a:p>
+            <a:pPr algn="l">
+              <a:spcBef>
+                <a:spcPts val="0"/>
+              </a:spcBef>
+            </a:pPr>
+            <a:r>
+              <a:rPr sz="1350" b="0" i="0">
                 <a:solidFill>
                   <a:srgbClr val="404040"/>
                 </a:solidFill>
                 <a:latin typeface="Calibri"/>
               </a:rPr>
-              <a:t>Contrainte respectée</a:t>
-            </a:r>
-          </a:p>
-        </p:txBody>
-      </p:sp>
-      <p:sp>
-        <p:nvSpPr>
-          <p:cNvPr id="11" name="Rounded Rectangle 10"/>
-          <p:cNvSpPr/>
-          <p:nvPr/>
-        </p:nvSpPr>
-        <p:spPr>
-          <a:xfrm>
-            <a:off x="8732520" y="3657600"/>
-            <a:ext cx="2971800" cy="2377440"/>
-          </a:xfrm>
-          <a:prstGeom prst="roundRect">
-            <a:avLst/>
-          </a:prstGeom>
-          <a:solidFill>
-            <a:srgbClr val="FDECEA"/>
-          </a:solidFill>
-          <a:ln>
-            <a:noFill/>
-          </a:ln>
-          <a:effectLst/>
-        </p:spPr>
-        <p:style>
-          <a:lnRef idx="1">
-            <a:schemeClr val="accent1"/>
-          </a:lnRef>
-          <a:fillRef idx="3">
-            <a:schemeClr val="accent1"/>
-          </a:fillRef>
-          <a:effectRef idx="2">
-            <a:schemeClr val="accent1"/>
-          </a:effectRef>
-          <a:fontRef idx="minor">
-            <a:schemeClr val="lt1"/>
-          </a:fontRef>
-        </p:style>
-        <p:txBody>
-          <a:bodyPr rtlCol="0" anchor="ctr"/>
-          <a:lstStyle/>
-          <a:p>
-            <a:pPr algn="ctr"/>
-          </a:p>
-        </p:txBody>
-      </p:sp>
-      <p:sp>
-        <p:nvSpPr>
-          <p:cNvPr id="12" name="TextBox 11"/>
-          <p:cNvSpPr txBox="1"/>
-          <p:nvPr/>
-        </p:nvSpPr>
-        <p:spPr>
-          <a:xfrm>
-            <a:off x="8869680" y="3822191"/>
-            <a:ext cx="2697480" cy="2103120"/>
-          </a:xfrm>
-          <a:prstGeom prst="rect">
-            <a:avLst/>
-          </a:prstGeom>
-          <a:noFill/>
-        </p:spPr>
-        <p:txBody>
-          <a:bodyPr wrap="square" anchor="t" lIns="0" rIns="0" tIns="0" bIns="0">
-            <a:spAutoFit/>
-          </a:bodyPr>
-          <a:lstStyle/>
-          <a:p>
-            <a:pPr algn="ctr">
-              <a:spcBef>
-                <a:spcPts val="0"/>
-              </a:spcBef>
-              <a:spcAft>
-                <a:spcPts val="600"/>
-              </a:spcAft>
-            </a:pPr>
-            <a:r>
-              <a:rPr sz="1400" b="1" i="0">
-                <a:solidFill>
-                  <a:srgbClr val="C0392B"/>
-                </a:solidFill>
-                <a:latin typeface="Calibri"/>
-              </a:rPr>
-              <a:t>Le point d’alerte</a:t>
-            </a:r>
-          </a:p>
-          <a:p>
-            <a:pPr algn="ctr">
-              <a:spcBef>
-                <a:spcPts val="0"/>
-              </a:spcBef>
-            </a:pPr>
-            <a:r>
-              <a:rPr sz="1350" b="0" i="0">
-                <a:solidFill>
-                  <a:srgbClr val="404040"/>
-                </a:solidFill>
-                <a:latin typeface="Calibri"/>
-              </a:rPr>
-              <a:t>Zéro marge sur le chemin critique. Le moindre retard repousse la fin de phase.</a:t>
+              <a:t>Tâche la plus risquée : H « fabrication des pièces » (14 jours, aucune marge).</a:t>
             </a:r>
           </a:p>
         </p:txBody>
@@ -9592,7 +10607,7 @@
         </p:nvSpPr>
         <p:spPr>
           <a:xfrm>
-            <a:off x="502920" y="146304"/>
+            <a:off x="502920" y="164592"/>
             <a:ext cx="10515600" cy="320040"/>
           </a:xfrm>
           <a:prstGeom prst="rect">
@@ -9618,7 +10633,7 @@
                 </a:solidFill>
                 <a:latin typeface="Calibri"/>
               </a:rPr>
-              <a:t>LIVRABLE 4</a:t>
+              <a:t>4 · PLANNING</a:t>
             </a:r>
           </a:p>
         </p:txBody>
@@ -9631,7 +10646,7 @@
         </p:nvSpPr>
         <p:spPr>
           <a:xfrm>
-            <a:off x="502920" y="411480"/>
+            <a:off x="502920" y="420624"/>
             <a:ext cx="11155680" cy="640080"/>
           </a:xfrm>
           <a:prstGeom prst="rect">
@@ -9657,7 +10672,7 @@
                 </a:solidFill>
                 <a:latin typeface="Calibri"/>
               </a:rPr>
-              <a:t>Budget — synthèse</a:t>
+              <a:t>Gantt et vérification du délai</a:t>
             </a:r>
           </a:p>
         </p:txBody>
@@ -9696,7 +10711,7 @@
                 </a:solidFill>
                 <a:latin typeface="Calibri"/>
               </a:rPr>
-              <a:t>Projet GREMLIN — Soutenance</a:t>
+              <a:t>Projet GREMLIN — Phase de préparation</a:t>
             </a:r>
           </a:p>
         </p:txBody>
@@ -9735,27 +10750,51 @@
                 </a:solidFill>
                 <a:latin typeface="Calibri"/>
               </a:rPr>
-              <a:t>8</a:t>
-            </a:r>
-          </a:p>
-        </p:txBody>
-      </p:sp>
-      <p:sp>
-        <p:nvSpPr>
-          <p:cNvPr id="8" name="Rectangle 7"/>
+              <a:t>7</a:t>
+            </a:r>
+          </a:p>
+        </p:txBody>
+      </p:sp>
+      <p:pic>
+        <p:nvPicPr>
+          <p:cNvPr id="8" name="Picture 7" descr="gantt.png"/>
+          <p:cNvPicPr>
+            <a:picLocks noChangeAspect="1"/>
+          </p:cNvPicPr>
+          <p:nvPr/>
+        </p:nvPicPr>
+        <p:blipFill>
+          <a:blip r:embed="rId2"/>
+          <a:stretch>
+            <a:fillRect/>
+          </a:stretch>
+        </p:blipFill>
+        <p:spPr>
+          <a:xfrm>
+            <a:off x="3141192" y="1371600"/>
+            <a:ext cx="5909310" cy="4297680"/>
+          </a:xfrm>
+          <a:prstGeom prst="rect">
+            <a:avLst/>
+          </a:prstGeom>
+        </p:spPr>
+      </p:pic>
+      <p:sp>
+        <p:nvSpPr>
+          <p:cNvPr id="9" name="Rounded Rectangle 8"/>
           <p:cNvSpPr/>
           <p:nvPr/>
         </p:nvSpPr>
         <p:spPr>
           <a:xfrm>
-            <a:off x="548640" y="1600200"/>
-            <a:ext cx="6766560" cy="566928"/>
-          </a:xfrm>
-          <a:prstGeom prst="rect">
+            <a:off x="8732520" y="1463040"/>
+            <a:ext cx="2971800" cy="2011680"/>
+          </a:xfrm>
+          <a:prstGeom prst="roundRect">
             <a:avLst/>
           </a:prstGeom>
           <a:solidFill>
-            <a:srgbClr val="EAF1F8"/>
+            <a:srgbClr val="E8F5E9"/>
           </a:solidFill>
           <a:ln>
             <a:noFill/>
@@ -9786,338 +10825,93 @@
       </p:sp>
       <p:sp>
         <p:nvSpPr>
-          <p:cNvPr id="9" name="TextBox 8"/>
-          <p:cNvSpPr txBox="1"/>
-          <p:nvPr/>
-        </p:nvSpPr>
-        <p:spPr>
-          <a:xfrm>
-            <a:off x="731520" y="1691640"/>
-            <a:ext cx="4937760" cy="457200"/>
-          </a:xfrm>
-          <a:prstGeom prst="rect">
-            <a:avLst/>
-          </a:prstGeom>
-          <a:noFill/>
-        </p:spPr>
-        <p:txBody>
-          <a:bodyPr wrap="square" anchor="t" lIns="0" rIns="0" tIns="0" bIns="0">
-            <a:spAutoFit/>
-          </a:bodyPr>
-          <a:lstStyle/>
-          <a:p>
-            <a:pPr algn="l">
-              <a:spcBef>
-                <a:spcPts val="0"/>
-              </a:spcBef>
-            </a:pPr>
-            <a:r>
-              <a:rPr sz="1400" b="0" i="0">
+          <p:cNvPr id="10" name="TextBox 9"/>
+          <p:cNvSpPr txBox="1"/>
+          <p:nvPr/>
+        </p:nvSpPr>
+        <p:spPr>
+          <a:xfrm>
+            <a:off x="8869680" y="1627632"/>
+            <a:ext cx="2697480" cy="1828800"/>
+          </a:xfrm>
+          <a:prstGeom prst="rect">
+            <a:avLst/>
+          </a:prstGeom>
+          <a:noFill/>
+        </p:spPr>
+        <p:txBody>
+          <a:bodyPr wrap="square" anchor="t" lIns="0" rIns="0" tIns="0" bIns="0">
+            <a:spAutoFit/>
+          </a:bodyPr>
+          <a:lstStyle/>
+          <a:p>
+            <a:pPr algn="ctr">
+              <a:spcBef>
+                <a:spcPts val="0"/>
+              </a:spcBef>
+              <a:spcAft>
+                <a:spcPts val="400"/>
+              </a:spcAft>
+            </a:pPr>
+            <a:r>
+              <a:rPr sz="1300" b="1" i="0">
+                <a:solidFill>
+                  <a:srgbClr val="2E7D32"/>
+                </a:solidFill>
+                <a:latin typeface="Calibri"/>
+              </a:rPr>
+              <a:t>DÉLAI</a:t>
+            </a:r>
+          </a:p>
+          <a:p>
+            <a:pPr algn="ctr">
+              <a:spcBef>
+                <a:spcPts val="0"/>
+              </a:spcBef>
+              <a:spcAft>
+                <a:spcPts val="400"/>
+              </a:spcAft>
+            </a:pPr>
+            <a:r>
+              <a:rPr sz="3000" b="1" i="0">
+                <a:solidFill>
+                  <a:srgbClr val="2E7D32"/>
+                </a:solidFill>
+                <a:latin typeface="Calibri"/>
+              </a:rPr>
+              <a:t>45 / 45 j</a:t>
+            </a:r>
+          </a:p>
+          <a:p>
+            <a:pPr algn="ctr">
+              <a:spcBef>
+                <a:spcPts val="0"/>
+              </a:spcBef>
+            </a:pPr>
+            <a:r>
+              <a:rPr sz="1300" b="0" i="0">
                 <a:solidFill>
                   <a:srgbClr val="404040"/>
                 </a:solidFill>
                 <a:latin typeface="Calibri"/>
               </a:rPr>
-              <a:t>Main-d’œuvre (Ing. + Tech. + Ach. + Ouv.)</a:t>
-            </a:r>
-          </a:p>
-        </p:txBody>
-      </p:sp>
-      <p:sp>
-        <p:nvSpPr>
-          <p:cNvPr id="10" name="TextBox 9"/>
-          <p:cNvSpPr txBox="1"/>
-          <p:nvPr/>
-        </p:nvSpPr>
-        <p:spPr>
-          <a:xfrm>
-            <a:off x="5486400" y="1691640"/>
-            <a:ext cx="1691640" cy="457200"/>
-          </a:xfrm>
-          <a:prstGeom prst="rect">
-            <a:avLst/>
-          </a:prstGeom>
-          <a:noFill/>
-        </p:spPr>
-        <p:txBody>
-          <a:bodyPr wrap="square" anchor="t" lIns="0" rIns="0" tIns="0" bIns="0">
-            <a:spAutoFit/>
-          </a:bodyPr>
-          <a:lstStyle/>
-          <a:p>
-            <a:pPr algn="r">
-              <a:spcBef>
-                <a:spcPts val="0"/>
-              </a:spcBef>
-            </a:pPr>
-            <a:r>
-              <a:rPr sz="1400" b="0" i="0">
-                <a:solidFill>
-                  <a:srgbClr val="404040"/>
-                </a:solidFill>
-                <a:latin typeface="Calibri"/>
-              </a:rPr>
-              <a:t>41 796 €</a:t>
-            </a:r>
-          </a:p>
-        </p:txBody>
-      </p:sp>
-      <p:sp>
-        <p:nvSpPr>
-          <p:cNvPr id="11" name="Rectangle 10"/>
+              <a:t>Contrainte respectée</a:t>
+            </a:r>
+          </a:p>
+        </p:txBody>
+      </p:sp>
+      <p:sp>
+        <p:nvSpPr>
+          <p:cNvPr id="11" name="Rounded Rectangle 10"/>
           <p:cNvSpPr/>
           <p:nvPr/>
         </p:nvSpPr>
         <p:spPr>
           <a:xfrm>
-            <a:off x="548640" y="2167128"/>
-            <a:ext cx="6766560" cy="566928"/>
-          </a:xfrm>
-          <a:prstGeom prst="rect">
-            <a:avLst/>
-          </a:prstGeom>
-          <a:solidFill>
-            <a:srgbClr val="FFFFFF"/>
-          </a:solidFill>
-          <a:ln>
-            <a:noFill/>
-          </a:ln>
-          <a:effectLst/>
-        </p:spPr>
-        <p:style>
-          <a:lnRef idx="1">
-            <a:schemeClr val="accent1"/>
-          </a:lnRef>
-          <a:fillRef idx="3">
-            <a:schemeClr val="accent1"/>
-          </a:fillRef>
-          <a:effectRef idx="2">
-            <a:schemeClr val="accent1"/>
-          </a:effectRef>
-          <a:fontRef idx="minor">
-            <a:schemeClr val="lt1"/>
-          </a:fontRef>
-        </p:style>
-        <p:txBody>
-          <a:bodyPr rtlCol="0" anchor="ctr"/>
-          <a:lstStyle/>
-          <a:p>
-            <a:pPr algn="ctr"/>
-          </a:p>
-        </p:txBody>
-      </p:sp>
-      <p:sp>
-        <p:nvSpPr>
-          <p:cNvPr id="12" name="TextBox 11"/>
-          <p:cNvSpPr txBox="1"/>
-          <p:nvPr/>
-        </p:nvSpPr>
-        <p:spPr>
-          <a:xfrm>
-            <a:off x="731520" y="2258568"/>
-            <a:ext cx="4937760" cy="457200"/>
-          </a:xfrm>
-          <a:prstGeom prst="rect">
-            <a:avLst/>
-          </a:prstGeom>
-          <a:noFill/>
-        </p:spPr>
-        <p:txBody>
-          <a:bodyPr wrap="square" anchor="t" lIns="0" rIns="0" tIns="0" bIns="0">
-            <a:spAutoFit/>
-          </a:bodyPr>
-          <a:lstStyle/>
-          <a:p>
-            <a:pPr algn="l">
-              <a:spcBef>
-                <a:spcPts val="0"/>
-              </a:spcBef>
-            </a:pPr>
-            <a:r>
-              <a:rPr sz="1400" b="0" i="0">
-                <a:solidFill>
-                  <a:srgbClr val="404040"/>
-                </a:solidFill>
-                <a:latin typeface="Calibri"/>
-              </a:rPr>
-              <a:t>Fabrication des pièces (atelier)</a:t>
-            </a:r>
-          </a:p>
-        </p:txBody>
-      </p:sp>
-      <p:sp>
-        <p:nvSpPr>
-          <p:cNvPr id="13" name="TextBox 12"/>
-          <p:cNvSpPr txBox="1"/>
-          <p:nvPr/>
-        </p:nvSpPr>
-        <p:spPr>
-          <a:xfrm>
-            <a:off x="5486400" y="2258568"/>
-            <a:ext cx="1691640" cy="457200"/>
-          </a:xfrm>
-          <a:prstGeom prst="rect">
-            <a:avLst/>
-          </a:prstGeom>
-          <a:noFill/>
-        </p:spPr>
-        <p:txBody>
-          <a:bodyPr wrap="square" anchor="t" lIns="0" rIns="0" tIns="0" bIns="0">
-            <a:spAutoFit/>
-          </a:bodyPr>
-          <a:lstStyle/>
-          <a:p>
-            <a:pPr algn="r">
-              <a:spcBef>
-                <a:spcPts val="0"/>
-              </a:spcBef>
-            </a:pPr>
-            <a:r>
-              <a:rPr sz="1400" b="0" i="0">
-                <a:solidFill>
-                  <a:srgbClr val="404040"/>
-                </a:solidFill>
-                <a:latin typeface="Calibri"/>
-              </a:rPr>
-              <a:t>2 940 €</a:t>
-            </a:r>
-          </a:p>
-        </p:txBody>
-      </p:sp>
-      <p:sp>
-        <p:nvSpPr>
-          <p:cNvPr id="14" name="Rectangle 13"/>
-          <p:cNvSpPr/>
-          <p:nvPr/>
-        </p:nvSpPr>
-        <p:spPr>
-          <a:xfrm>
-            <a:off x="548640" y="2734056"/>
-            <a:ext cx="6766560" cy="566928"/>
-          </a:xfrm>
-          <a:prstGeom prst="rect">
-            <a:avLst/>
-          </a:prstGeom>
-          <a:solidFill>
-            <a:srgbClr val="EAF1F8"/>
-          </a:solidFill>
-          <a:ln>
-            <a:noFill/>
-          </a:ln>
-          <a:effectLst/>
-        </p:spPr>
-        <p:style>
-          <a:lnRef idx="1">
-            <a:schemeClr val="accent1"/>
-          </a:lnRef>
-          <a:fillRef idx="3">
-            <a:schemeClr val="accent1"/>
-          </a:fillRef>
-          <a:effectRef idx="2">
-            <a:schemeClr val="accent1"/>
-          </a:effectRef>
-          <a:fontRef idx="minor">
-            <a:schemeClr val="lt1"/>
-          </a:fontRef>
-        </p:style>
-        <p:txBody>
-          <a:bodyPr rtlCol="0" anchor="ctr"/>
-          <a:lstStyle/>
-          <a:p>
-            <a:pPr algn="ctr"/>
-          </a:p>
-        </p:txBody>
-      </p:sp>
-      <p:sp>
-        <p:nvSpPr>
-          <p:cNvPr id="15" name="TextBox 14"/>
-          <p:cNvSpPr txBox="1"/>
-          <p:nvPr/>
-        </p:nvSpPr>
-        <p:spPr>
-          <a:xfrm>
-            <a:off x="731520" y="2825496"/>
-            <a:ext cx="4937760" cy="457200"/>
-          </a:xfrm>
-          <a:prstGeom prst="rect">
-            <a:avLst/>
-          </a:prstGeom>
-          <a:noFill/>
-        </p:spPr>
-        <p:txBody>
-          <a:bodyPr wrap="square" anchor="t" lIns="0" rIns="0" tIns="0" bIns="0">
-            <a:spAutoFit/>
-          </a:bodyPr>
-          <a:lstStyle/>
-          <a:p>
-            <a:pPr algn="l">
-              <a:spcBef>
-                <a:spcPts val="0"/>
-              </a:spcBef>
-            </a:pPr>
-            <a:r>
-              <a:rPr sz="1400" b="0" i="0">
-                <a:solidFill>
-                  <a:srgbClr val="404040"/>
-                </a:solidFill>
-                <a:latin typeface="Calibri"/>
-              </a:rPr>
-              <a:t>Équipements achetés à l’extérieur</a:t>
-            </a:r>
-          </a:p>
-        </p:txBody>
-      </p:sp>
-      <p:sp>
-        <p:nvSpPr>
-          <p:cNvPr id="16" name="TextBox 15"/>
-          <p:cNvSpPr txBox="1"/>
-          <p:nvPr/>
-        </p:nvSpPr>
-        <p:spPr>
-          <a:xfrm>
-            <a:off x="5486400" y="2825496"/>
-            <a:ext cx="1691640" cy="457200"/>
-          </a:xfrm>
-          <a:prstGeom prst="rect">
-            <a:avLst/>
-          </a:prstGeom>
-          <a:noFill/>
-        </p:spPr>
-        <p:txBody>
-          <a:bodyPr wrap="square" anchor="t" lIns="0" rIns="0" tIns="0" bIns="0">
-            <a:spAutoFit/>
-          </a:bodyPr>
-          <a:lstStyle/>
-          <a:p>
-            <a:pPr algn="r">
-              <a:spcBef>
-                <a:spcPts val="0"/>
-              </a:spcBef>
-            </a:pPr>
-            <a:r>
-              <a:rPr sz="1400" b="0" i="0">
-                <a:solidFill>
-                  <a:srgbClr val="404040"/>
-                </a:solidFill>
-                <a:latin typeface="Calibri"/>
-              </a:rPr>
-              <a:t>5 200 €</a:t>
-            </a:r>
-          </a:p>
-        </p:txBody>
-      </p:sp>
-      <p:sp>
-        <p:nvSpPr>
-          <p:cNvPr id="17" name="Rectangle 16"/>
-          <p:cNvSpPr/>
-          <p:nvPr/>
-        </p:nvSpPr>
-        <p:spPr>
-          <a:xfrm>
-            <a:off x="548640" y="3300984"/>
-            <a:ext cx="6766560" cy="566928"/>
-          </a:xfrm>
-          <a:prstGeom prst="rect">
+            <a:off x="8732520" y="3657600"/>
+            <a:ext cx="2971800" cy="2377440"/>
+          </a:xfrm>
+          <a:prstGeom prst="roundRect">
             <a:avLst/>
           </a:prstGeom>
           <a:solidFill>
@@ -10152,258 +10946,14 @@
       </p:sp>
       <p:sp>
         <p:nvSpPr>
-          <p:cNvPr id="18" name="TextBox 17"/>
-          <p:cNvSpPr txBox="1"/>
-          <p:nvPr/>
-        </p:nvSpPr>
-        <p:spPr>
-          <a:xfrm>
-            <a:off x="731520" y="3392424"/>
-            <a:ext cx="4937760" cy="457200"/>
-          </a:xfrm>
-          <a:prstGeom prst="rect">
-            <a:avLst/>
-          </a:prstGeom>
-          <a:noFill/>
-        </p:spPr>
-        <p:txBody>
-          <a:bodyPr wrap="square" anchor="t" lIns="0" rIns="0" tIns="0" bIns="0">
-            <a:spAutoFit/>
-          </a:bodyPr>
-          <a:lstStyle/>
-          <a:p>
-            <a:pPr algn="l">
-              <a:spcBef>
-                <a:spcPts val="0"/>
-              </a:spcBef>
-            </a:pPr>
-            <a:r>
-              <a:rPr sz="1400" b="1" i="0">
-                <a:solidFill>
-                  <a:srgbClr val="1F4E79"/>
-                </a:solidFill>
-                <a:latin typeface="Calibri"/>
-              </a:rPr>
-              <a:t>COÛT TOTAL DE LA PHASE</a:t>
-            </a:r>
-          </a:p>
-        </p:txBody>
-      </p:sp>
-      <p:sp>
-        <p:nvSpPr>
-          <p:cNvPr id="19" name="TextBox 18"/>
-          <p:cNvSpPr txBox="1"/>
-          <p:nvPr/>
-        </p:nvSpPr>
-        <p:spPr>
-          <a:xfrm>
-            <a:off x="5486400" y="3392424"/>
-            <a:ext cx="1691640" cy="457200"/>
-          </a:xfrm>
-          <a:prstGeom prst="rect">
-            <a:avLst/>
-          </a:prstGeom>
-          <a:noFill/>
-        </p:spPr>
-        <p:txBody>
-          <a:bodyPr wrap="square" anchor="t" lIns="0" rIns="0" tIns="0" bIns="0">
-            <a:spAutoFit/>
-          </a:bodyPr>
-          <a:lstStyle/>
-          <a:p>
-            <a:pPr algn="r">
-              <a:spcBef>
-                <a:spcPts val="0"/>
-              </a:spcBef>
-            </a:pPr>
-            <a:r>
-              <a:rPr sz="1400" b="1" i="0">
-                <a:solidFill>
-                  <a:srgbClr val="C0392B"/>
-                </a:solidFill>
-                <a:latin typeface="Calibri"/>
-              </a:rPr>
-              <a:t>49 936 €</a:t>
-            </a:r>
-          </a:p>
-        </p:txBody>
-      </p:sp>
-      <p:sp>
-        <p:nvSpPr>
-          <p:cNvPr id="20" name="Rectangle 19"/>
-          <p:cNvSpPr/>
-          <p:nvPr/>
-        </p:nvSpPr>
-        <p:spPr>
-          <a:xfrm>
-            <a:off x="548640" y="3867912"/>
-            <a:ext cx="6766560" cy="566928"/>
-          </a:xfrm>
-          <a:prstGeom prst="rect">
-            <a:avLst/>
-          </a:prstGeom>
-          <a:solidFill>
-            <a:srgbClr val="EAF1F8"/>
-          </a:solidFill>
-          <a:ln>
-            <a:noFill/>
-          </a:ln>
-          <a:effectLst/>
-        </p:spPr>
-        <p:style>
-          <a:lnRef idx="1">
-            <a:schemeClr val="accent1"/>
-          </a:lnRef>
-          <a:fillRef idx="3">
-            <a:schemeClr val="accent1"/>
-          </a:fillRef>
-          <a:effectRef idx="2">
-            <a:schemeClr val="accent1"/>
-          </a:effectRef>
-          <a:fontRef idx="minor">
-            <a:schemeClr val="lt1"/>
-          </a:fontRef>
-        </p:style>
-        <p:txBody>
-          <a:bodyPr rtlCol="0" anchor="ctr"/>
-          <a:lstStyle/>
-          <a:p>
-            <a:pPr algn="ctr"/>
-          </a:p>
-        </p:txBody>
-      </p:sp>
-      <p:sp>
-        <p:nvSpPr>
-          <p:cNvPr id="21" name="TextBox 20"/>
-          <p:cNvSpPr txBox="1"/>
-          <p:nvPr/>
-        </p:nvSpPr>
-        <p:spPr>
-          <a:xfrm>
-            <a:off x="731520" y="3959352"/>
-            <a:ext cx="4937760" cy="457200"/>
-          </a:xfrm>
-          <a:prstGeom prst="rect">
-            <a:avLst/>
-          </a:prstGeom>
-          <a:noFill/>
-        </p:spPr>
-        <p:txBody>
-          <a:bodyPr wrap="square" anchor="t" lIns="0" rIns="0" tIns="0" bIns="0">
-            <a:spAutoFit/>
-          </a:bodyPr>
-          <a:lstStyle/>
-          <a:p>
-            <a:pPr algn="l">
-              <a:spcBef>
-                <a:spcPts val="0"/>
-              </a:spcBef>
-            </a:pPr>
-            <a:r>
-              <a:rPr sz="1400" b="0" i="0">
-                <a:solidFill>
-                  <a:srgbClr val="404040"/>
-                </a:solidFill>
-                <a:latin typeface="Calibri"/>
-              </a:rPr>
-              <a:t>Enveloppe allouée</a:t>
-            </a:r>
-          </a:p>
-        </p:txBody>
-      </p:sp>
-      <p:sp>
-        <p:nvSpPr>
-          <p:cNvPr id="22" name="TextBox 21"/>
-          <p:cNvSpPr txBox="1"/>
-          <p:nvPr/>
-        </p:nvSpPr>
-        <p:spPr>
-          <a:xfrm>
-            <a:off x="5486400" y="3959352"/>
-            <a:ext cx="1691640" cy="457200"/>
-          </a:xfrm>
-          <a:prstGeom prst="rect">
-            <a:avLst/>
-          </a:prstGeom>
-          <a:noFill/>
-        </p:spPr>
-        <p:txBody>
-          <a:bodyPr wrap="square" anchor="t" lIns="0" rIns="0" tIns="0" bIns="0">
-            <a:spAutoFit/>
-          </a:bodyPr>
-          <a:lstStyle/>
-          <a:p>
-            <a:pPr algn="r">
-              <a:spcBef>
-                <a:spcPts val="0"/>
-              </a:spcBef>
-            </a:pPr>
-            <a:r>
-              <a:rPr sz="1400" b="0" i="0">
-                <a:solidFill>
-                  <a:srgbClr val="404040"/>
-                </a:solidFill>
-                <a:latin typeface="Calibri"/>
-              </a:rPr>
-              <a:t>48 500 €</a:t>
-            </a:r>
-          </a:p>
-        </p:txBody>
-      </p:sp>
-      <p:sp>
-        <p:nvSpPr>
-          <p:cNvPr id="23" name="Rounded Rectangle 22"/>
-          <p:cNvSpPr/>
-          <p:nvPr/>
-        </p:nvSpPr>
-        <p:spPr>
-          <a:xfrm>
-            <a:off x="7589520" y="1600200"/>
-            <a:ext cx="4069080" cy="2194560"/>
-          </a:xfrm>
-          <a:prstGeom prst="roundRect">
-            <a:avLst/>
-          </a:prstGeom>
-          <a:solidFill>
-            <a:srgbClr val="FDECEA"/>
-          </a:solidFill>
-          <a:ln>
-            <a:noFill/>
-          </a:ln>
-          <a:effectLst/>
-        </p:spPr>
-        <p:style>
-          <a:lnRef idx="1">
-            <a:schemeClr val="accent1"/>
-          </a:lnRef>
-          <a:fillRef idx="3">
-            <a:schemeClr val="accent1"/>
-          </a:fillRef>
-          <a:effectRef idx="2">
-            <a:schemeClr val="accent1"/>
-          </a:effectRef>
-          <a:fontRef idx="minor">
-            <a:schemeClr val="lt1"/>
-          </a:fontRef>
-        </p:style>
-        <p:txBody>
-          <a:bodyPr rtlCol="0" anchor="ctr"/>
-          <a:lstStyle/>
-          <a:p>
-            <a:pPr algn="ctr"/>
-          </a:p>
-        </p:txBody>
-      </p:sp>
-      <p:sp>
-        <p:nvSpPr>
-          <p:cNvPr id="24" name="TextBox 23"/>
-          <p:cNvSpPr txBox="1"/>
-          <p:nvPr/>
-        </p:nvSpPr>
-        <p:spPr>
-          <a:xfrm>
-            <a:off x="7772400" y="1783080"/>
-            <a:ext cx="3703320" cy="1920240"/>
+          <p:cNvPr id="12" name="TextBox 11"/>
+          <p:cNvSpPr txBox="1"/>
+          <p:nvPr/>
+        </p:nvSpPr>
+        <p:spPr>
+          <a:xfrm>
+            <a:off x="8869680" y="3840480"/>
+            <a:ext cx="2697480" cy="2103120"/>
           </a:xfrm>
           <a:prstGeom prst="rect">
             <a:avLst/>
@@ -10417,83 +10967,6 @@
           <a:lstStyle/>
           <a:p>
             <a:pPr algn="ctr">
-              <a:spcBef>
-                <a:spcPts val="0"/>
-              </a:spcBef>
-              <a:spcAft>
-                <a:spcPts val="400"/>
-              </a:spcAft>
-            </a:pPr>
-            <a:r>
-              <a:rPr sz="1400" b="1" i="0">
-                <a:solidFill>
-                  <a:srgbClr val="C0392B"/>
-                </a:solidFill>
-                <a:latin typeface="Calibri"/>
-              </a:rPr>
-              <a:t>ÉCART</a:t>
-            </a:r>
-          </a:p>
-          <a:p>
-            <a:pPr algn="ctr">
-              <a:spcBef>
-                <a:spcPts val="0"/>
-              </a:spcBef>
-              <a:spcAft>
-                <a:spcPts val="400"/>
-              </a:spcAft>
-            </a:pPr>
-            <a:r>
-              <a:rPr sz="3400" b="1" i="0">
-                <a:solidFill>
-                  <a:srgbClr val="C0392B"/>
-                </a:solidFill>
-                <a:latin typeface="Calibri"/>
-              </a:rPr>
-              <a:t>+ 1 436 €</a:t>
-            </a:r>
-          </a:p>
-          <a:p>
-            <a:pPr algn="ctr">
-              <a:spcBef>
-                <a:spcPts val="0"/>
-              </a:spcBef>
-            </a:pPr>
-            <a:r>
-              <a:rPr sz="1350" b="0" i="0">
-                <a:solidFill>
-                  <a:srgbClr val="404040"/>
-                </a:solidFill>
-                <a:latin typeface="Calibri"/>
-              </a:rPr>
-              <a:t>Dépassement ≈ 3 % : la phase est légèrement déficitaire.</a:t>
-            </a:r>
-          </a:p>
-        </p:txBody>
-      </p:sp>
-      <p:sp>
-        <p:nvSpPr>
-          <p:cNvPr id="25" name="TextBox 24"/>
-          <p:cNvSpPr txBox="1"/>
-          <p:nvPr/>
-        </p:nvSpPr>
-        <p:spPr>
-          <a:xfrm>
-            <a:off x="7589520" y="4069080"/>
-            <a:ext cx="4069080" cy="2103120"/>
-          </a:xfrm>
-          <a:prstGeom prst="rect">
-            <a:avLst/>
-          </a:prstGeom>
-          <a:noFill/>
-        </p:spPr>
-        <p:txBody>
-          <a:bodyPr wrap="square" anchor="t" lIns="0" rIns="0" tIns="0" bIns="0">
-            <a:spAutoFit/>
-          </a:bodyPr>
-          <a:lstStyle/>
-          <a:p>
-            <a:pPr algn="l">
               <a:spcBef>
                 <a:spcPts val="0"/>
               </a:spcBef>
@@ -10502,93 +10975,29 @@
               </a:spcAft>
             </a:pPr>
             <a:r>
-              <a:rPr sz="1450" b="1" i="0">
-                <a:solidFill>
-                  <a:srgbClr val="1F4E79"/>
-                </a:solidFill>
-                <a:latin typeface="Calibri"/>
-              </a:rPr>
-              <a:t>Pistes de retour à l’équilibre</a:t>
-            </a:r>
-          </a:p>
-        </p:txBody>
-      </p:sp>
-      <p:sp>
-        <p:nvSpPr>
-          <p:cNvPr id="26" name="TextBox 25"/>
-          <p:cNvSpPr txBox="1"/>
-          <p:nvPr/>
-        </p:nvSpPr>
-        <p:spPr>
-          <a:xfrm>
-            <a:off x="7589520" y="4526280"/>
-            <a:ext cx="4114800" cy="1828800"/>
-          </a:xfrm>
-          <a:prstGeom prst="rect">
-            <a:avLst/>
-          </a:prstGeom>
-          <a:noFill/>
-        </p:spPr>
-        <p:txBody>
-          <a:bodyPr wrap="square" anchor="t" lIns="0" rIns="0" tIns="0" bIns="0">
-            <a:spAutoFit/>
-          </a:bodyPr>
-          <a:lstStyle/>
-          <a:p>
-            <a:pPr algn="l">
-              <a:spcBef>
-                <a:spcPts val="0"/>
-              </a:spcBef>
-              <a:spcAft>
-                <a:spcPts val="600"/>
-              </a:spcAft>
-            </a:pPr>
-            <a:r>
-              <a:rPr sz="1300" b="0" i="0">
+              <a:rPr sz="1400" b="1" i="0">
+                <a:solidFill>
+                  <a:srgbClr val="C0392B"/>
+                </a:solidFill>
+                <a:latin typeface="Calibri"/>
+              </a:rPr>
+              <a:t>Le point d’alerte</a:t>
+            </a:r>
+          </a:p>
+          <a:p>
+            <a:pPr algn="ctr">
+              <a:spcBef>
+                <a:spcPts val="0"/>
+              </a:spcBef>
+            </a:pPr>
+            <a:r>
+              <a:rPr sz="1350" b="0" i="0">
                 <a:solidFill>
                   <a:srgbClr val="404040"/>
                 </a:solidFill>
                 <a:latin typeface="Calibri"/>
               </a:rPr>
-              <a:t>•  Alléger les grosses tâches ouvrier (S, F, J).</a:t>
-            </a:r>
-          </a:p>
-          <a:p>
-            <a:pPr algn="l">
-              <a:spcBef>
-                <a:spcPts val="0"/>
-              </a:spcBef>
-              <a:spcAft>
-                <a:spcPts val="600"/>
-              </a:spcAft>
-            </a:pPr>
-            <a:r>
-              <a:rPr sz="1300" b="0" i="0">
-                <a:solidFill>
-                  <a:srgbClr val="404040"/>
-                </a:solidFill>
-                <a:latin typeface="Calibri"/>
-              </a:rPr>
-              <a:t>•  Renégocier équipements / devis atelier.</a:t>
-            </a:r>
-          </a:p>
-          <a:p>
-            <a:pPr algn="l">
-              <a:spcBef>
-                <a:spcPts val="0"/>
-              </a:spcBef>
-              <a:spcAft>
-                <a:spcPts val="600"/>
-              </a:spcAft>
-            </a:pPr>
-            <a:r>
-              <a:rPr sz="1300" b="0" i="0">
-                <a:solidFill>
-                  <a:srgbClr val="404040"/>
-                </a:solidFill>
-                <a:latin typeface="Calibri"/>
-              </a:rPr>
-              <a:t>•  Basculer des heures ingénieur vers technicien.</a:t>
+              <a:t>Zéro marge sur le chemin critique : le moindre retard décale la fin de phase.</a:t>
             </a:r>
           </a:p>
         </p:txBody>
@@ -10715,7 +11124,7 @@
         </p:nvSpPr>
         <p:spPr>
           <a:xfrm>
-            <a:off x="502920" y="146304"/>
+            <a:off x="502920" y="164592"/>
             <a:ext cx="10515600" cy="320040"/>
           </a:xfrm>
           <a:prstGeom prst="rect">
@@ -10741,7 +11150,7 @@
                 </a:solidFill>
                 <a:latin typeface="Calibri"/>
               </a:rPr>
-              <a:t>LIVRABLE 4</a:t>
+              <a:t>5 · BUDGET</a:t>
             </a:r>
           </a:p>
         </p:txBody>
@@ -10754,7 +11163,7 @@
         </p:nvSpPr>
         <p:spPr>
           <a:xfrm>
-            <a:off x="502920" y="411480"/>
+            <a:off x="502920" y="420624"/>
             <a:ext cx="11155680" cy="640080"/>
           </a:xfrm>
           <a:prstGeom prst="rect">
@@ -10780,7 +11189,7 @@
                 </a:solidFill>
                 <a:latin typeface="Calibri"/>
               </a:rPr>
-              <a:t>Budget — courbe en « S »</a:t>
+              <a:t>Coût de la phase</a:t>
             </a:r>
           </a:p>
         </p:txBody>
@@ -10819,7 +11228,7 @@
                 </a:solidFill>
                 <a:latin typeface="Calibri"/>
               </a:rPr>
-              <a:t>Projet GREMLIN — Soutenance</a:t>
+              <a:t>Projet GREMLIN — Phase de préparation</a:t>
             </a:r>
           </a:p>
         </p:txBody>
@@ -10858,21 +11267,65 @@
                 </a:solidFill>
                 <a:latin typeface="Calibri"/>
               </a:rPr>
-              <a:t>9</a:t>
-            </a:r>
-          </a:p>
-        </p:txBody>
-      </p:sp>
-      <p:sp>
-        <p:nvSpPr>
-          <p:cNvPr id="8" name="TextBox 7"/>
-          <p:cNvSpPr txBox="1"/>
-          <p:nvPr/>
-        </p:nvSpPr>
-        <p:spPr>
-          <a:xfrm>
-            <a:off x="548640" y="1371600"/>
-            <a:ext cx="11064240" cy="548640"/>
+              <a:t>8</a:t>
+            </a:r>
+          </a:p>
+        </p:txBody>
+      </p:sp>
+      <p:sp>
+        <p:nvSpPr>
+          <p:cNvPr id="8" name="Rectangle 7"/>
+          <p:cNvSpPr/>
+          <p:nvPr/>
+        </p:nvSpPr>
+        <p:spPr>
+          <a:xfrm>
+            <a:off x="548640" y="1645920"/>
+            <a:ext cx="6766560" cy="566928"/>
+          </a:xfrm>
+          <a:prstGeom prst="rect">
+            <a:avLst/>
+          </a:prstGeom>
+          <a:solidFill>
+            <a:srgbClr val="EAF1F8"/>
+          </a:solidFill>
+          <a:ln>
+            <a:noFill/>
+          </a:ln>
+          <a:effectLst/>
+        </p:spPr>
+        <p:style>
+          <a:lnRef idx="1">
+            <a:schemeClr val="accent1"/>
+          </a:lnRef>
+          <a:fillRef idx="3">
+            <a:schemeClr val="accent1"/>
+          </a:fillRef>
+          <a:effectRef idx="2">
+            <a:schemeClr val="accent1"/>
+          </a:effectRef>
+          <a:fontRef idx="minor">
+            <a:schemeClr val="lt1"/>
+          </a:fontRef>
+        </p:style>
+        <p:txBody>
+          <a:bodyPr rtlCol="0" anchor="ctr"/>
+          <a:lstStyle/>
+          <a:p>
+            <a:pPr algn="ctr"/>
+          </a:p>
+        </p:txBody>
+      </p:sp>
+      <p:sp>
+        <p:nvSpPr>
+          <p:cNvPr id="9" name="TextBox 8"/>
+          <p:cNvSpPr txBox="1"/>
+          <p:nvPr/>
+        </p:nvSpPr>
+        <p:spPr>
+          <a:xfrm>
+            <a:off x="731520" y="1737360"/>
+            <a:ext cx="4937760" cy="457200"/>
           </a:xfrm>
           <a:prstGeom prst="rect">
             <a:avLst/>
@@ -10891,41 +11344,784 @@
               </a:spcBef>
             </a:pPr>
             <a:r>
-              <a:rPr sz="1550" b="0" i="0">
+              <a:rPr sz="1400" b="0" i="0">
                 <a:solidFill>
                   <a:srgbClr val="404040"/>
                 </a:solidFill>
                 <a:latin typeface="Calibri"/>
               </a:rPr>
-              <a:t>Dépenses cumulées au fil du planning. La courbe franchit l’enveloppe en toute fin de phase : c’est le dépassement de 1 436 €.</a:t>
-            </a:r>
-          </a:p>
-        </p:txBody>
-      </p:sp>
-      <p:pic>
-        <p:nvPicPr>
-          <p:cNvPr id="9" name="Picture 8" descr="courbe_s.png"/>
-          <p:cNvPicPr>
-            <a:picLocks noChangeAspect="1"/>
-          </p:cNvPicPr>
-          <p:nvPr/>
-        </p:nvPicPr>
-        <p:blipFill>
-          <a:blip r:embed="rId2"/>
-          <a:stretch>
-            <a:fillRect/>
-          </a:stretch>
-        </p:blipFill>
-        <p:spPr>
-          <a:xfrm>
-            <a:off x="2514447" y="1965960"/>
-            <a:ext cx="7162800" cy="4297680"/>
-          </a:xfrm>
-          <a:prstGeom prst="rect">
-            <a:avLst/>
-          </a:prstGeom>
-        </p:spPr>
-      </p:pic>
+              <a:t>Main-d’œuvre (Ing. + Tech. + Ach. + Ouv.)</a:t>
+            </a:r>
+          </a:p>
+        </p:txBody>
+      </p:sp>
+      <p:sp>
+        <p:nvSpPr>
+          <p:cNvPr id="10" name="TextBox 9"/>
+          <p:cNvSpPr txBox="1"/>
+          <p:nvPr/>
+        </p:nvSpPr>
+        <p:spPr>
+          <a:xfrm>
+            <a:off x="5486400" y="1737360"/>
+            <a:ext cx="1691640" cy="457200"/>
+          </a:xfrm>
+          <a:prstGeom prst="rect">
+            <a:avLst/>
+          </a:prstGeom>
+          <a:noFill/>
+        </p:spPr>
+        <p:txBody>
+          <a:bodyPr wrap="square" anchor="t" lIns="0" rIns="0" tIns="0" bIns="0">
+            <a:spAutoFit/>
+          </a:bodyPr>
+          <a:lstStyle/>
+          <a:p>
+            <a:pPr algn="r">
+              <a:spcBef>
+                <a:spcPts val="0"/>
+              </a:spcBef>
+            </a:pPr>
+            <a:r>
+              <a:rPr sz="1400" b="0" i="0">
+                <a:solidFill>
+                  <a:srgbClr val="404040"/>
+                </a:solidFill>
+                <a:latin typeface="Calibri"/>
+              </a:rPr>
+              <a:t>41 796 €</a:t>
+            </a:r>
+          </a:p>
+        </p:txBody>
+      </p:sp>
+      <p:sp>
+        <p:nvSpPr>
+          <p:cNvPr id="11" name="Rectangle 10"/>
+          <p:cNvSpPr/>
+          <p:nvPr/>
+        </p:nvSpPr>
+        <p:spPr>
+          <a:xfrm>
+            <a:off x="548640" y="2212848"/>
+            <a:ext cx="6766560" cy="566928"/>
+          </a:xfrm>
+          <a:prstGeom prst="rect">
+            <a:avLst/>
+          </a:prstGeom>
+          <a:solidFill>
+            <a:srgbClr val="FFFFFF"/>
+          </a:solidFill>
+          <a:ln>
+            <a:noFill/>
+          </a:ln>
+          <a:effectLst/>
+        </p:spPr>
+        <p:style>
+          <a:lnRef idx="1">
+            <a:schemeClr val="accent1"/>
+          </a:lnRef>
+          <a:fillRef idx="3">
+            <a:schemeClr val="accent1"/>
+          </a:fillRef>
+          <a:effectRef idx="2">
+            <a:schemeClr val="accent1"/>
+          </a:effectRef>
+          <a:fontRef idx="minor">
+            <a:schemeClr val="lt1"/>
+          </a:fontRef>
+        </p:style>
+        <p:txBody>
+          <a:bodyPr rtlCol="0" anchor="ctr"/>
+          <a:lstStyle/>
+          <a:p>
+            <a:pPr algn="ctr"/>
+          </a:p>
+        </p:txBody>
+      </p:sp>
+      <p:sp>
+        <p:nvSpPr>
+          <p:cNvPr id="12" name="TextBox 11"/>
+          <p:cNvSpPr txBox="1"/>
+          <p:nvPr/>
+        </p:nvSpPr>
+        <p:spPr>
+          <a:xfrm>
+            <a:off x="731520" y="2304288"/>
+            <a:ext cx="4937760" cy="457200"/>
+          </a:xfrm>
+          <a:prstGeom prst="rect">
+            <a:avLst/>
+          </a:prstGeom>
+          <a:noFill/>
+        </p:spPr>
+        <p:txBody>
+          <a:bodyPr wrap="square" anchor="t" lIns="0" rIns="0" tIns="0" bIns="0">
+            <a:spAutoFit/>
+          </a:bodyPr>
+          <a:lstStyle/>
+          <a:p>
+            <a:pPr algn="l">
+              <a:spcBef>
+                <a:spcPts val="0"/>
+              </a:spcBef>
+            </a:pPr>
+            <a:r>
+              <a:rPr sz="1400" b="0" i="0">
+                <a:solidFill>
+                  <a:srgbClr val="404040"/>
+                </a:solidFill>
+                <a:latin typeface="Calibri"/>
+              </a:rPr>
+              <a:t>Fabrication des pièces (atelier)</a:t>
+            </a:r>
+          </a:p>
+        </p:txBody>
+      </p:sp>
+      <p:sp>
+        <p:nvSpPr>
+          <p:cNvPr id="13" name="TextBox 12"/>
+          <p:cNvSpPr txBox="1"/>
+          <p:nvPr/>
+        </p:nvSpPr>
+        <p:spPr>
+          <a:xfrm>
+            <a:off x="5486400" y="2304288"/>
+            <a:ext cx="1691640" cy="457200"/>
+          </a:xfrm>
+          <a:prstGeom prst="rect">
+            <a:avLst/>
+          </a:prstGeom>
+          <a:noFill/>
+        </p:spPr>
+        <p:txBody>
+          <a:bodyPr wrap="square" anchor="t" lIns="0" rIns="0" tIns="0" bIns="0">
+            <a:spAutoFit/>
+          </a:bodyPr>
+          <a:lstStyle/>
+          <a:p>
+            <a:pPr algn="r">
+              <a:spcBef>
+                <a:spcPts val="0"/>
+              </a:spcBef>
+            </a:pPr>
+            <a:r>
+              <a:rPr sz="1400" b="0" i="0">
+                <a:solidFill>
+                  <a:srgbClr val="404040"/>
+                </a:solidFill>
+                <a:latin typeface="Calibri"/>
+              </a:rPr>
+              <a:t>2 940 €</a:t>
+            </a:r>
+          </a:p>
+        </p:txBody>
+      </p:sp>
+      <p:sp>
+        <p:nvSpPr>
+          <p:cNvPr id="14" name="Rectangle 13"/>
+          <p:cNvSpPr/>
+          <p:nvPr/>
+        </p:nvSpPr>
+        <p:spPr>
+          <a:xfrm>
+            <a:off x="548640" y="2779776"/>
+            <a:ext cx="6766560" cy="566928"/>
+          </a:xfrm>
+          <a:prstGeom prst="rect">
+            <a:avLst/>
+          </a:prstGeom>
+          <a:solidFill>
+            <a:srgbClr val="EAF1F8"/>
+          </a:solidFill>
+          <a:ln>
+            <a:noFill/>
+          </a:ln>
+          <a:effectLst/>
+        </p:spPr>
+        <p:style>
+          <a:lnRef idx="1">
+            <a:schemeClr val="accent1"/>
+          </a:lnRef>
+          <a:fillRef idx="3">
+            <a:schemeClr val="accent1"/>
+          </a:fillRef>
+          <a:effectRef idx="2">
+            <a:schemeClr val="accent1"/>
+          </a:effectRef>
+          <a:fontRef idx="minor">
+            <a:schemeClr val="lt1"/>
+          </a:fontRef>
+        </p:style>
+        <p:txBody>
+          <a:bodyPr rtlCol="0" anchor="ctr"/>
+          <a:lstStyle/>
+          <a:p>
+            <a:pPr algn="ctr"/>
+          </a:p>
+        </p:txBody>
+      </p:sp>
+      <p:sp>
+        <p:nvSpPr>
+          <p:cNvPr id="15" name="TextBox 14"/>
+          <p:cNvSpPr txBox="1"/>
+          <p:nvPr/>
+        </p:nvSpPr>
+        <p:spPr>
+          <a:xfrm>
+            <a:off x="731520" y="2871216"/>
+            <a:ext cx="4937760" cy="457200"/>
+          </a:xfrm>
+          <a:prstGeom prst="rect">
+            <a:avLst/>
+          </a:prstGeom>
+          <a:noFill/>
+        </p:spPr>
+        <p:txBody>
+          <a:bodyPr wrap="square" anchor="t" lIns="0" rIns="0" tIns="0" bIns="0">
+            <a:spAutoFit/>
+          </a:bodyPr>
+          <a:lstStyle/>
+          <a:p>
+            <a:pPr algn="l">
+              <a:spcBef>
+                <a:spcPts val="0"/>
+              </a:spcBef>
+            </a:pPr>
+            <a:r>
+              <a:rPr sz="1400" b="0" i="0">
+                <a:solidFill>
+                  <a:srgbClr val="404040"/>
+                </a:solidFill>
+                <a:latin typeface="Calibri"/>
+              </a:rPr>
+              <a:t>Équipements achetés à l’extérieur</a:t>
+            </a:r>
+          </a:p>
+        </p:txBody>
+      </p:sp>
+      <p:sp>
+        <p:nvSpPr>
+          <p:cNvPr id="16" name="TextBox 15"/>
+          <p:cNvSpPr txBox="1"/>
+          <p:nvPr/>
+        </p:nvSpPr>
+        <p:spPr>
+          <a:xfrm>
+            <a:off x="5486400" y="2871216"/>
+            <a:ext cx="1691640" cy="457200"/>
+          </a:xfrm>
+          <a:prstGeom prst="rect">
+            <a:avLst/>
+          </a:prstGeom>
+          <a:noFill/>
+        </p:spPr>
+        <p:txBody>
+          <a:bodyPr wrap="square" anchor="t" lIns="0" rIns="0" tIns="0" bIns="0">
+            <a:spAutoFit/>
+          </a:bodyPr>
+          <a:lstStyle/>
+          <a:p>
+            <a:pPr algn="r">
+              <a:spcBef>
+                <a:spcPts val="0"/>
+              </a:spcBef>
+            </a:pPr>
+            <a:r>
+              <a:rPr sz="1400" b="0" i="0">
+                <a:solidFill>
+                  <a:srgbClr val="404040"/>
+                </a:solidFill>
+                <a:latin typeface="Calibri"/>
+              </a:rPr>
+              <a:t>5 200 €</a:t>
+            </a:r>
+          </a:p>
+        </p:txBody>
+      </p:sp>
+      <p:sp>
+        <p:nvSpPr>
+          <p:cNvPr id="17" name="Rectangle 16"/>
+          <p:cNvSpPr/>
+          <p:nvPr/>
+        </p:nvSpPr>
+        <p:spPr>
+          <a:xfrm>
+            <a:off x="548640" y="3346704"/>
+            <a:ext cx="6766560" cy="566928"/>
+          </a:xfrm>
+          <a:prstGeom prst="rect">
+            <a:avLst/>
+          </a:prstGeom>
+          <a:solidFill>
+            <a:srgbClr val="FDECEA"/>
+          </a:solidFill>
+          <a:ln>
+            <a:noFill/>
+          </a:ln>
+          <a:effectLst/>
+        </p:spPr>
+        <p:style>
+          <a:lnRef idx="1">
+            <a:schemeClr val="accent1"/>
+          </a:lnRef>
+          <a:fillRef idx="3">
+            <a:schemeClr val="accent1"/>
+          </a:fillRef>
+          <a:effectRef idx="2">
+            <a:schemeClr val="accent1"/>
+          </a:effectRef>
+          <a:fontRef idx="minor">
+            <a:schemeClr val="lt1"/>
+          </a:fontRef>
+        </p:style>
+        <p:txBody>
+          <a:bodyPr rtlCol="0" anchor="ctr"/>
+          <a:lstStyle/>
+          <a:p>
+            <a:pPr algn="ctr"/>
+          </a:p>
+        </p:txBody>
+      </p:sp>
+      <p:sp>
+        <p:nvSpPr>
+          <p:cNvPr id="18" name="TextBox 17"/>
+          <p:cNvSpPr txBox="1"/>
+          <p:nvPr/>
+        </p:nvSpPr>
+        <p:spPr>
+          <a:xfrm>
+            <a:off x="731520" y="3438144"/>
+            <a:ext cx="4937760" cy="457200"/>
+          </a:xfrm>
+          <a:prstGeom prst="rect">
+            <a:avLst/>
+          </a:prstGeom>
+          <a:noFill/>
+        </p:spPr>
+        <p:txBody>
+          <a:bodyPr wrap="square" anchor="t" lIns="0" rIns="0" tIns="0" bIns="0">
+            <a:spAutoFit/>
+          </a:bodyPr>
+          <a:lstStyle/>
+          <a:p>
+            <a:pPr algn="l">
+              <a:spcBef>
+                <a:spcPts val="0"/>
+              </a:spcBef>
+            </a:pPr>
+            <a:r>
+              <a:rPr sz="1400" b="1" i="0">
+                <a:solidFill>
+                  <a:srgbClr val="1F4E79"/>
+                </a:solidFill>
+                <a:latin typeface="Calibri"/>
+              </a:rPr>
+              <a:t>COÛT TOTAL DE LA PHASE</a:t>
+            </a:r>
+          </a:p>
+        </p:txBody>
+      </p:sp>
+      <p:sp>
+        <p:nvSpPr>
+          <p:cNvPr id="19" name="TextBox 18"/>
+          <p:cNvSpPr txBox="1"/>
+          <p:nvPr/>
+        </p:nvSpPr>
+        <p:spPr>
+          <a:xfrm>
+            <a:off x="5486400" y="3438144"/>
+            <a:ext cx="1691640" cy="457200"/>
+          </a:xfrm>
+          <a:prstGeom prst="rect">
+            <a:avLst/>
+          </a:prstGeom>
+          <a:noFill/>
+        </p:spPr>
+        <p:txBody>
+          <a:bodyPr wrap="square" anchor="t" lIns="0" rIns="0" tIns="0" bIns="0">
+            <a:spAutoFit/>
+          </a:bodyPr>
+          <a:lstStyle/>
+          <a:p>
+            <a:pPr algn="r">
+              <a:spcBef>
+                <a:spcPts val="0"/>
+              </a:spcBef>
+            </a:pPr>
+            <a:r>
+              <a:rPr sz="1400" b="1" i="0">
+                <a:solidFill>
+                  <a:srgbClr val="C0392B"/>
+                </a:solidFill>
+                <a:latin typeface="Calibri"/>
+              </a:rPr>
+              <a:t>49 936 €</a:t>
+            </a:r>
+          </a:p>
+        </p:txBody>
+      </p:sp>
+      <p:sp>
+        <p:nvSpPr>
+          <p:cNvPr id="20" name="Rectangle 19"/>
+          <p:cNvSpPr/>
+          <p:nvPr/>
+        </p:nvSpPr>
+        <p:spPr>
+          <a:xfrm>
+            <a:off x="548640" y="3913632"/>
+            <a:ext cx="6766560" cy="566928"/>
+          </a:xfrm>
+          <a:prstGeom prst="rect">
+            <a:avLst/>
+          </a:prstGeom>
+          <a:solidFill>
+            <a:srgbClr val="EAF1F8"/>
+          </a:solidFill>
+          <a:ln>
+            <a:noFill/>
+          </a:ln>
+          <a:effectLst/>
+        </p:spPr>
+        <p:style>
+          <a:lnRef idx="1">
+            <a:schemeClr val="accent1"/>
+          </a:lnRef>
+          <a:fillRef idx="3">
+            <a:schemeClr val="accent1"/>
+          </a:fillRef>
+          <a:effectRef idx="2">
+            <a:schemeClr val="accent1"/>
+          </a:effectRef>
+          <a:fontRef idx="minor">
+            <a:schemeClr val="lt1"/>
+          </a:fontRef>
+        </p:style>
+        <p:txBody>
+          <a:bodyPr rtlCol="0" anchor="ctr"/>
+          <a:lstStyle/>
+          <a:p>
+            <a:pPr algn="ctr"/>
+          </a:p>
+        </p:txBody>
+      </p:sp>
+      <p:sp>
+        <p:nvSpPr>
+          <p:cNvPr id="21" name="TextBox 20"/>
+          <p:cNvSpPr txBox="1"/>
+          <p:nvPr/>
+        </p:nvSpPr>
+        <p:spPr>
+          <a:xfrm>
+            <a:off x="731520" y="4005072"/>
+            <a:ext cx="4937760" cy="457200"/>
+          </a:xfrm>
+          <a:prstGeom prst="rect">
+            <a:avLst/>
+          </a:prstGeom>
+          <a:noFill/>
+        </p:spPr>
+        <p:txBody>
+          <a:bodyPr wrap="square" anchor="t" lIns="0" rIns="0" tIns="0" bIns="0">
+            <a:spAutoFit/>
+          </a:bodyPr>
+          <a:lstStyle/>
+          <a:p>
+            <a:pPr algn="l">
+              <a:spcBef>
+                <a:spcPts val="0"/>
+              </a:spcBef>
+            </a:pPr>
+            <a:r>
+              <a:rPr sz="1400" b="0" i="0">
+                <a:solidFill>
+                  <a:srgbClr val="404040"/>
+                </a:solidFill>
+                <a:latin typeface="Calibri"/>
+              </a:rPr>
+              <a:t>Enveloppe allouée</a:t>
+            </a:r>
+          </a:p>
+        </p:txBody>
+      </p:sp>
+      <p:sp>
+        <p:nvSpPr>
+          <p:cNvPr id="22" name="TextBox 21"/>
+          <p:cNvSpPr txBox="1"/>
+          <p:nvPr/>
+        </p:nvSpPr>
+        <p:spPr>
+          <a:xfrm>
+            <a:off x="5486400" y="4005072"/>
+            <a:ext cx="1691640" cy="457200"/>
+          </a:xfrm>
+          <a:prstGeom prst="rect">
+            <a:avLst/>
+          </a:prstGeom>
+          <a:noFill/>
+        </p:spPr>
+        <p:txBody>
+          <a:bodyPr wrap="square" anchor="t" lIns="0" rIns="0" tIns="0" bIns="0">
+            <a:spAutoFit/>
+          </a:bodyPr>
+          <a:lstStyle/>
+          <a:p>
+            <a:pPr algn="r">
+              <a:spcBef>
+                <a:spcPts val="0"/>
+              </a:spcBef>
+            </a:pPr>
+            <a:r>
+              <a:rPr sz="1400" b="0" i="0">
+                <a:solidFill>
+                  <a:srgbClr val="404040"/>
+                </a:solidFill>
+                <a:latin typeface="Calibri"/>
+              </a:rPr>
+              <a:t>48 500 €</a:t>
+            </a:r>
+          </a:p>
+        </p:txBody>
+      </p:sp>
+      <p:sp>
+        <p:nvSpPr>
+          <p:cNvPr id="23" name="Rounded Rectangle 22"/>
+          <p:cNvSpPr/>
+          <p:nvPr/>
+        </p:nvSpPr>
+        <p:spPr>
+          <a:xfrm>
+            <a:off x="7589520" y="1645920"/>
+            <a:ext cx="4069080" cy="2194560"/>
+          </a:xfrm>
+          <a:prstGeom prst="roundRect">
+            <a:avLst/>
+          </a:prstGeom>
+          <a:solidFill>
+            <a:srgbClr val="FDECEA"/>
+          </a:solidFill>
+          <a:ln>
+            <a:noFill/>
+          </a:ln>
+          <a:effectLst/>
+        </p:spPr>
+        <p:style>
+          <a:lnRef idx="1">
+            <a:schemeClr val="accent1"/>
+          </a:lnRef>
+          <a:fillRef idx="3">
+            <a:schemeClr val="accent1"/>
+          </a:fillRef>
+          <a:effectRef idx="2">
+            <a:schemeClr val="accent1"/>
+          </a:effectRef>
+          <a:fontRef idx="minor">
+            <a:schemeClr val="lt1"/>
+          </a:fontRef>
+        </p:style>
+        <p:txBody>
+          <a:bodyPr rtlCol="0" anchor="ctr"/>
+          <a:lstStyle/>
+          <a:p>
+            <a:pPr algn="ctr"/>
+          </a:p>
+        </p:txBody>
+      </p:sp>
+      <p:sp>
+        <p:nvSpPr>
+          <p:cNvPr id="24" name="TextBox 23"/>
+          <p:cNvSpPr txBox="1"/>
+          <p:nvPr/>
+        </p:nvSpPr>
+        <p:spPr>
+          <a:xfrm>
+            <a:off x="7772400" y="1828800"/>
+            <a:ext cx="3703320" cy="1920240"/>
+          </a:xfrm>
+          <a:prstGeom prst="rect">
+            <a:avLst/>
+          </a:prstGeom>
+          <a:noFill/>
+        </p:spPr>
+        <p:txBody>
+          <a:bodyPr wrap="square" anchor="t" lIns="0" rIns="0" tIns="0" bIns="0">
+            <a:spAutoFit/>
+          </a:bodyPr>
+          <a:lstStyle/>
+          <a:p>
+            <a:pPr algn="ctr">
+              <a:spcBef>
+                <a:spcPts val="0"/>
+              </a:spcBef>
+              <a:spcAft>
+                <a:spcPts val="400"/>
+              </a:spcAft>
+            </a:pPr>
+            <a:r>
+              <a:rPr sz="1400" b="1" i="0">
+                <a:solidFill>
+                  <a:srgbClr val="C0392B"/>
+                </a:solidFill>
+                <a:latin typeface="Calibri"/>
+              </a:rPr>
+              <a:t>ÉCART</a:t>
+            </a:r>
+          </a:p>
+          <a:p>
+            <a:pPr algn="ctr">
+              <a:spcBef>
+                <a:spcPts val="0"/>
+              </a:spcBef>
+              <a:spcAft>
+                <a:spcPts val="400"/>
+              </a:spcAft>
+            </a:pPr>
+            <a:r>
+              <a:rPr sz="3400" b="1" i="0">
+                <a:solidFill>
+                  <a:srgbClr val="C0392B"/>
+                </a:solidFill>
+                <a:latin typeface="Calibri"/>
+              </a:rPr>
+              <a:t>+ 1 436 €</a:t>
+            </a:r>
+          </a:p>
+          <a:p>
+            <a:pPr algn="ctr">
+              <a:spcBef>
+                <a:spcPts val="0"/>
+              </a:spcBef>
+            </a:pPr>
+            <a:r>
+              <a:rPr sz="1350" b="0" i="0">
+                <a:solidFill>
+                  <a:srgbClr val="404040"/>
+                </a:solidFill>
+                <a:latin typeface="Calibri"/>
+              </a:rPr>
+              <a:t>Dépassement ≈ 3 % : phase légèrement déficitaire.</a:t>
+            </a:r>
+          </a:p>
+        </p:txBody>
+      </p:sp>
+      <p:sp>
+        <p:nvSpPr>
+          <p:cNvPr id="25" name="TextBox 24"/>
+          <p:cNvSpPr txBox="1"/>
+          <p:nvPr/>
+        </p:nvSpPr>
+        <p:spPr>
+          <a:xfrm>
+            <a:off x="7589520" y="4114800"/>
+            <a:ext cx="4069080" cy="457200"/>
+          </a:xfrm>
+          <a:prstGeom prst="rect">
+            <a:avLst/>
+          </a:prstGeom>
+          <a:noFill/>
+        </p:spPr>
+        <p:txBody>
+          <a:bodyPr wrap="square" anchor="t" lIns="0" rIns="0" tIns="0" bIns="0">
+            <a:spAutoFit/>
+          </a:bodyPr>
+          <a:lstStyle/>
+          <a:p>
+            <a:pPr algn="l">
+              <a:spcBef>
+                <a:spcPts val="0"/>
+              </a:spcBef>
+            </a:pPr>
+            <a:r>
+              <a:rPr sz="1450" b="1" i="0">
+                <a:solidFill>
+                  <a:srgbClr val="1F4E79"/>
+                </a:solidFill>
+                <a:latin typeface="Calibri"/>
+              </a:rPr>
+              <a:t>Retour à l’équilibre</a:t>
+            </a:r>
+          </a:p>
+        </p:txBody>
+      </p:sp>
+      <p:sp>
+        <p:nvSpPr>
+          <p:cNvPr id="26" name="TextBox 25"/>
+          <p:cNvSpPr txBox="1"/>
+          <p:nvPr/>
+        </p:nvSpPr>
+        <p:spPr>
+          <a:xfrm>
+            <a:off x="7589520" y="4572000"/>
+            <a:ext cx="4114800" cy="1828800"/>
+          </a:xfrm>
+          <a:prstGeom prst="rect">
+            <a:avLst/>
+          </a:prstGeom>
+          <a:noFill/>
+        </p:spPr>
+        <p:txBody>
+          <a:bodyPr wrap="square" anchor="t" lIns="0" rIns="0" tIns="0" bIns="0">
+            <a:spAutoFit/>
+          </a:bodyPr>
+          <a:lstStyle/>
+          <a:p>
+            <a:pPr algn="l">
+              <a:spcBef>
+                <a:spcPts val="0"/>
+              </a:spcBef>
+              <a:spcAft>
+                <a:spcPts val="600"/>
+              </a:spcAft>
+            </a:pPr>
+            <a:r>
+              <a:rPr sz="1300" b="0" i="0">
+                <a:solidFill>
+                  <a:srgbClr val="404040"/>
+                </a:solidFill>
+                <a:latin typeface="Calibri"/>
+              </a:rPr>
+              <a:t>•  Alléger les grosses tâches ouvrier (S, F, J).</a:t>
+            </a:r>
+          </a:p>
+          <a:p>
+            <a:pPr algn="l">
+              <a:spcBef>
+                <a:spcPts val="0"/>
+              </a:spcBef>
+              <a:spcAft>
+                <a:spcPts val="600"/>
+              </a:spcAft>
+            </a:pPr>
+            <a:r>
+              <a:rPr sz="1300" b="0" i="0">
+                <a:solidFill>
+                  <a:srgbClr val="404040"/>
+                </a:solidFill>
+                <a:latin typeface="Calibri"/>
+              </a:rPr>
+              <a:t>•  Renégocier équipements / devis atelier.</a:t>
+            </a:r>
+          </a:p>
+          <a:p>
+            <a:pPr algn="l">
+              <a:spcBef>
+                <a:spcPts val="0"/>
+              </a:spcBef>
+              <a:spcAft>
+                <a:spcPts val="600"/>
+              </a:spcAft>
+            </a:pPr>
+            <a:r>
+              <a:rPr sz="1300" b="0" i="0">
+                <a:solidFill>
+                  <a:srgbClr val="404040"/>
+                </a:solidFill>
+                <a:latin typeface="Calibri"/>
+              </a:rPr>
+              <a:t>•  Basculer des heures ingénieur vers technicien.</a:t>
+            </a:r>
+          </a:p>
+        </p:txBody>
+      </p:sp>
     </p:spTree>
   </p:cSld>
   <p:clrMapOvr>
